--- a/krakenkoffee/design/kraken_koffee_design.pptx
+++ b/krakenkoffee/design/kraken_koffee_design.pptx
@@ -2,18 +2,18 @@
 <file path=ppt/presentation.xml><?xml version="1.0" encoding="utf-8"?>
 <p:presentation xmlns:a="http://schemas.openxmlformats.org/drawingml/2006/main" xmlns:r="http://schemas.openxmlformats.org/officeDocument/2006/relationships" xmlns:p="http://schemas.openxmlformats.org/presentationml/2006/main" saveSubsetFonts="1">
   <p:sldMasterIdLst>
-    <p:sldMasterId id="2147483648" r:id="rId1"/>
+    <p:sldMasterId id="2147483672" r:id="rId1"/>
   </p:sldMasterIdLst>
   <p:sldIdLst>
     <p:sldId id="256" r:id="rId2"/>
   </p:sldIdLst>
-  <p:sldSz cx="12192000" cy="6858000"/>
+  <p:sldSz cx="12239625" cy="27360563"/>
   <p:notesSz cx="6858000" cy="9144000"/>
   <p:defaultTextStyle>
     <a:defPPr>
-      <a:defRPr lang="en-FI"/>
+      <a:defRPr lang="en-US"/>
     </a:defPPr>
-    <a:lvl1pPr marL="0" algn="l" defTabSz="914400" rtl="0" eaLnBrk="1" latinLnBrk="0" hangingPunct="1">
+    <a:lvl1pPr marL="0" algn="l" defTabSz="457200" rtl="0" eaLnBrk="1" latinLnBrk="0" hangingPunct="1">
       <a:defRPr sz="1800" kern="1200">
         <a:solidFill>
           <a:schemeClr val="tx1"/>
@@ -23,7 +23,7 @@
         <a:cs typeface="+mn-cs"/>
       </a:defRPr>
     </a:lvl1pPr>
-    <a:lvl2pPr marL="457200" algn="l" defTabSz="914400" rtl="0" eaLnBrk="1" latinLnBrk="0" hangingPunct="1">
+    <a:lvl2pPr marL="457200" algn="l" defTabSz="457200" rtl="0" eaLnBrk="1" latinLnBrk="0" hangingPunct="1">
       <a:defRPr sz="1800" kern="1200">
         <a:solidFill>
           <a:schemeClr val="tx1"/>
@@ -33,7 +33,7 @@
         <a:cs typeface="+mn-cs"/>
       </a:defRPr>
     </a:lvl2pPr>
-    <a:lvl3pPr marL="914400" algn="l" defTabSz="914400" rtl="0" eaLnBrk="1" latinLnBrk="0" hangingPunct="1">
+    <a:lvl3pPr marL="914400" algn="l" defTabSz="457200" rtl="0" eaLnBrk="1" latinLnBrk="0" hangingPunct="1">
       <a:defRPr sz="1800" kern="1200">
         <a:solidFill>
           <a:schemeClr val="tx1"/>
@@ -43,7 +43,7 @@
         <a:cs typeface="+mn-cs"/>
       </a:defRPr>
     </a:lvl3pPr>
-    <a:lvl4pPr marL="1371600" algn="l" defTabSz="914400" rtl="0" eaLnBrk="1" latinLnBrk="0" hangingPunct="1">
+    <a:lvl4pPr marL="1371600" algn="l" defTabSz="457200" rtl="0" eaLnBrk="1" latinLnBrk="0" hangingPunct="1">
       <a:defRPr sz="1800" kern="1200">
         <a:solidFill>
           <a:schemeClr val="tx1"/>
@@ -53,7 +53,7 @@
         <a:cs typeface="+mn-cs"/>
       </a:defRPr>
     </a:lvl4pPr>
-    <a:lvl5pPr marL="1828800" algn="l" defTabSz="914400" rtl="0" eaLnBrk="1" latinLnBrk="0" hangingPunct="1">
+    <a:lvl5pPr marL="1828800" algn="l" defTabSz="457200" rtl="0" eaLnBrk="1" latinLnBrk="0" hangingPunct="1">
       <a:defRPr sz="1800" kern="1200">
         <a:solidFill>
           <a:schemeClr val="tx1"/>
@@ -63,7 +63,7 @@
         <a:cs typeface="+mn-cs"/>
       </a:defRPr>
     </a:lvl5pPr>
-    <a:lvl6pPr marL="2286000" algn="l" defTabSz="914400" rtl="0" eaLnBrk="1" latinLnBrk="0" hangingPunct="1">
+    <a:lvl6pPr marL="2286000" algn="l" defTabSz="457200" rtl="0" eaLnBrk="1" latinLnBrk="0" hangingPunct="1">
       <a:defRPr sz="1800" kern="1200">
         <a:solidFill>
           <a:schemeClr val="tx1"/>
@@ -73,7 +73,7 @@
         <a:cs typeface="+mn-cs"/>
       </a:defRPr>
     </a:lvl6pPr>
-    <a:lvl7pPr marL="2743200" algn="l" defTabSz="914400" rtl="0" eaLnBrk="1" latinLnBrk="0" hangingPunct="1">
+    <a:lvl7pPr marL="2743200" algn="l" defTabSz="457200" rtl="0" eaLnBrk="1" latinLnBrk="0" hangingPunct="1">
       <a:defRPr sz="1800" kern="1200">
         <a:solidFill>
           <a:schemeClr val="tx1"/>
@@ -83,7 +83,7 @@
         <a:cs typeface="+mn-cs"/>
       </a:defRPr>
     </a:lvl7pPr>
-    <a:lvl8pPr marL="3200400" algn="l" defTabSz="914400" rtl="0" eaLnBrk="1" latinLnBrk="0" hangingPunct="1">
+    <a:lvl8pPr marL="3200400" algn="l" defTabSz="457200" rtl="0" eaLnBrk="1" latinLnBrk="0" hangingPunct="1">
       <a:defRPr sz="1800" kern="1200">
         <a:solidFill>
           <a:schemeClr val="tx1"/>
@@ -93,7 +93,7 @@
         <a:cs typeface="+mn-cs"/>
       </a:defRPr>
     </a:lvl8pPr>
-    <a:lvl9pPr marL="3657600" algn="l" defTabSz="914400" rtl="0" eaLnBrk="1" latinLnBrk="0" hangingPunct="1">
+    <a:lvl9pPr marL="3657600" algn="l" defTabSz="457200" rtl="0" eaLnBrk="1" latinLnBrk="0" hangingPunct="1">
       <a:defRPr sz="1800" kern="1200">
         <a:solidFill>
           <a:schemeClr val="tx1"/>
@@ -104,6 +104,11 @@
       </a:defRPr>
     </a:lvl9pPr>
   </p:defaultTextStyle>
+  <p:extLst>
+    <p:ext uri="{EFAFB233-063F-42B5-8137-9DF3F51BA10A}">
+      <p15:sldGuideLst xmlns:p15="http://schemas.microsoft.com/office/powerpoint/2012/main"/>
+    </p:ext>
+  </p:extLst>
 </p:presentation>
 </file>
 
@@ -126,13 +131,7 @@
       </p:grpSpPr>
       <p:sp>
         <p:nvSpPr>
-          <p:cNvPr id="2" name="Title 1">
-            <a:extLst>
-              <a:ext uri="{FF2B5EF4-FFF2-40B4-BE49-F238E27FC236}">
-                <a16:creationId xmlns:a16="http://schemas.microsoft.com/office/drawing/2014/main" id="{C345F010-09B2-48C3-E74F-430A442B65F5}"/>
-              </a:ext>
-            </a:extLst>
-          </p:cNvPr>
+          <p:cNvPr id="2" name="Title 1"/>
           <p:cNvSpPr>
             <a:spLocks noGrp="1"/>
           </p:cNvSpPr>
@@ -142,15 +141,15 @@
         </p:nvSpPr>
         <p:spPr>
           <a:xfrm>
-            <a:off x="1524000" y="1122363"/>
-            <a:ext cx="9144000" cy="2387600"/>
+            <a:off x="917972" y="4477761"/>
+            <a:ext cx="10403681" cy="9525529"/>
           </a:xfrm>
         </p:spPr>
         <p:txBody>
           <a:bodyPr anchor="b"/>
           <a:lstStyle>
             <a:lvl1pPr algn="ctr">
-              <a:defRPr sz="6000"/>
+              <a:defRPr sz="8031"/>
             </a:lvl1pPr>
           </a:lstStyle>
           <a:p>
@@ -158,19 +157,13 @@
               <a:rPr lang="en-US"/>
               <a:t>Click to edit Master title style</a:t>
             </a:r>
-            <a:endParaRPr lang="en-FI"/>
-          </a:p>
-        </p:txBody>
-      </p:sp>
-      <p:sp>
-        <p:nvSpPr>
-          <p:cNvPr id="3" name="Subtitle 2">
-            <a:extLst>
-              <a:ext uri="{FF2B5EF4-FFF2-40B4-BE49-F238E27FC236}">
-                <a16:creationId xmlns:a16="http://schemas.microsoft.com/office/drawing/2014/main" id="{DBBEFB65-781E-4AB6-0950-CB34189FE4BD}"/>
-              </a:ext>
-            </a:extLst>
-          </p:cNvPr>
+            <a:endParaRPr lang="en-US" dirty="0"/>
+          </a:p>
+        </p:txBody>
+      </p:sp>
+      <p:sp>
+        <p:nvSpPr>
+          <p:cNvPr id="3" name="Subtitle 2"/>
           <p:cNvSpPr>
             <a:spLocks noGrp="1"/>
           </p:cNvSpPr>
@@ -180,8 +173,8 @@
         </p:nvSpPr>
         <p:spPr>
           <a:xfrm>
-            <a:off x="1524000" y="3602038"/>
-            <a:ext cx="9144000" cy="1655762"/>
+            <a:off x="1529953" y="14370631"/>
+            <a:ext cx="9179719" cy="6605801"/>
           </a:xfrm>
         </p:spPr>
         <p:txBody>
@@ -189,39 +182,39 @@
           <a:lstStyle>
             <a:lvl1pPr marL="0" indent="0" algn="ctr">
               <a:buNone/>
-              <a:defRPr sz="2400"/>
+              <a:defRPr sz="3212"/>
             </a:lvl1pPr>
-            <a:lvl2pPr marL="457200" indent="0" algn="ctr">
-              <a:buNone/>
-              <a:defRPr sz="2000"/>
+            <a:lvl2pPr marL="611962" indent="0" algn="ctr">
+              <a:buNone/>
+              <a:defRPr sz="2677"/>
             </a:lvl2pPr>
-            <a:lvl3pPr marL="914400" indent="0" algn="ctr">
-              <a:buNone/>
-              <a:defRPr sz="1800"/>
+            <a:lvl3pPr marL="1223924" indent="0" algn="ctr">
+              <a:buNone/>
+              <a:defRPr sz="2409"/>
             </a:lvl3pPr>
-            <a:lvl4pPr marL="1371600" indent="0" algn="ctr">
-              <a:buNone/>
-              <a:defRPr sz="1600"/>
+            <a:lvl4pPr marL="1835887" indent="0" algn="ctr">
+              <a:buNone/>
+              <a:defRPr sz="2142"/>
             </a:lvl4pPr>
-            <a:lvl5pPr marL="1828800" indent="0" algn="ctr">
-              <a:buNone/>
-              <a:defRPr sz="1600"/>
+            <a:lvl5pPr marL="2447849" indent="0" algn="ctr">
+              <a:buNone/>
+              <a:defRPr sz="2142"/>
             </a:lvl5pPr>
-            <a:lvl6pPr marL="2286000" indent="0" algn="ctr">
-              <a:buNone/>
-              <a:defRPr sz="1600"/>
+            <a:lvl6pPr marL="3059811" indent="0" algn="ctr">
+              <a:buNone/>
+              <a:defRPr sz="2142"/>
             </a:lvl6pPr>
-            <a:lvl7pPr marL="2743200" indent="0" algn="ctr">
-              <a:buNone/>
-              <a:defRPr sz="1600"/>
+            <a:lvl7pPr marL="3671773" indent="0" algn="ctr">
+              <a:buNone/>
+              <a:defRPr sz="2142"/>
             </a:lvl7pPr>
-            <a:lvl8pPr marL="3200400" indent="0" algn="ctr">
-              <a:buNone/>
-              <a:defRPr sz="1600"/>
+            <a:lvl8pPr marL="4283735" indent="0" algn="ctr">
+              <a:buNone/>
+              <a:defRPr sz="2142"/>
             </a:lvl8pPr>
-            <a:lvl9pPr marL="3657600" indent="0" algn="ctr">
-              <a:buNone/>
-              <a:defRPr sz="1600"/>
+            <a:lvl9pPr marL="4895698" indent="0" algn="ctr">
+              <a:buNone/>
+              <a:defRPr sz="2142"/>
             </a:lvl9pPr>
           </a:lstStyle>
           <a:p>
@@ -229,19 +222,13 @@
               <a:rPr lang="en-US"/>
               <a:t>Click to edit Master subtitle style</a:t>
             </a:r>
-            <a:endParaRPr lang="en-FI"/>
-          </a:p>
-        </p:txBody>
-      </p:sp>
-      <p:sp>
-        <p:nvSpPr>
-          <p:cNvPr id="4" name="Date Placeholder 3">
-            <a:extLst>
-              <a:ext uri="{FF2B5EF4-FFF2-40B4-BE49-F238E27FC236}">
-                <a16:creationId xmlns:a16="http://schemas.microsoft.com/office/drawing/2014/main" id="{BBC00B0E-A466-FEF3-6795-526728510198}"/>
-              </a:ext>
-            </a:extLst>
-          </p:cNvPr>
+            <a:endParaRPr lang="en-US" dirty="0"/>
+          </a:p>
+        </p:txBody>
+      </p:sp>
+      <p:sp>
+        <p:nvSpPr>
+          <p:cNvPr id="4" name="Date Placeholder 3"/>
           <p:cNvSpPr>
             <a:spLocks noGrp="1"/>
           </p:cNvSpPr>
@@ -256,7 +243,7 @@
           <a:p>
             <a:fld id="{AD815D44-5D2A-41C5-A12A-A64B72DF3BE7}" type="datetimeFigureOut">
               <a:rPr lang="en-FI" smtClean="0"/>
-              <a:t>05/10/2025</a:t>
+              <a:t>11/10/2025</a:t>
             </a:fld>
             <a:endParaRPr lang="en-FI"/>
           </a:p>
@@ -264,13 +251,7 @@
       </p:sp>
       <p:sp>
         <p:nvSpPr>
-          <p:cNvPr id="5" name="Footer Placeholder 4">
-            <a:extLst>
-              <a:ext uri="{FF2B5EF4-FFF2-40B4-BE49-F238E27FC236}">
-                <a16:creationId xmlns:a16="http://schemas.microsoft.com/office/drawing/2014/main" id="{183449F3-3E55-460B-65DE-85F84F529875}"/>
-              </a:ext>
-            </a:extLst>
-          </p:cNvPr>
+          <p:cNvPr id="5" name="Footer Placeholder 4"/>
           <p:cNvSpPr>
             <a:spLocks noGrp="1"/>
           </p:cNvSpPr>
@@ -289,13 +270,7 @@
       </p:sp>
       <p:sp>
         <p:nvSpPr>
-          <p:cNvPr id="6" name="Slide Number Placeholder 5">
-            <a:extLst>
-              <a:ext uri="{FF2B5EF4-FFF2-40B4-BE49-F238E27FC236}">
-                <a16:creationId xmlns:a16="http://schemas.microsoft.com/office/drawing/2014/main" id="{56899EA5-777D-4AAF-687A-80E41EAB5AB6}"/>
-              </a:ext>
-            </a:extLst>
-          </p:cNvPr>
+          <p:cNvPr id="6" name="Slide Number Placeholder 5"/>
           <p:cNvSpPr>
             <a:spLocks noGrp="1"/>
           </p:cNvSpPr>
@@ -319,7 +294,7 @@
     </p:spTree>
     <p:extLst>
       <p:ext uri="{BB962C8B-B14F-4D97-AF65-F5344CB8AC3E}">
-        <p14:creationId xmlns:p14="http://schemas.microsoft.com/office/powerpoint/2010/main" val="3741891296"/>
+        <p14:creationId xmlns:p14="http://schemas.microsoft.com/office/powerpoint/2010/main" val="1569050583"/>
       </p:ext>
     </p:extLst>
   </p:cSld>
@@ -348,13 +323,7 @@
       </p:grpSpPr>
       <p:sp>
         <p:nvSpPr>
-          <p:cNvPr id="2" name="Title 1">
-            <a:extLst>
-              <a:ext uri="{FF2B5EF4-FFF2-40B4-BE49-F238E27FC236}">
-                <a16:creationId xmlns:a16="http://schemas.microsoft.com/office/drawing/2014/main" id="{1F220DBC-4F81-B6E4-4B6A-70F8C1E71081}"/>
-              </a:ext>
-            </a:extLst>
-          </p:cNvPr>
+          <p:cNvPr id="2" name="Title 1"/>
           <p:cNvSpPr>
             <a:spLocks noGrp="1"/>
           </p:cNvSpPr>
@@ -371,19 +340,13 @@
               <a:rPr lang="en-US"/>
               <a:t>Click to edit Master title style</a:t>
             </a:r>
-            <a:endParaRPr lang="en-FI"/>
-          </a:p>
-        </p:txBody>
-      </p:sp>
-      <p:sp>
-        <p:nvSpPr>
-          <p:cNvPr id="3" name="Vertical Text Placeholder 2">
-            <a:extLst>
-              <a:ext uri="{FF2B5EF4-FFF2-40B4-BE49-F238E27FC236}">
-                <a16:creationId xmlns:a16="http://schemas.microsoft.com/office/drawing/2014/main" id="{6661361B-4547-98B7-619B-627112C3690D}"/>
-              </a:ext>
-            </a:extLst>
-          </p:cNvPr>
+            <a:endParaRPr lang="en-US" dirty="0"/>
+          </a:p>
+        </p:txBody>
+      </p:sp>
+      <p:sp>
+        <p:nvSpPr>
+          <p:cNvPr id="3" name="Vertical Text Placeholder 2"/>
           <p:cNvSpPr>
             <a:spLocks noGrp="1"/>
           </p:cNvSpPr>
@@ -429,19 +392,13 @@
               <a:rPr lang="en-US"/>
               <a:t>Fifth level</a:t>
             </a:r>
-            <a:endParaRPr lang="en-FI"/>
-          </a:p>
-        </p:txBody>
-      </p:sp>
-      <p:sp>
-        <p:nvSpPr>
-          <p:cNvPr id="4" name="Date Placeholder 3">
-            <a:extLst>
-              <a:ext uri="{FF2B5EF4-FFF2-40B4-BE49-F238E27FC236}">
-                <a16:creationId xmlns:a16="http://schemas.microsoft.com/office/drawing/2014/main" id="{57796F9F-7636-362B-BF00-62800818F814}"/>
-              </a:ext>
-            </a:extLst>
-          </p:cNvPr>
+            <a:endParaRPr lang="en-US" dirty="0"/>
+          </a:p>
+        </p:txBody>
+      </p:sp>
+      <p:sp>
+        <p:nvSpPr>
+          <p:cNvPr id="4" name="Date Placeholder 3"/>
           <p:cNvSpPr>
             <a:spLocks noGrp="1"/>
           </p:cNvSpPr>
@@ -456,7 +413,7 @@
           <a:p>
             <a:fld id="{AD815D44-5D2A-41C5-A12A-A64B72DF3BE7}" type="datetimeFigureOut">
               <a:rPr lang="en-FI" smtClean="0"/>
-              <a:t>05/10/2025</a:t>
+              <a:t>11/10/2025</a:t>
             </a:fld>
             <a:endParaRPr lang="en-FI"/>
           </a:p>
@@ -464,13 +421,7 @@
       </p:sp>
       <p:sp>
         <p:nvSpPr>
-          <p:cNvPr id="5" name="Footer Placeholder 4">
-            <a:extLst>
-              <a:ext uri="{FF2B5EF4-FFF2-40B4-BE49-F238E27FC236}">
-                <a16:creationId xmlns:a16="http://schemas.microsoft.com/office/drawing/2014/main" id="{A268AB4A-B6A1-6E50-D66D-644119460EDD}"/>
-              </a:ext>
-            </a:extLst>
-          </p:cNvPr>
+          <p:cNvPr id="5" name="Footer Placeholder 4"/>
           <p:cNvSpPr>
             <a:spLocks noGrp="1"/>
           </p:cNvSpPr>
@@ -489,13 +440,7 @@
       </p:sp>
       <p:sp>
         <p:nvSpPr>
-          <p:cNvPr id="6" name="Slide Number Placeholder 5">
-            <a:extLst>
-              <a:ext uri="{FF2B5EF4-FFF2-40B4-BE49-F238E27FC236}">
-                <a16:creationId xmlns:a16="http://schemas.microsoft.com/office/drawing/2014/main" id="{4173ABC6-E0FA-D1F4-35B0-026BE4F8E9B5}"/>
-              </a:ext>
-            </a:extLst>
-          </p:cNvPr>
+          <p:cNvPr id="6" name="Slide Number Placeholder 5"/>
           <p:cNvSpPr>
             <a:spLocks noGrp="1"/>
           </p:cNvSpPr>
@@ -519,7 +464,7 @@
     </p:spTree>
     <p:extLst>
       <p:ext uri="{BB962C8B-B14F-4D97-AF65-F5344CB8AC3E}">
-        <p14:creationId xmlns:p14="http://schemas.microsoft.com/office/powerpoint/2010/main" val="2662427419"/>
+        <p14:creationId xmlns:p14="http://schemas.microsoft.com/office/powerpoint/2010/main" val="1498167514"/>
       </p:ext>
     </p:extLst>
   </p:cSld>
@@ -548,13 +493,7 @@
       </p:grpSpPr>
       <p:sp>
         <p:nvSpPr>
-          <p:cNvPr id="2" name="Vertical Title 1">
-            <a:extLst>
-              <a:ext uri="{FF2B5EF4-FFF2-40B4-BE49-F238E27FC236}">
-                <a16:creationId xmlns:a16="http://schemas.microsoft.com/office/drawing/2014/main" id="{3DC3FE11-99FC-636C-EBBB-C3AD1F228830}"/>
-              </a:ext>
-            </a:extLst>
-          </p:cNvPr>
+          <p:cNvPr id="2" name="Vertical Title 1"/>
           <p:cNvSpPr>
             <a:spLocks noGrp="1"/>
           </p:cNvSpPr>
@@ -564,8 +503,8 @@
         </p:nvSpPr>
         <p:spPr>
           <a:xfrm>
-            <a:off x="8724900" y="365125"/>
-            <a:ext cx="2628900" cy="5811838"/>
+            <a:off x="8758982" y="1456697"/>
+            <a:ext cx="2639169" cy="23186812"/>
           </a:xfrm>
         </p:spPr>
         <p:txBody>
@@ -576,19 +515,13 @@
               <a:rPr lang="en-US"/>
               <a:t>Click to edit Master title style</a:t>
             </a:r>
-            <a:endParaRPr lang="en-FI"/>
-          </a:p>
-        </p:txBody>
-      </p:sp>
-      <p:sp>
-        <p:nvSpPr>
-          <p:cNvPr id="3" name="Vertical Text Placeholder 2">
-            <a:extLst>
-              <a:ext uri="{FF2B5EF4-FFF2-40B4-BE49-F238E27FC236}">
-                <a16:creationId xmlns:a16="http://schemas.microsoft.com/office/drawing/2014/main" id="{F40BD899-9C77-828A-1709-EAFB8D713E81}"/>
-              </a:ext>
-            </a:extLst>
-          </p:cNvPr>
+            <a:endParaRPr lang="en-US" dirty="0"/>
+          </a:p>
+        </p:txBody>
+      </p:sp>
+      <p:sp>
+        <p:nvSpPr>
+          <p:cNvPr id="3" name="Vertical Text Placeholder 2"/>
           <p:cNvSpPr>
             <a:spLocks noGrp="1"/>
           </p:cNvSpPr>
@@ -598,8 +531,8 @@
         </p:nvSpPr>
         <p:spPr>
           <a:xfrm>
-            <a:off x="838200" y="365125"/>
-            <a:ext cx="7734300" cy="5811838"/>
+            <a:off x="841475" y="1456697"/>
+            <a:ext cx="7764512" cy="23186812"/>
           </a:xfrm>
         </p:spPr>
         <p:txBody>
@@ -639,19 +572,13 @@
               <a:rPr lang="en-US"/>
               <a:t>Fifth level</a:t>
             </a:r>
-            <a:endParaRPr lang="en-FI"/>
-          </a:p>
-        </p:txBody>
-      </p:sp>
-      <p:sp>
-        <p:nvSpPr>
-          <p:cNvPr id="4" name="Date Placeholder 3">
-            <a:extLst>
-              <a:ext uri="{FF2B5EF4-FFF2-40B4-BE49-F238E27FC236}">
-                <a16:creationId xmlns:a16="http://schemas.microsoft.com/office/drawing/2014/main" id="{9CCAE7B2-4A81-3257-1520-B4A6E2DB2FCA}"/>
-              </a:ext>
-            </a:extLst>
-          </p:cNvPr>
+            <a:endParaRPr lang="en-US" dirty="0"/>
+          </a:p>
+        </p:txBody>
+      </p:sp>
+      <p:sp>
+        <p:nvSpPr>
+          <p:cNvPr id="4" name="Date Placeholder 3"/>
           <p:cNvSpPr>
             <a:spLocks noGrp="1"/>
           </p:cNvSpPr>
@@ -666,7 +593,7 @@
           <a:p>
             <a:fld id="{AD815D44-5D2A-41C5-A12A-A64B72DF3BE7}" type="datetimeFigureOut">
               <a:rPr lang="en-FI" smtClean="0"/>
-              <a:t>05/10/2025</a:t>
+              <a:t>11/10/2025</a:t>
             </a:fld>
             <a:endParaRPr lang="en-FI"/>
           </a:p>
@@ -674,13 +601,7 @@
       </p:sp>
       <p:sp>
         <p:nvSpPr>
-          <p:cNvPr id="5" name="Footer Placeholder 4">
-            <a:extLst>
-              <a:ext uri="{FF2B5EF4-FFF2-40B4-BE49-F238E27FC236}">
-                <a16:creationId xmlns:a16="http://schemas.microsoft.com/office/drawing/2014/main" id="{AF78707D-DD11-31B5-DE79-9D22DCD7114B}"/>
-              </a:ext>
-            </a:extLst>
-          </p:cNvPr>
+          <p:cNvPr id="5" name="Footer Placeholder 4"/>
           <p:cNvSpPr>
             <a:spLocks noGrp="1"/>
           </p:cNvSpPr>
@@ -699,13 +620,7 @@
       </p:sp>
       <p:sp>
         <p:nvSpPr>
-          <p:cNvPr id="6" name="Slide Number Placeholder 5">
-            <a:extLst>
-              <a:ext uri="{FF2B5EF4-FFF2-40B4-BE49-F238E27FC236}">
-                <a16:creationId xmlns:a16="http://schemas.microsoft.com/office/drawing/2014/main" id="{F80CC62E-0A86-4B2F-1814-705C340EC2F4}"/>
-              </a:ext>
-            </a:extLst>
-          </p:cNvPr>
+          <p:cNvPr id="6" name="Slide Number Placeholder 5"/>
           <p:cNvSpPr>
             <a:spLocks noGrp="1"/>
           </p:cNvSpPr>
@@ -729,7 +644,7 @@
     </p:spTree>
     <p:extLst>
       <p:ext uri="{BB962C8B-B14F-4D97-AF65-F5344CB8AC3E}">
-        <p14:creationId xmlns:p14="http://schemas.microsoft.com/office/powerpoint/2010/main" val="2575194167"/>
+        <p14:creationId xmlns:p14="http://schemas.microsoft.com/office/powerpoint/2010/main" val="756367316"/>
       </p:ext>
     </p:extLst>
   </p:cSld>
@@ -758,13 +673,7 @@
       </p:grpSpPr>
       <p:sp>
         <p:nvSpPr>
-          <p:cNvPr id="2" name="Title 1">
-            <a:extLst>
-              <a:ext uri="{FF2B5EF4-FFF2-40B4-BE49-F238E27FC236}">
-                <a16:creationId xmlns:a16="http://schemas.microsoft.com/office/drawing/2014/main" id="{D5371072-FAFE-5DAD-CB9A-C75371F3B89E}"/>
-              </a:ext>
-            </a:extLst>
-          </p:cNvPr>
+          <p:cNvPr id="2" name="Title 1"/>
           <p:cNvSpPr>
             <a:spLocks noGrp="1"/>
           </p:cNvSpPr>
@@ -781,19 +690,13 @@
               <a:rPr lang="en-US"/>
               <a:t>Click to edit Master title style</a:t>
             </a:r>
-            <a:endParaRPr lang="en-FI"/>
-          </a:p>
-        </p:txBody>
-      </p:sp>
-      <p:sp>
-        <p:nvSpPr>
-          <p:cNvPr id="3" name="Content Placeholder 2">
-            <a:extLst>
-              <a:ext uri="{FF2B5EF4-FFF2-40B4-BE49-F238E27FC236}">
-                <a16:creationId xmlns:a16="http://schemas.microsoft.com/office/drawing/2014/main" id="{535E86D1-8A17-21F2-B4B9-B0E524C51EC5}"/>
-              </a:ext>
-            </a:extLst>
-          </p:cNvPr>
+            <a:endParaRPr lang="en-US" dirty="0"/>
+          </a:p>
+        </p:txBody>
+      </p:sp>
+      <p:sp>
+        <p:nvSpPr>
+          <p:cNvPr id="3" name="Content Placeholder 2"/>
           <p:cNvSpPr>
             <a:spLocks noGrp="1"/>
           </p:cNvSpPr>
@@ -839,19 +742,13 @@
               <a:rPr lang="en-US"/>
               <a:t>Fifth level</a:t>
             </a:r>
-            <a:endParaRPr lang="en-FI"/>
-          </a:p>
-        </p:txBody>
-      </p:sp>
-      <p:sp>
-        <p:nvSpPr>
-          <p:cNvPr id="4" name="Date Placeholder 3">
-            <a:extLst>
-              <a:ext uri="{FF2B5EF4-FFF2-40B4-BE49-F238E27FC236}">
-                <a16:creationId xmlns:a16="http://schemas.microsoft.com/office/drawing/2014/main" id="{E85D6E4C-6EB6-A318-B5F3-98592235F9D4}"/>
-              </a:ext>
-            </a:extLst>
-          </p:cNvPr>
+            <a:endParaRPr lang="en-US" dirty="0"/>
+          </a:p>
+        </p:txBody>
+      </p:sp>
+      <p:sp>
+        <p:nvSpPr>
+          <p:cNvPr id="4" name="Date Placeholder 3"/>
           <p:cNvSpPr>
             <a:spLocks noGrp="1"/>
           </p:cNvSpPr>
@@ -866,7 +763,7 @@
           <a:p>
             <a:fld id="{AD815D44-5D2A-41C5-A12A-A64B72DF3BE7}" type="datetimeFigureOut">
               <a:rPr lang="en-FI" smtClean="0"/>
-              <a:t>05/10/2025</a:t>
+              <a:t>11/10/2025</a:t>
             </a:fld>
             <a:endParaRPr lang="en-FI"/>
           </a:p>
@@ -874,13 +771,7 @@
       </p:sp>
       <p:sp>
         <p:nvSpPr>
-          <p:cNvPr id="5" name="Footer Placeholder 4">
-            <a:extLst>
-              <a:ext uri="{FF2B5EF4-FFF2-40B4-BE49-F238E27FC236}">
-                <a16:creationId xmlns:a16="http://schemas.microsoft.com/office/drawing/2014/main" id="{E0489B9B-8ABE-DE34-DDF7-53643E650E2E}"/>
-              </a:ext>
-            </a:extLst>
-          </p:cNvPr>
+          <p:cNvPr id="5" name="Footer Placeholder 4"/>
           <p:cNvSpPr>
             <a:spLocks noGrp="1"/>
           </p:cNvSpPr>
@@ -899,13 +790,7 @@
       </p:sp>
       <p:sp>
         <p:nvSpPr>
-          <p:cNvPr id="6" name="Slide Number Placeholder 5">
-            <a:extLst>
-              <a:ext uri="{FF2B5EF4-FFF2-40B4-BE49-F238E27FC236}">
-                <a16:creationId xmlns:a16="http://schemas.microsoft.com/office/drawing/2014/main" id="{814D4DB5-CB0F-4B26-909A-CDA1DC7A7005}"/>
-              </a:ext>
-            </a:extLst>
-          </p:cNvPr>
+          <p:cNvPr id="6" name="Slide Number Placeholder 5"/>
           <p:cNvSpPr>
             <a:spLocks noGrp="1"/>
           </p:cNvSpPr>
@@ -929,7 +814,7 @@
     </p:spTree>
     <p:extLst>
       <p:ext uri="{BB962C8B-B14F-4D97-AF65-F5344CB8AC3E}">
-        <p14:creationId xmlns:p14="http://schemas.microsoft.com/office/powerpoint/2010/main" val="4173623562"/>
+        <p14:creationId xmlns:p14="http://schemas.microsoft.com/office/powerpoint/2010/main" val="4035661151"/>
       </p:ext>
     </p:extLst>
   </p:cSld>
@@ -958,13 +843,7 @@
       </p:grpSpPr>
       <p:sp>
         <p:nvSpPr>
-          <p:cNvPr id="2" name="Title 1">
-            <a:extLst>
-              <a:ext uri="{FF2B5EF4-FFF2-40B4-BE49-F238E27FC236}">
-                <a16:creationId xmlns:a16="http://schemas.microsoft.com/office/drawing/2014/main" id="{EF904477-E8ED-CD0E-145F-4F5AFF063125}"/>
-              </a:ext>
-            </a:extLst>
-          </p:cNvPr>
+          <p:cNvPr id="2" name="Title 1"/>
           <p:cNvSpPr>
             <a:spLocks noGrp="1"/>
           </p:cNvSpPr>
@@ -974,15 +853,15 @@
         </p:nvSpPr>
         <p:spPr>
           <a:xfrm>
-            <a:off x="831850" y="1709738"/>
-            <a:ext cx="10515600" cy="2852737"/>
+            <a:off x="835100" y="6821148"/>
+            <a:ext cx="10556677" cy="11381232"/>
           </a:xfrm>
         </p:spPr>
         <p:txBody>
           <a:bodyPr anchor="b"/>
           <a:lstStyle>
             <a:lvl1pPr>
-              <a:defRPr sz="6000"/>
+              <a:defRPr sz="8031"/>
             </a:lvl1pPr>
           </a:lstStyle>
           <a:p>
@@ -990,19 +869,13 @@
               <a:rPr lang="en-US"/>
               <a:t>Click to edit Master title style</a:t>
             </a:r>
-            <a:endParaRPr lang="en-FI"/>
-          </a:p>
-        </p:txBody>
-      </p:sp>
-      <p:sp>
-        <p:nvSpPr>
-          <p:cNvPr id="3" name="Text Placeholder 2">
-            <a:extLst>
-              <a:ext uri="{FF2B5EF4-FFF2-40B4-BE49-F238E27FC236}">
-                <a16:creationId xmlns:a16="http://schemas.microsoft.com/office/drawing/2014/main" id="{2D65F3BF-C3DC-8367-3952-FA1560ACAC50}"/>
-              </a:ext>
-            </a:extLst>
-          </p:cNvPr>
+            <a:endParaRPr lang="en-US" dirty="0"/>
+          </a:p>
+        </p:txBody>
+      </p:sp>
+      <p:sp>
+        <p:nvSpPr>
+          <p:cNvPr id="3" name="Text Placeholder 2"/>
           <p:cNvSpPr>
             <a:spLocks noGrp="1"/>
           </p:cNvSpPr>
@@ -1012,8 +885,8 @@
         </p:nvSpPr>
         <p:spPr>
           <a:xfrm>
-            <a:off x="831850" y="4589463"/>
-            <a:ext cx="10515600" cy="1500187"/>
+            <a:off x="835100" y="18310051"/>
+            <a:ext cx="10556677" cy="5985121"/>
           </a:xfrm>
         </p:spPr>
         <p:txBody>
@@ -1021,7 +894,7 @@
           <a:lstStyle>
             <a:lvl1pPr marL="0" indent="0">
               <a:buNone/>
-              <a:defRPr sz="2400">
+              <a:defRPr sz="3212">
                 <a:solidFill>
                   <a:schemeClr val="tx1">
                     <a:tint val="82000"/>
@@ -1029,9 +902,9 @@
                 </a:solidFill>
               </a:defRPr>
             </a:lvl1pPr>
-            <a:lvl2pPr marL="457200" indent="0">
-              <a:buNone/>
-              <a:defRPr sz="2000">
+            <a:lvl2pPr marL="611962" indent="0">
+              <a:buNone/>
+              <a:defRPr sz="2677">
                 <a:solidFill>
                   <a:schemeClr val="tx1">
                     <a:tint val="82000"/>
@@ -1039,9 +912,9 @@
                 </a:solidFill>
               </a:defRPr>
             </a:lvl2pPr>
-            <a:lvl3pPr marL="914400" indent="0">
-              <a:buNone/>
-              <a:defRPr sz="1800">
+            <a:lvl3pPr marL="1223924" indent="0">
+              <a:buNone/>
+              <a:defRPr sz="2409">
                 <a:solidFill>
                   <a:schemeClr val="tx1">
                     <a:tint val="82000"/>
@@ -1049,9 +922,9 @@
                 </a:solidFill>
               </a:defRPr>
             </a:lvl3pPr>
-            <a:lvl4pPr marL="1371600" indent="0">
-              <a:buNone/>
-              <a:defRPr sz="1600">
+            <a:lvl4pPr marL="1835887" indent="0">
+              <a:buNone/>
+              <a:defRPr sz="2142">
                 <a:solidFill>
                   <a:schemeClr val="tx1">
                     <a:tint val="82000"/>
@@ -1059,9 +932,9 @@
                 </a:solidFill>
               </a:defRPr>
             </a:lvl4pPr>
-            <a:lvl5pPr marL="1828800" indent="0">
-              <a:buNone/>
-              <a:defRPr sz="1600">
+            <a:lvl5pPr marL="2447849" indent="0">
+              <a:buNone/>
+              <a:defRPr sz="2142">
                 <a:solidFill>
                   <a:schemeClr val="tx1">
                     <a:tint val="82000"/>
@@ -1069,9 +942,9 @@
                 </a:solidFill>
               </a:defRPr>
             </a:lvl5pPr>
-            <a:lvl6pPr marL="2286000" indent="0">
-              <a:buNone/>
-              <a:defRPr sz="1600">
+            <a:lvl6pPr marL="3059811" indent="0">
+              <a:buNone/>
+              <a:defRPr sz="2142">
                 <a:solidFill>
                   <a:schemeClr val="tx1">
                     <a:tint val="82000"/>
@@ -1079,9 +952,9 @@
                 </a:solidFill>
               </a:defRPr>
             </a:lvl6pPr>
-            <a:lvl7pPr marL="2743200" indent="0">
-              <a:buNone/>
-              <a:defRPr sz="1600">
+            <a:lvl7pPr marL="3671773" indent="0">
+              <a:buNone/>
+              <a:defRPr sz="2142">
                 <a:solidFill>
                   <a:schemeClr val="tx1">
                     <a:tint val="82000"/>
@@ -1089,9 +962,9 @@
                 </a:solidFill>
               </a:defRPr>
             </a:lvl7pPr>
-            <a:lvl8pPr marL="3200400" indent="0">
-              <a:buNone/>
-              <a:defRPr sz="1600">
+            <a:lvl8pPr marL="4283735" indent="0">
+              <a:buNone/>
+              <a:defRPr sz="2142">
                 <a:solidFill>
                   <a:schemeClr val="tx1">
                     <a:tint val="82000"/>
@@ -1099,9 +972,9 @@
                 </a:solidFill>
               </a:defRPr>
             </a:lvl8pPr>
-            <a:lvl9pPr marL="3657600" indent="0">
-              <a:buNone/>
-              <a:defRPr sz="1600">
+            <a:lvl9pPr marL="4895698" indent="0">
+              <a:buNone/>
+              <a:defRPr sz="2142">
                 <a:solidFill>
                   <a:schemeClr val="tx1">
                     <a:tint val="82000"/>
@@ -1121,13 +994,7 @@
       </p:sp>
       <p:sp>
         <p:nvSpPr>
-          <p:cNvPr id="4" name="Date Placeholder 3">
-            <a:extLst>
-              <a:ext uri="{FF2B5EF4-FFF2-40B4-BE49-F238E27FC236}">
-                <a16:creationId xmlns:a16="http://schemas.microsoft.com/office/drawing/2014/main" id="{C07F4379-9C10-D21A-BA36-2278B1621E68}"/>
-              </a:ext>
-            </a:extLst>
-          </p:cNvPr>
+          <p:cNvPr id="4" name="Date Placeholder 3"/>
           <p:cNvSpPr>
             <a:spLocks noGrp="1"/>
           </p:cNvSpPr>
@@ -1142,7 +1009,7 @@
           <a:p>
             <a:fld id="{AD815D44-5D2A-41C5-A12A-A64B72DF3BE7}" type="datetimeFigureOut">
               <a:rPr lang="en-FI" smtClean="0"/>
-              <a:t>05/10/2025</a:t>
+              <a:t>11/10/2025</a:t>
             </a:fld>
             <a:endParaRPr lang="en-FI"/>
           </a:p>
@@ -1150,13 +1017,7 @@
       </p:sp>
       <p:sp>
         <p:nvSpPr>
-          <p:cNvPr id="5" name="Footer Placeholder 4">
-            <a:extLst>
-              <a:ext uri="{FF2B5EF4-FFF2-40B4-BE49-F238E27FC236}">
-                <a16:creationId xmlns:a16="http://schemas.microsoft.com/office/drawing/2014/main" id="{BE83D833-3581-9616-5531-E839CB692962}"/>
-              </a:ext>
-            </a:extLst>
-          </p:cNvPr>
+          <p:cNvPr id="5" name="Footer Placeholder 4"/>
           <p:cNvSpPr>
             <a:spLocks noGrp="1"/>
           </p:cNvSpPr>
@@ -1175,13 +1036,7 @@
       </p:sp>
       <p:sp>
         <p:nvSpPr>
-          <p:cNvPr id="6" name="Slide Number Placeholder 5">
-            <a:extLst>
-              <a:ext uri="{FF2B5EF4-FFF2-40B4-BE49-F238E27FC236}">
-                <a16:creationId xmlns:a16="http://schemas.microsoft.com/office/drawing/2014/main" id="{D7E324C7-A9C7-4F56-A9D9-249CE6231799}"/>
-              </a:ext>
-            </a:extLst>
-          </p:cNvPr>
+          <p:cNvPr id="6" name="Slide Number Placeholder 5"/>
           <p:cNvSpPr>
             <a:spLocks noGrp="1"/>
           </p:cNvSpPr>
@@ -1205,7 +1060,7 @@
     </p:spTree>
     <p:extLst>
       <p:ext uri="{BB962C8B-B14F-4D97-AF65-F5344CB8AC3E}">
-        <p14:creationId xmlns:p14="http://schemas.microsoft.com/office/powerpoint/2010/main" val="2349842875"/>
+        <p14:creationId xmlns:p14="http://schemas.microsoft.com/office/powerpoint/2010/main" val="2121576699"/>
       </p:ext>
     </p:extLst>
   </p:cSld>
@@ -1234,13 +1089,7 @@
       </p:grpSpPr>
       <p:sp>
         <p:nvSpPr>
-          <p:cNvPr id="2" name="Title 1">
-            <a:extLst>
-              <a:ext uri="{FF2B5EF4-FFF2-40B4-BE49-F238E27FC236}">
-                <a16:creationId xmlns:a16="http://schemas.microsoft.com/office/drawing/2014/main" id="{ABEA1A5D-5BCF-2D8B-EC15-9B74BE287A51}"/>
-              </a:ext>
-            </a:extLst>
-          </p:cNvPr>
+          <p:cNvPr id="2" name="Title 1"/>
           <p:cNvSpPr>
             <a:spLocks noGrp="1"/>
           </p:cNvSpPr>
@@ -1257,19 +1106,13 @@
               <a:rPr lang="en-US"/>
               <a:t>Click to edit Master title style</a:t>
             </a:r>
-            <a:endParaRPr lang="en-FI"/>
-          </a:p>
-        </p:txBody>
-      </p:sp>
-      <p:sp>
-        <p:nvSpPr>
-          <p:cNvPr id="3" name="Content Placeholder 2">
-            <a:extLst>
-              <a:ext uri="{FF2B5EF4-FFF2-40B4-BE49-F238E27FC236}">
-                <a16:creationId xmlns:a16="http://schemas.microsoft.com/office/drawing/2014/main" id="{BCE715D2-1C01-F4EF-052D-60CCA2F4D05E}"/>
-              </a:ext>
-            </a:extLst>
-          </p:cNvPr>
+            <a:endParaRPr lang="en-US" dirty="0"/>
+          </a:p>
+        </p:txBody>
+      </p:sp>
+      <p:sp>
+        <p:nvSpPr>
+          <p:cNvPr id="3" name="Content Placeholder 2"/>
           <p:cNvSpPr>
             <a:spLocks noGrp="1"/>
           </p:cNvSpPr>
@@ -1279,8 +1122,8 @@
         </p:nvSpPr>
         <p:spPr>
           <a:xfrm>
-            <a:off x="838200" y="1825625"/>
-            <a:ext cx="5181600" cy="4351338"/>
+            <a:off x="841474" y="7283483"/>
+            <a:ext cx="5201841" cy="17360026"/>
           </a:xfrm>
         </p:spPr>
         <p:txBody>
@@ -1320,19 +1163,13 @@
               <a:rPr lang="en-US"/>
               <a:t>Fifth level</a:t>
             </a:r>
-            <a:endParaRPr lang="en-FI"/>
-          </a:p>
-        </p:txBody>
-      </p:sp>
-      <p:sp>
-        <p:nvSpPr>
-          <p:cNvPr id="4" name="Content Placeholder 3">
-            <a:extLst>
-              <a:ext uri="{FF2B5EF4-FFF2-40B4-BE49-F238E27FC236}">
-                <a16:creationId xmlns:a16="http://schemas.microsoft.com/office/drawing/2014/main" id="{DFF14F00-21F4-8E02-5F4D-F17F407CB470}"/>
-              </a:ext>
-            </a:extLst>
-          </p:cNvPr>
+            <a:endParaRPr lang="en-US" dirty="0"/>
+          </a:p>
+        </p:txBody>
+      </p:sp>
+      <p:sp>
+        <p:nvSpPr>
+          <p:cNvPr id="4" name="Content Placeholder 3"/>
           <p:cNvSpPr>
             <a:spLocks noGrp="1"/>
           </p:cNvSpPr>
@@ -1342,8 +1179,8 @@
         </p:nvSpPr>
         <p:spPr>
           <a:xfrm>
-            <a:off x="6172200" y="1825625"/>
-            <a:ext cx="5181600" cy="4351338"/>
+            <a:off x="6196310" y="7283483"/>
+            <a:ext cx="5201841" cy="17360026"/>
           </a:xfrm>
         </p:spPr>
         <p:txBody>
@@ -1383,19 +1220,13 @@
               <a:rPr lang="en-US"/>
               <a:t>Fifth level</a:t>
             </a:r>
-            <a:endParaRPr lang="en-FI"/>
-          </a:p>
-        </p:txBody>
-      </p:sp>
-      <p:sp>
-        <p:nvSpPr>
-          <p:cNvPr id="5" name="Date Placeholder 4">
-            <a:extLst>
-              <a:ext uri="{FF2B5EF4-FFF2-40B4-BE49-F238E27FC236}">
-                <a16:creationId xmlns:a16="http://schemas.microsoft.com/office/drawing/2014/main" id="{80EBA92B-E35B-8BB0-A59C-A0C4C5494018}"/>
-              </a:ext>
-            </a:extLst>
-          </p:cNvPr>
+            <a:endParaRPr lang="en-US" dirty="0"/>
+          </a:p>
+        </p:txBody>
+      </p:sp>
+      <p:sp>
+        <p:nvSpPr>
+          <p:cNvPr id="5" name="Date Placeholder 4"/>
           <p:cNvSpPr>
             <a:spLocks noGrp="1"/>
           </p:cNvSpPr>
@@ -1410,7 +1241,7 @@
           <a:p>
             <a:fld id="{AD815D44-5D2A-41C5-A12A-A64B72DF3BE7}" type="datetimeFigureOut">
               <a:rPr lang="en-FI" smtClean="0"/>
-              <a:t>05/10/2025</a:t>
+              <a:t>11/10/2025</a:t>
             </a:fld>
             <a:endParaRPr lang="en-FI"/>
           </a:p>
@@ -1418,13 +1249,7 @@
       </p:sp>
       <p:sp>
         <p:nvSpPr>
-          <p:cNvPr id="6" name="Footer Placeholder 5">
-            <a:extLst>
-              <a:ext uri="{FF2B5EF4-FFF2-40B4-BE49-F238E27FC236}">
-                <a16:creationId xmlns:a16="http://schemas.microsoft.com/office/drawing/2014/main" id="{FECD7DCF-759F-A361-E7F8-073F616D6B2B}"/>
-              </a:ext>
-            </a:extLst>
-          </p:cNvPr>
+          <p:cNvPr id="6" name="Footer Placeholder 5"/>
           <p:cNvSpPr>
             <a:spLocks noGrp="1"/>
           </p:cNvSpPr>
@@ -1443,13 +1268,7 @@
       </p:sp>
       <p:sp>
         <p:nvSpPr>
-          <p:cNvPr id="7" name="Slide Number Placeholder 6">
-            <a:extLst>
-              <a:ext uri="{FF2B5EF4-FFF2-40B4-BE49-F238E27FC236}">
-                <a16:creationId xmlns:a16="http://schemas.microsoft.com/office/drawing/2014/main" id="{B30A9613-F38D-AAEC-D8F8-C0F574A85356}"/>
-              </a:ext>
-            </a:extLst>
-          </p:cNvPr>
+          <p:cNvPr id="7" name="Slide Number Placeholder 6"/>
           <p:cNvSpPr>
             <a:spLocks noGrp="1"/>
           </p:cNvSpPr>
@@ -1473,7 +1292,7 @@
     </p:spTree>
     <p:extLst>
       <p:ext uri="{BB962C8B-B14F-4D97-AF65-F5344CB8AC3E}">
-        <p14:creationId xmlns:p14="http://schemas.microsoft.com/office/powerpoint/2010/main" val="3954193845"/>
+        <p14:creationId xmlns:p14="http://schemas.microsoft.com/office/powerpoint/2010/main" val="1625319861"/>
       </p:ext>
     </p:extLst>
   </p:cSld>
@@ -1502,13 +1321,7 @@
       </p:grpSpPr>
       <p:sp>
         <p:nvSpPr>
-          <p:cNvPr id="2" name="Title 1">
-            <a:extLst>
-              <a:ext uri="{FF2B5EF4-FFF2-40B4-BE49-F238E27FC236}">
-                <a16:creationId xmlns:a16="http://schemas.microsoft.com/office/drawing/2014/main" id="{D1B2053D-5D95-DD6F-6309-7B350E49B190}"/>
-              </a:ext>
-            </a:extLst>
-          </p:cNvPr>
+          <p:cNvPr id="2" name="Title 1"/>
           <p:cNvSpPr>
             <a:spLocks noGrp="1"/>
           </p:cNvSpPr>
@@ -1518,8 +1331,8 @@
         </p:nvSpPr>
         <p:spPr>
           <a:xfrm>
-            <a:off x="839788" y="365125"/>
-            <a:ext cx="10515600" cy="1325563"/>
+            <a:off x="843068" y="1456703"/>
+            <a:ext cx="10556677" cy="5288444"/>
           </a:xfrm>
         </p:spPr>
         <p:txBody>
@@ -1530,19 +1343,13 @@
               <a:rPr lang="en-US"/>
               <a:t>Click to edit Master title style</a:t>
             </a:r>
-            <a:endParaRPr lang="en-FI"/>
-          </a:p>
-        </p:txBody>
-      </p:sp>
-      <p:sp>
-        <p:nvSpPr>
-          <p:cNvPr id="3" name="Text Placeholder 2">
-            <a:extLst>
-              <a:ext uri="{FF2B5EF4-FFF2-40B4-BE49-F238E27FC236}">
-                <a16:creationId xmlns:a16="http://schemas.microsoft.com/office/drawing/2014/main" id="{30435A31-C666-4C4C-F6C2-E9FB8908168E}"/>
-              </a:ext>
-            </a:extLst>
-          </p:cNvPr>
+            <a:endParaRPr lang="en-US" dirty="0"/>
+          </a:p>
+        </p:txBody>
+      </p:sp>
+      <p:sp>
+        <p:nvSpPr>
+          <p:cNvPr id="3" name="Text Placeholder 2"/>
           <p:cNvSpPr>
             <a:spLocks noGrp="1"/>
           </p:cNvSpPr>
@@ -1552,8 +1359,8 @@
         </p:nvSpPr>
         <p:spPr>
           <a:xfrm>
-            <a:off x="839788" y="1681163"/>
-            <a:ext cx="5157787" cy="823912"/>
+            <a:off x="843070" y="6707140"/>
+            <a:ext cx="5177934" cy="3287066"/>
           </a:xfrm>
         </p:spPr>
         <p:txBody>
@@ -1561,39 +1368,39 @@
           <a:lstStyle>
             <a:lvl1pPr marL="0" indent="0">
               <a:buNone/>
-              <a:defRPr sz="2400" b="1"/>
+              <a:defRPr sz="3212" b="1"/>
             </a:lvl1pPr>
-            <a:lvl2pPr marL="457200" indent="0">
-              <a:buNone/>
-              <a:defRPr sz="2000" b="1"/>
+            <a:lvl2pPr marL="611962" indent="0">
+              <a:buNone/>
+              <a:defRPr sz="2677" b="1"/>
             </a:lvl2pPr>
-            <a:lvl3pPr marL="914400" indent="0">
-              <a:buNone/>
-              <a:defRPr sz="1800" b="1"/>
+            <a:lvl3pPr marL="1223924" indent="0">
+              <a:buNone/>
+              <a:defRPr sz="2409" b="1"/>
             </a:lvl3pPr>
-            <a:lvl4pPr marL="1371600" indent="0">
-              <a:buNone/>
-              <a:defRPr sz="1600" b="1"/>
+            <a:lvl4pPr marL="1835887" indent="0">
+              <a:buNone/>
+              <a:defRPr sz="2142" b="1"/>
             </a:lvl4pPr>
-            <a:lvl5pPr marL="1828800" indent="0">
-              <a:buNone/>
-              <a:defRPr sz="1600" b="1"/>
+            <a:lvl5pPr marL="2447849" indent="0">
+              <a:buNone/>
+              <a:defRPr sz="2142" b="1"/>
             </a:lvl5pPr>
-            <a:lvl6pPr marL="2286000" indent="0">
-              <a:buNone/>
-              <a:defRPr sz="1600" b="1"/>
+            <a:lvl6pPr marL="3059811" indent="0">
+              <a:buNone/>
+              <a:defRPr sz="2142" b="1"/>
             </a:lvl6pPr>
-            <a:lvl7pPr marL="2743200" indent="0">
-              <a:buNone/>
-              <a:defRPr sz="1600" b="1"/>
+            <a:lvl7pPr marL="3671773" indent="0">
+              <a:buNone/>
+              <a:defRPr sz="2142" b="1"/>
             </a:lvl7pPr>
-            <a:lvl8pPr marL="3200400" indent="0">
-              <a:buNone/>
-              <a:defRPr sz="1600" b="1"/>
+            <a:lvl8pPr marL="4283735" indent="0">
+              <a:buNone/>
+              <a:defRPr sz="2142" b="1"/>
             </a:lvl8pPr>
-            <a:lvl9pPr marL="3657600" indent="0">
-              <a:buNone/>
-              <a:defRPr sz="1600" b="1"/>
+            <a:lvl9pPr marL="4895698" indent="0">
+              <a:buNone/>
+              <a:defRPr sz="2142" b="1"/>
             </a:lvl9pPr>
           </a:lstStyle>
           <a:p>
@@ -1607,13 +1414,7 @@
       </p:sp>
       <p:sp>
         <p:nvSpPr>
-          <p:cNvPr id="4" name="Content Placeholder 3">
-            <a:extLst>
-              <a:ext uri="{FF2B5EF4-FFF2-40B4-BE49-F238E27FC236}">
-                <a16:creationId xmlns:a16="http://schemas.microsoft.com/office/drawing/2014/main" id="{968A65A6-423C-9725-C9FD-37EEC9D082C3}"/>
-              </a:ext>
-            </a:extLst>
-          </p:cNvPr>
+          <p:cNvPr id="4" name="Content Placeholder 3"/>
           <p:cNvSpPr>
             <a:spLocks noGrp="1"/>
           </p:cNvSpPr>
@@ -1623,8 +1424,8 @@
         </p:nvSpPr>
         <p:spPr>
           <a:xfrm>
-            <a:off x="839788" y="2505075"/>
-            <a:ext cx="5157787" cy="3684588"/>
+            <a:off x="843070" y="9994206"/>
+            <a:ext cx="5177934" cy="14699971"/>
           </a:xfrm>
         </p:spPr>
         <p:txBody>
@@ -1664,19 +1465,13 @@
               <a:rPr lang="en-US"/>
               <a:t>Fifth level</a:t>
             </a:r>
-            <a:endParaRPr lang="en-FI"/>
-          </a:p>
-        </p:txBody>
-      </p:sp>
-      <p:sp>
-        <p:nvSpPr>
-          <p:cNvPr id="5" name="Text Placeholder 4">
-            <a:extLst>
-              <a:ext uri="{FF2B5EF4-FFF2-40B4-BE49-F238E27FC236}">
-                <a16:creationId xmlns:a16="http://schemas.microsoft.com/office/drawing/2014/main" id="{C1A46F50-9044-2FB5-B175-F93242B1E518}"/>
-              </a:ext>
-            </a:extLst>
-          </p:cNvPr>
+            <a:endParaRPr lang="en-US" dirty="0"/>
+          </a:p>
+        </p:txBody>
+      </p:sp>
+      <p:sp>
+        <p:nvSpPr>
+          <p:cNvPr id="5" name="Text Placeholder 4"/>
           <p:cNvSpPr>
             <a:spLocks noGrp="1"/>
           </p:cNvSpPr>
@@ -1686,8 +1481,8 @@
         </p:nvSpPr>
         <p:spPr>
           <a:xfrm>
-            <a:off x="6172200" y="1681163"/>
-            <a:ext cx="5183188" cy="823912"/>
+            <a:off x="6196311" y="6707140"/>
+            <a:ext cx="5203435" cy="3287066"/>
           </a:xfrm>
         </p:spPr>
         <p:txBody>
@@ -1695,39 +1490,39 @@
           <a:lstStyle>
             <a:lvl1pPr marL="0" indent="0">
               <a:buNone/>
-              <a:defRPr sz="2400" b="1"/>
+              <a:defRPr sz="3212" b="1"/>
             </a:lvl1pPr>
-            <a:lvl2pPr marL="457200" indent="0">
-              <a:buNone/>
-              <a:defRPr sz="2000" b="1"/>
+            <a:lvl2pPr marL="611962" indent="0">
+              <a:buNone/>
+              <a:defRPr sz="2677" b="1"/>
             </a:lvl2pPr>
-            <a:lvl3pPr marL="914400" indent="0">
-              <a:buNone/>
-              <a:defRPr sz="1800" b="1"/>
+            <a:lvl3pPr marL="1223924" indent="0">
+              <a:buNone/>
+              <a:defRPr sz="2409" b="1"/>
             </a:lvl3pPr>
-            <a:lvl4pPr marL="1371600" indent="0">
-              <a:buNone/>
-              <a:defRPr sz="1600" b="1"/>
+            <a:lvl4pPr marL="1835887" indent="0">
+              <a:buNone/>
+              <a:defRPr sz="2142" b="1"/>
             </a:lvl4pPr>
-            <a:lvl5pPr marL="1828800" indent="0">
-              <a:buNone/>
-              <a:defRPr sz="1600" b="1"/>
+            <a:lvl5pPr marL="2447849" indent="0">
+              <a:buNone/>
+              <a:defRPr sz="2142" b="1"/>
             </a:lvl5pPr>
-            <a:lvl6pPr marL="2286000" indent="0">
-              <a:buNone/>
-              <a:defRPr sz="1600" b="1"/>
+            <a:lvl6pPr marL="3059811" indent="0">
+              <a:buNone/>
+              <a:defRPr sz="2142" b="1"/>
             </a:lvl6pPr>
-            <a:lvl7pPr marL="2743200" indent="0">
-              <a:buNone/>
-              <a:defRPr sz="1600" b="1"/>
+            <a:lvl7pPr marL="3671773" indent="0">
+              <a:buNone/>
+              <a:defRPr sz="2142" b="1"/>
             </a:lvl7pPr>
-            <a:lvl8pPr marL="3200400" indent="0">
-              <a:buNone/>
-              <a:defRPr sz="1600" b="1"/>
+            <a:lvl8pPr marL="4283735" indent="0">
+              <a:buNone/>
+              <a:defRPr sz="2142" b="1"/>
             </a:lvl8pPr>
-            <a:lvl9pPr marL="3657600" indent="0">
-              <a:buNone/>
-              <a:defRPr sz="1600" b="1"/>
+            <a:lvl9pPr marL="4895698" indent="0">
+              <a:buNone/>
+              <a:defRPr sz="2142" b="1"/>
             </a:lvl9pPr>
           </a:lstStyle>
           <a:p>
@@ -1741,13 +1536,7 @@
       </p:sp>
       <p:sp>
         <p:nvSpPr>
-          <p:cNvPr id="6" name="Content Placeholder 5">
-            <a:extLst>
-              <a:ext uri="{FF2B5EF4-FFF2-40B4-BE49-F238E27FC236}">
-                <a16:creationId xmlns:a16="http://schemas.microsoft.com/office/drawing/2014/main" id="{2FA35188-F9C0-50B5-C953-823E543F5334}"/>
-              </a:ext>
-            </a:extLst>
-          </p:cNvPr>
+          <p:cNvPr id="6" name="Content Placeholder 5"/>
           <p:cNvSpPr>
             <a:spLocks noGrp="1"/>
           </p:cNvSpPr>
@@ -1757,8 +1546,8 @@
         </p:nvSpPr>
         <p:spPr>
           <a:xfrm>
-            <a:off x="6172200" y="2505075"/>
-            <a:ext cx="5183188" cy="3684588"/>
+            <a:off x="6196311" y="9994206"/>
+            <a:ext cx="5203435" cy="14699971"/>
           </a:xfrm>
         </p:spPr>
         <p:txBody>
@@ -1798,19 +1587,13 @@
               <a:rPr lang="en-US"/>
               <a:t>Fifth level</a:t>
             </a:r>
-            <a:endParaRPr lang="en-FI"/>
-          </a:p>
-        </p:txBody>
-      </p:sp>
-      <p:sp>
-        <p:nvSpPr>
-          <p:cNvPr id="7" name="Date Placeholder 6">
-            <a:extLst>
-              <a:ext uri="{FF2B5EF4-FFF2-40B4-BE49-F238E27FC236}">
-                <a16:creationId xmlns:a16="http://schemas.microsoft.com/office/drawing/2014/main" id="{A41BB553-2500-0415-C00A-ABB6A14CBA1F}"/>
-              </a:ext>
-            </a:extLst>
-          </p:cNvPr>
+            <a:endParaRPr lang="en-US" dirty="0"/>
+          </a:p>
+        </p:txBody>
+      </p:sp>
+      <p:sp>
+        <p:nvSpPr>
+          <p:cNvPr id="7" name="Date Placeholder 6"/>
           <p:cNvSpPr>
             <a:spLocks noGrp="1"/>
           </p:cNvSpPr>
@@ -1825,7 +1608,7 @@
           <a:p>
             <a:fld id="{AD815D44-5D2A-41C5-A12A-A64B72DF3BE7}" type="datetimeFigureOut">
               <a:rPr lang="en-FI" smtClean="0"/>
-              <a:t>05/10/2025</a:t>
+              <a:t>11/10/2025</a:t>
             </a:fld>
             <a:endParaRPr lang="en-FI"/>
           </a:p>
@@ -1833,13 +1616,7 @@
       </p:sp>
       <p:sp>
         <p:nvSpPr>
-          <p:cNvPr id="8" name="Footer Placeholder 7">
-            <a:extLst>
-              <a:ext uri="{FF2B5EF4-FFF2-40B4-BE49-F238E27FC236}">
-                <a16:creationId xmlns:a16="http://schemas.microsoft.com/office/drawing/2014/main" id="{5E2BA5EC-E367-6962-08ED-CD3DEC58C52C}"/>
-              </a:ext>
-            </a:extLst>
-          </p:cNvPr>
+          <p:cNvPr id="8" name="Footer Placeholder 7"/>
           <p:cNvSpPr>
             <a:spLocks noGrp="1"/>
           </p:cNvSpPr>
@@ -1858,13 +1635,7 @@
       </p:sp>
       <p:sp>
         <p:nvSpPr>
-          <p:cNvPr id="9" name="Slide Number Placeholder 8">
-            <a:extLst>
-              <a:ext uri="{FF2B5EF4-FFF2-40B4-BE49-F238E27FC236}">
-                <a16:creationId xmlns:a16="http://schemas.microsoft.com/office/drawing/2014/main" id="{A36D6BF5-AB8D-91F7-B880-0B5AB5CE78DD}"/>
-              </a:ext>
-            </a:extLst>
-          </p:cNvPr>
+          <p:cNvPr id="9" name="Slide Number Placeholder 8"/>
           <p:cNvSpPr>
             <a:spLocks noGrp="1"/>
           </p:cNvSpPr>
@@ -1888,7 +1659,7 @@
     </p:spTree>
     <p:extLst>
       <p:ext uri="{BB962C8B-B14F-4D97-AF65-F5344CB8AC3E}">
-        <p14:creationId xmlns:p14="http://schemas.microsoft.com/office/powerpoint/2010/main" val="67059848"/>
+        <p14:creationId xmlns:p14="http://schemas.microsoft.com/office/powerpoint/2010/main" val="366383265"/>
       </p:ext>
     </p:extLst>
   </p:cSld>
@@ -1917,13 +1688,7 @@
       </p:grpSpPr>
       <p:sp>
         <p:nvSpPr>
-          <p:cNvPr id="2" name="Title 1">
-            <a:extLst>
-              <a:ext uri="{FF2B5EF4-FFF2-40B4-BE49-F238E27FC236}">
-                <a16:creationId xmlns:a16="http://schemas.microsoft.com/office/drawing/2014/main" id="{C6F4387F-0789-1683-A9E6-6519E3EC26B7}"/>
-              </a:ext>
-            </a:extLst>
-          </p:cNvPr>
+          <p:cNvPr id="2" name="Title 1"/>
           <p:cNvSpPr>
             <a:spLocks noGrp="1"/>
           </p:cNvSpPr>
@@ -1940,19 +1705,13 @@
               <a:rPr lang="en-US"/>
               <a:t>Click to edit Master title style</a:t>
             </a:r>
-            <a:endParaRPr lang="en-FI"/>
-          </a:p>
-        </p:txBody>
-      </p:sp>
-      <p:sp>
-        <p:nvSpPr>
-          <p:cNvPr id="3" name="Date Placeholder 2">
-            <a:extLst>
-              <a:ext uri="{FF2B5EF4-FFF2-40B4-BE49-F238E27FC236}">
-                <a16:creationId xmlns:a16="http://schemas.microsoft.com/office/drawing/2014/main" id="{022DA571-EDD2-0F47-2E56-237E293CB8C0}"/>
-              </a:ext>
-            </a:extLst>
-          </p:cNvPr>
+            <a:endParaRPr lang="en-US" dirty="0"/>
+          </a:p>
+        </p:txBody>
+      </p:sp>
+      <p:sp>
+        <p:nvSpPr>
+          <p:cNvPr id="3" name="Date Placeholder 2"/>
           <p:cNvSpPr>
             <a:spLocks noGrp="1"/>
           </p:cNvSpPr>
@@ -1967,7 +1726,7 @@
           <a:p>
             <a:fld id="{AD815D44-5D2A-41C5-A12A-A64B72DF3BE7}" type="datetimeFigureOut">
               <a:rPr lang="en-FI" smtClean="0"/>
-              <a:t>05/10/2025</a:t>
+              <a:t>11/10/2025</a:t>
             </a:fld>
             <a:endParaRPr lang="en-FI"/>
           </a:p>
@@ -1975,13 +1734,7 @@
       </p:sp>
       <p:sp>
         <p:nvSpPr>
-          <p:cNvPr id="4" name="Footer Placeholder 3">
-            <a:extLst>
-              <a:ext uri="{FF2B5EF4-FFF2-40B4-BE49-F238E27FC236}">
-                <a16:creationId xmlns:a16="http://schemas.microsoft.com/office/drawing/2014/main" id="{F3BDBDA7-2412-3F31-BADF-CB33AE594301}"/>
-              </a:ext>
-            </a:extLst>
-          </p:cNvPr>
+          <p:cNvPr id="4" name="Footer Placeholder 3"/>
           <p:cNvSpPr>
             <a:spLocks noGrp="1"/>
           </p:cNvSpPr>
@@ -2000,13 +1753,7 @@
       </p:sp>
       <p:sp>
         <p:nvSpPr>
-          <p:cNvPr id="5" name="Slide Number Placeholder 4">
-            <a:extLst>
-              <a:ext uri="{FF2B5EF4-FFF2-40B4-BE49-F238E27FC236}">
-                <a16:creationId xmlns:a16="http://schemas.microsoft.com/office/drawing/2014/main" id="{6E609F13-7386-C640-6C82-22163C201C3B}"/>
-              </a:ext>
-            </a:extLst>
-          </p:cNvPr>
+          <p:cNvPr id="5" name="Slide Number Placeholder 4"/>
           <p:cNvSpPr>
             <a:spLocks noGrp="1"/>
           </p:cNvSpPr>
@@ -2030,7 +1777,7 @@
     </p:spTree>
     <p:extLst>
       <p:ext uri="{BB962C8B-B14F-4D97-AF65-F5344CB8AC3E}">
-        <p14:creationId xmlns:p14="http://schemas.microsoft.com/office/powerpoint/2010/main" val="990062935"/>
+        <p14:creationId xmlns:p14="http://schemas.microsoft.com/office/powerpoint/2010/main" val="2239265893"/>
       </p:ext>
     </p:extLst>
   </p:cSld>
@@ -2059,13 +1806,7 @@
       </p:grpSpPr>
       <p:sp>
         <p:nvSpPr>
-          <p:cNvPr id="2" name="Date Placeholder 1">
-            <a:extLst>
-              <a:ext uri="{FF2B5EF4-FFF2-40B4-BE49-F238E27FC236}">
-                <a16:creationId xmlns:a16="http://schemas.microsoft.com/office/drawing/2014/main" id="{578E23C4-8E46-49D6-73BE-3DCBA788622B}"/>
-              </a:ext>
-            </a:extLst>
-          </p:cNvPr>
+          <p:cNvPr id="2" name="Date Placeholder 1"/>
           <p:cNvSpPr>
             <a:spLocks noGrp="1"/>
           </p:cNvSpPr>
@@ -2080,7 +1821,7 @@
           <a:p>
             <a:fld id="{AD815D44-5D2A-41C5-A12A-A64B72DF3BE7}" type="datetimeFigureOut">
               <a:rPr lang="en-FI" smtClean="0"/>
-              <a:t>05/10/2025</a:t>
+              <a:t>11/10/2025</a:t>
             </a:fld>
             <a:endParaRPr lang="en-FI"/>
           </a:p>
@@ -2088,13 +1829,7 @@
       </p:sp>
       <p:sp>
         <p:nvSpPr>
-          <p:cNvPr id="3" name="Footer Placeholder 2">
-            <a:extLst>
-              <a:ext uri="{FF2B5EF4-FFF2-40B4-BE49-F238E27FC236}">
-                <a16:creationId xmlns:a16="http://schemas.microsoft.com/office/drawing/2014/main" id="{1647A72D-71B5-3BC9-7372-AA5B2735FBE9}"/>
-              </a:ext>
-            </a:extLst>
-          </p:cNvPr>
+          <p:cNvPr id="3" name="Footer Placeholder 2"/>
           <p:cNvSpPr>
             <a:spLocks noGrp="1"/>
           </p:cNvSpPr>
@@ -2113,13 +1848,7 @@
       </p:sp>
       <p:sp>
         <p:nvSpPr>
-          <p:cNvPr id="4" name="Slide Number Placeholder 3">
-            <a:extLst>
-              <a:ext uri="{FF2B5EF4-FFF2-40B4-BE49-F238E27FC236}">
-                <a16:creationId xmlns:a16="http://schemas.microsoft.com/office/drawing/2014/main" id="{B6CE252C-41F2-E00D-FC89-FF4DAD540CC6}"/>
-              </a:ext>
-            </a:extLst>
-          </p:cNvPr>
+          <p:cNvPr id="4" name="Slide Number Placeholder 3"/>
           <p:cNvSpPr>
             <a:spLocks noGrp="1"/>
           </p:cNvSpPr>
@@ -2143,7 +1872,7 @@
     </p:spTree>
     <p:extLst>
       <p:ext uri="{BB962C8B-B14F-4D97-AF65-F5344CB8AC3E}">
-        <p14:creationId xmlns:p14="http://schemas.microsoft.com/office/powerpoint/2010/main" val="609335817"/>
+        <p14:creationId xmlns:p14="http://schemas.microsoft.com/office/powerpoint/2010/main" val="2582113750"/>
       </p:ext>
     </p:extLst>
   </p:cSld>
@@ -2172,13 +1901,7 @@
       </p:grpSpPr>
       <p:sp>
         <p:nvSpPr>
-          <p:cNvPr id="2" name="Title 1">
-            <a:extLst>
-              <a:ext uri="{FF2B5EF4-FFF2-40B4-BE49-F238E27FC236}">
-                <a16:creationId xmlns:a16="http://schemas.microsoft.com/office/drawing/2014/main" id="{3FF4AAF9-B3AB-3258-E855-DC9DB5EB31AA}"/>
-              </a:ext>
-            </a:extLst>
-          </p:cNvPr>
+          <p:cNvPr id="2" name="Title 1"/>
           <p:cNvSpPr>
             <a:spLocks noGrp="1"/>
           </p:cNvSpPr>
@@ -2188,15 +1911,15 @@
         </p:nvSpPr>
         <p:spPr>
           <a:xfrm>
-            <a:off x="839788" y="457200"/>
-            <a:ext cx="3932237" cy="1600200"/>
+            <a:off x="843068" y="1824038"/>
+            <a:ext cx="3947598" cy="6384131"/>
           </a:xfrm>
         </p:spPr>
         <p:txBody>
           <a:bodyPr anchor="b"/>
           <a:lstStyle>
             <a:lvl1pPr>
-              <a:defRPr sz="3200"/>
+              <a:defRPr sz="4283"/>
             </a:lvl1pPr>
           </a:lstStyle>
           <a:p>
@@ -2204,19 +1927,13 @@
               <a:rPr lang="en-US"/>
               <a:t>Click to edit Master title style</a:t>
             </a:r>
-            <a:endParaRPr lang="en-FI"/>
-          </a:p>
-        </p:txBody>
-      </p:sp>
-      <p:sp>
-        <p:nvSpPr>
-          <p:cNvPr id="3" name="Content Placeholder 2">
-            <a:extLst>
-              <a:ext uri="{FF2B5EF4-FFF2-40B4-BE49-F238E27FC236}">
-                <a16:creationId xmlns:a16="http://schemas.microsoft.com/office/drawing/2014/main" id="{B547BD27-922A-BBF6-36AC-653AB1A3841B}"/>
-              </a:ext>
-            </a:extLst>
-          </p:cNvPr>
+            <a:endParaRPr lang="en-US" dirty="0"/>
+          </a:p>
+        </p:txBody>
+      </p:sp>
+      <p:sp>
+        <p:nvSpPr>
+          <p:cNvPr id="3" name="Content Placeholder 2"/>
           <p:cNvSpPr>
             <a:spLocks noGrp="1"/>
           </p:cNvSpPr>
@@ -2226,39 +1943,39 @@
         </p:nvSpPr>
         <p:spPr>
           <a:xfrm>
-            <a:off x="5183188" y="987425"/>
-            <a:ext cx="6172200" cy="4873625"/>
+            <a:off x="5203435" y="3939421"/>
+            <a:ext cx="6196310" cy="19443733"/>
           </a:xfrm>
         </p:spPr>
         <p:txBody>
           <a:bodyPr/>
           <a:lstStyle>
             <a:lvl1pPr>
-              <a:defRPr sz="3200"/>
+              <a:defRPr sz="4283"/>
             </a:lvl1pPr>
             <a:lvl2pPr>
-              <a:defRPr sz="2800"/>
+              <a:defRPr sz="3748"/>
             </a:lvl2pPr>
             <a:lvl3pPr>
-              <a:defRPr sz="2400"/>
+              <a:defRPr sz="3212"/>
             </a:lvl3pPr>
             <a:lvl4pPr>
-              <a:defRPr sz="2000"/>
+              <a:defRPr sz="2677"/>
             </a:lvl4pPr>
             <a:lvl5pPr>
-              <a:defRPr sz="2000"/>
+              <a:defRPr sz="2677"/>
             </a:lvl5pPr>
             <a:lvl6pPr>
-              <a:defRPr sz="2000"/>
+              <a:defRPr sz="2677"/>
             </a:lvl6pPr>
             <a:lvl7pPr>
-              <a:defRPr sz="2000"/>
+              <a:defRPr sz="2677"/>
             </a:lvl7pPr>
             <a:lvl8pPr>
-              <a:defRPr sz="2000"/>
+              <a:defRPr sz="2677"/>
             </a:lvl8pPr>
             <a:lvl9pPr>
-              <a:defRPr sz="2000"/>
+              <a:defRPr sz="2677"/>
             </a:lvl9pPr>
           </a:lstStyle>
           <a:p>
@@ -2295,19 +2012,13 @@
               <a:rPr lang="en-US"/>
               <a:t>Fifth level</a:t>
             </a:r>
-            <a:endParaRPr lang="en-FI"/>
-          </a:p>
-        </p:txBody>
-      </p:sp>
-      <p:sp>
-        <p:nvSpPr>
-          <p:cNvPr id="4" name="Text Placeholder 3">
-            <a:extLst>
-              <a:ext uri="{FF2B5EF4-FFF2-40B4-BE49-F238E27FC236}">
-                <a16:creationId xmlns:a16="http://schemas.microsoft.com/office/drawing/2014/main" id="{48D3C676-AAD2-670A-1024-25F5D3EDD899}"/>
-              </a:ext>
-            </a:extLst>
-          </p:cNvPr>
+            <a:endParaRPr lang="en-US" dirty="0"/>
+          </a:p>
+        </p:txBody>
+      </p:sp>
+      <p:sp>
+        <p:nvSpPr>
+          <p:cNvPr id="4" name="Text Placeholder 3"/>
           <p:cNvSpPr>
             <a:spLocks noGrp="1"/>
           </p:cNvSpPr>
@@ -2317,8 +2028,8 @@
         </p:nvSpPr>
         <p:spPr>
           <a:xfrm>
-            <a:off x="839788" y="2057400"/>
-            <a:ext cx="3932237" cy="3811588"/>
+            <a:off x="843068" y="8208169"/>
+            <a:ext cx="3947598" cy="15206648"/>
           </a:xfrm>
         </p:spPr>
         <p:txBody>
@@ -2326,39 +2037,39 @@
           <a:lstStyle>
             <a:lvl1pPr marL="0" indent="0">
               <a:buNone/>
-              <a:defRPr sz="1600"/>
+              <a:defRPr sz="2142"/>
             </a:lvl1pPr>
-            <a:lvl2pPr marL="457200" indent="0">
-              <a:buNone/>
-              <a:defRPr sz="1400"/>
+            <a:lvl2pPr marL="611962" indent="0">
+              <a:buNone/>
+              <a:defRPr sz="1874"/>
             </a:lvl2pPr>
-            <a:lvl3pPr marL="914400" indent="0">
-              <a:buNone/>
-              <a:defRPr sz="1200"/>
+            <a:lvl3pPr marL="1223924" indent="0">
+              <a:buNone/>
+              <a:defRPr sz="1606"/>
             </a:lvl3pPr>
-            <a:lvl4pPr marL="1371600" indent="0">
-              <a:buNone/>
-              <a:defRPr sz="1000"/>
+            <a:lvl4pPr marL="1835887" indent="0">
+              <a:buNone/>
+              <a:defRPr sz="1339"/>
             </a:lvl4pPr>
-            <a:lvl5pPr marL="1828800" indent="0">
-              <a:buNone/>
-              <a:defRPr sz="1000"/>
+            <a:lvl5pPr marL="2447849" indent="0">
+              <a:buNone/>
+              <a:defRPr sz="1339"/>
             </a:lvl5pPr>
-            <a:lvl6pPr marL="2286000" indent="0">
-              <a:buNone/>
-              <a:defRPr sz="1000"/>
+            <a:lvl6pPr marL="3059811" indent="0">
+              <a:buNone/>
+              <a:defRPr sz="1339"/>
             </a:lvl6pPr>
-            <a:lvl7pPr marL="2743200" indent="0">
-              <a:buNone/>
-              <a:defRPr sz="1000"/>
+            <a:lvl7pPr marL="3671773" indent="0">
+              <a:buNone/>
+              <a:defRPr sz="1339"/>
             </a:lvl7pPr>
-            <a:lvl8pPr marL="3200400" indent="0">
-              <a:buNone/>
-              <a:defRPr sz="1000"/>
+            <a:lvl8pPr marL="4283735" indent="0">
+              <a:buNone/>
+              <a:defRPr sz="1339"/>
             </a:lvl8pPr>
-            <a:lvl9pPr marL="3657600" indent="0">
-              <a:buNone/>
-              <a:defRPr sz="1000"/>
+            <a:lvl9pPr marL="4895698" indent="0">
+              <a:buNone/>
+              <a:defRPr sz="1339"/>
             </a:lvl9pPr>
           </a:lstStyle>
           <a:p>
@@ -2372,13 +2083,7 @@
       </p:sp>
       <p:sp>
         <p:nvSpPr>
-          <p:cNvPr id="5" name="Date Placeholder 4">
-            <a:extLst>
-              <a:ext uri="{FF2B5EF4-FFF2-40B4-BE49-F238E27FC236}">
-                <a16:creationId xmlns:a16="http://schemas.microsoft.com/office/drawing/2014/main" id="{554FB087-4B5A-4179-82BE-090F611E2ED1}"/>
-              </a:ext>
-            </a:extLst>
-          </p:cNvPr>
+          <p:cNvPr id="5" name="Date Placeholder 4"/>
           <p:cNvSpPr>
             <a:spLocks noGrp="1"/>
           </p:cNvSpPr>
@@ -2393,7 +2098,7 @@
           <a:p>
             <a:fld id="{AD815D44-5D2A-41C5-A12A-A64B72DF3BE7}" type="datetimeFigureOut">
               <a:rPr lang="en-FI" smtClean="0"/>
-              <a:t>05/10/2025</a:t>
+              <a:t>11/10/2025</a:t>
             </a:fld>
             <a:endParaRPr lang="en-FI"/>
           </a:p>
@@ -2401,13 +2106,7 @@
       </p:sp>
       <p:sp>
         <p:nvSpPr>
-          <p:cNvPr id="6" name="Footer Placeholder 5">
-            <a:extLst>
-              <a:ext uri="{FF2B5EF4-FFF2-40B4-BE49-F238E27FC236}">
-                <a16:creationId xmlns:a16="http://schemas.microsoft.com/office/drawing/2014/main" id="{C6115048-2047-4285-1C97-013C96FEB686}"/>
-              </a:ext>
-            </a:extLst>
-          </p:cNvPr>
+          <p:cNvPr id="6" name="Footer Placeholder 5"/>
           <p:cNvSpPr>
             <a:spLocks noGrp="1"/>
           </p:cNvSpPr>
@@ -2426,13 +2125,7 @@
       </p:sp>
       <p:sp>
         <p:nvSpPr>
-          <p:cNvPr id="7" name="Slide Number Placeholder 6">
-            <a:extLst>
-              <a:ext uri="{FF2B5EF4-FFF2-40B4-BE49-F238E27FC236}">
-                <a16:creationId xmlns:a16="http://schemas.microsoft.com/office/drawing/2014/main" id="{53C15E0F-97F3-3D59-0721-2C60BAB2E04F}"/>
-              </a:ext>
-            </a:extLst>
-          </p:cNvPr>
+          <p:cNvPr id="7" name="Slide Number Placeholder 6"/>
           <p:cNvSpPr>
             <a:spLocks noGrp="1"/>
           </p:cNvSpPr>
@@ -2456,7 +2149,7 @@
     </p:spTree>
     <p:extLst>
       <p:ext uri="{BB962C8B-B14F-4D97-AF65-F5344CB8AC3E}">
-        <p14:creationId xmlns:p14="http://schemas.microsoft.com/office/powerpoint/2010/main" val="2869556190"/>
+        <p14:creationId xmlns:p14="http://schemas.microsoft.com/office/powerpoint/2010/main" val="274831082"/>
       </p:ext>
     </p:extLst>
   </p:cSld>
@@ -2485,13 +2178,7 @@
       </p:grpSpPr>
       <p:sp>
         <p:nvSpPr>
-          <p:cNvPr id="2" name="Title 1">
-            <a:extLst>
-              <a:ext uri="{FF2B5EF4-FFF2-40B4-BE49-F238E27FC236}">
-                <a16:creationId xmlns:a16="http://schemas.microsoft.com/office/drawing/2014/main" id="{F042B885-B50B-6F25-F182-048FD3166A4E}"/>
-              </a:ext>
-            </a:extLst>
-          </p:cNvPr>
+          <p:cNvPr id="2" name="Title 1"/>
           <p:cNvSpPr>
             <a:spLocks noGrp="1"/>
           </p:cNvSpPr>
@@ -2501,15 +2188,15 @@
         </p:nvSpPr>
         <p:spPr>
           <a:xfrm>
-            <a:off x="839788" y="457200"/>
-            <a:ext cx="3932237" cy="1600200"/>
+            <a:off x="843068" y="1824038"/>
+            <a:ext cx="3947598" cy="6384131"/>
           </a:xfrm>
         </p:spPr>
         <p:txBody>
           <a:bodyPr anchor="b"/>
           <a:lstStyle>
             <a:lvl1pPr>
-              <a:defRPr sz="3200"/>
+              <a:defRPr sz="4283"/>
             </a:lvl1pPr>
           </a:lstStyle>
           <a:p>
@@ -2517,21 +2204,15 @@
               <a:rPr lang="en-US"/>
               <a:t>Click to edit Master title style</a:t>
             </a:r>
-            <a:endParaRPr lang="en-FI"/>
-          </a:p>
-        </p:txBody>
-      </p:sp>
-      <p:sp>
-        <p:nvSpPr>
-          <p:cNvPr id="3" name="Picture Placeholder 2">
-            <a:extLst>
-              <a:ext uri="{FF2B5EF4-FFF2-40B4-BE49-F238E27FC236}">
-                <a16:creationId xmlns:a16="http://schemas.microsoft.com/office/drawing/2014/main" id="{828ED240-3A69-E8DD-D74B-55520F281D6F}"/>
-              </a:ext>
-            </a:extLst>
-          </p:cNvPr>
-          <p:cNvSpPr>
-            <a:spLocks noGrp="1"/>
+            <a:endParaRPr lang="en-US" dirty="0"/>
+          </a:p>
+        </p:txBody>
+      </p:sp>
+      <p:sp>
+        <p:nvSpPr>
+          <p:cNvPr id="3" name="Picture Placeholder 2"/>
+          <p:cNvSpPr>
+            <a:spLocks noGrp="1" noChangeAspect="1"/>
           </p:cNvSpPr>
           <p:nvPr>
             <p:ph type="pic" idx="1"/>
@@ -2539,8 +2220,73 @@
         </p:nvSpPr>
         <p:spPr>
           <a:xfrm>
-            <a:off x="5183188" y="987425"/>
-            <a:ext cx="6172200" cy="4873625"/>
+            <a:off x="5203435" y="3939421"/>
+            <a:ext cx="6196310" cy="19443733"/>
+          </a:xfrm>
+        </p:spPr>
+        <p:txBody>
+          <a:bodyPr anchor="t"/>
+          <a:lstStyle>
+            <a:lvl1pPr marL="0" indent="0">
+              <a:buNone/>
+              <a:defRPr sz="4283"/>
+            </a:lvl1pPr>
+            <a:lvl2pPr marL="611962" indent="0">
+              <a:buNone/>
+              <a:defRPr sz="3748"/>
+            </a:lvl2pPr>
+            <a:lvl3pPr marL="1223924" indent="0">
+              <a:buNone/>
+              <a:defRPr sz="3212"/>
+            </a:lvl3pPr>
+            <a:lvl4pPr marL="1835887" indent="0">
+              <a:buNone/>
+              <a:defRPr sz="2677"/>
+            </a:lvl4pPr>
+            <a:lvl5pPr marL="2447849" indent="0">
+              <a:buNone/>
+              <a:defRPr sz="2677"/>
+            </a:lvl5pPr>
+            <a:lvl6pPr marL="3059811" indent="0">
+              <a:buNone/>
+              <a:defRPr sz="2677"/>
+            </a:lvl6pPr>
+            <a:lvl7pPr marL="3671773" indent="0">
+              <a:buNone/>
+              <a:defRPr sz="2677"/>
+            </a:lvl7pPr>
+            <a:lvl8pPr marL="4283735" indent="0">
+              <a:buNone/>
+              <a:defRPr sz="2677"/>
+            </a:lvl8pPr>
+            <a:lvl9pPr marL="4895698" indent="0">
+              <a:buNone/>
+              <a:defRPr sz="2677"/>
+            </a:lvl9pPr>
+          </a:lstStyle>
+          <a:p>
+            <a:r>
+              <a:rPr lang="en-US"/>
+              <a:t>Click icon to add picture</a:t>
+            </a:r>
+            <a:endParaRPr lang="en-US" dirty="0"/>
+          </a:p>
+        </p:txBody>
+      </p:sp>
+      <p:sp>
+        <p:nvSpPr>
+          <p:cNvPr id="4" name="Text Placeholder 3"/>
+          <p:cNvSpPr>
+            <a:spLocks noGrp="1"/>
+          </p:cNvSpPr>
+          <p:nvPr>
+            <p:ph type="body" sz="half" idx="2"/>
+          </p:nvPr>
+        </p:nvSpPr>
+        <p:spPr>
+          <a:xfrm>
+            <a:off x="843068" y="8208169"/>
+            <a:ext cx="3947598" cy="15206648"/>
           </a:xfrm>
         </p:spPr>
         <p:txBody>
@@ -2548,109 +2294,42 @@
           <a:lstStyle>
             <a:lvl1pPr marL="0" indent="0">
               <a:buNone/>
-              <a:defRPr sz="3200"/>
+              <a:defRPr sz="2142"/>
             </a:lvl1pPr>
-            <a:lvl2pPr marL="457200" indent="0">
-              <a:buNone/>
-              <a:defRPr sz="2800"/>
+            <a:lvl2pPr marL="611962" indent="0">
+              <a:buNone/>
+              <a:defRPr sz="1874"/>
             </a:lvl2pPr>
-            <a:lvl3pPr marL="914400" indent="0">
-              <a:buNone/>
-              <a:defRPr sz="2400"/>
+            <a:lvl3pPr marL="1223924" indent="0">
+              <a:buNone/>
+              <a:defRPr sz="1606"/>
             </a:lvl3pPr>
-            <a:lvl4pPr marL="1371600" indent="0">
-              <a:buNone/>
-              <a:defRPr sz="2000"/>
+            <a:lvl4pPr marL="1835887" indent="0">
+              <a:buNone/>
+              <a:defRPr sz="1339"/>
             </a:lvl4pPr>
-            <a:lvl5pPr marL="1828800" indent="0">
-              <a:buNone/>
-              <a:defRPr sz="2000"/>
+            <a:lvl5pPr marL="2447849" indent="0">
+              <a:buNone/>
+              <a:defRPr sz="1339"/>
             </a:lvl5pPr>
-            <a:lvl6pPr marL="2286000" indent="0">
-              <a:buNone/>
-              <a:defRPr sz="2000"/>
+            <a:lvl6pPr marL="3059811" indent="0">
+              <a:buNone/>
+              <a:defRPr sz="1339"/>
             </a:lvl6pPr>
-            <a:lvl7pPr marL="2743200" indent="0">
-              <a:buNone/>
-              <a:defRPr sz="2000"/>
+            <a:lvl7pPr marL="3671773" indent="0">
+              <a:buNone/>
+              <a:defRPr sz="1339"/>
             </a:lvl7pPr>
-            <a:lvl8pPr marL="3200400" indent="0">
-              <a:buNone/>
-              <a:defRPr sz="2000"/>
+            <a:lvl8pPr marL="4283735" indent="0">
+              <a:buNone/>
+              <a:defRPr sz="1339"/>
             </a:lvl8pPr>
-            <a:lvl9pPr marL="3657600" indent="0">
-              <a:buNone/>
-              <a:defRPr sz="2000"/>
+            <a:lvl9pPr marL="4895698" indent="0">
+              <a:buNone/>
+              <a:defRPr sz="1339"/>
             </a:lvl9pPr>
           </a:lstStyle>
           <a:p>
-            <a:endParaRPr lang="en-FI"/>
-          </a:p>
-        </p:txBody>
-      </p:sp>
-      <p:sp>
-        <p:nvSpPr>
-          <p:cNvPr id="4" name="Text Placeholder 3">
-            <a:extLst>
-              <a:ext uri="{FF2B5EF4-FFF2-40B4-BE49-F238E27FC236}">
-                <a16:creationId xmlns:a16="http://schemas.microsoft.com/office/drawing/2014/main" id="{69D096AC-C02D-EA93-8DA3-330EE0326C55}"/>
-              </a:ext>
-            </a:extLst>
-          </p:cNvPr>
-          <p:cNvSpPr>
-            <a:spLocks noGrp="1"/>
-          </p:cNvSpPr>
-          <p:nvPr>
-            <p:ph type="body" sz="half" idx="2"/>
-          </p:nvPr>
-        </p:nvSpPr>
-        <p:spPr>
-          <a:xfrm>
-            <a:off x="839788" y="2057400"/>
-            <a:ext cx="3932237" cy="3811588"/>
-          </a:xfrm>
-        </p:spPr>
-        <p:txBody>
-          <a:bodyPr/>
-          <a:lstStyle>
-            <a:lvl1pPr marL="0" indent="0">
-              <a:buNone/>
-              <a:defRPr sz="1600"/>
-            </a:lvl1pPr>
-            <a:lvl2pPr marL="457200" indent="0">
-              <a:buNone/>
-              <a:defRPr sz="1400"/>
-            </a:lvl2pPr>
-            <a:lvl3pPr marL="914400" indent="0">
-              <a:buNone/>
-              <a:defRPr sz="1200"/>
-            </a:lvl3pPr>
-            <a:lvl4pPr marL="1371600" indent="0">
-              <a:buNone/>
-              <a:defRPr sz="1000"/>
-            </a:lvl4pPr>
-            <a:lvl5pPr marL="1828800" indent="0">
-              <a:buNone/>
-              <a:defRPr sz="1000"/>
-            </a:lvl5pPr>
-            <a:lvl6pPr marL="2286000" indent="0">
-              <a:buNone/>
-              <a:defRPr sz="1000"/>
-            </a:lvl6pPr>
-            <a:lvl7pPr marL="2743200" indent="0">
-              <a:buNone/>
-              <a:defRPr sz="1000"/>
-            </a:lvl7pPr>
-            <a:lvl8pPr marL="3200400" indent="0">
-              <a:buNone/>
-              <a:defRPr sz="1000"/>
-            </a:lvl8pPr>
-            <a:lvl9pPr marL="3657600" indent="0">
-              <a:buNone/>
-              <a:defRPr sz="1000"/>
-            </a:lvl9pPr>
-          </a:lstStyle>
-          <a:p>
             <a:pPr lvl="0"/>
             <a:r>
               <a:rPr lang="en-US"/>
@@ -2661,13 +2340,7 @@
       </p:sp>
       <p:sp>
         <p:nvSpPr>
-          <p:cNvPr id="5" name="Date Placeholder 4">
-            <a:extLst>
-              <a:ext uri="{FF2B5EF4-FFF2-40B4-BE49-F238E27FC236}">
-                <a16:creationId xmlns:a16="http://schemas.microsoft.com/office/drawing/2014/main" id="{65ABB81A-82BB-D8FC-CE57-2F0674BA9176}"/>
-              </a:ext>
-            </a:extLst>
-          </p:cNvPr>
+          <p:cNvPr id="5" name="Date Placeholder 4"/>
           <p:cNvSpPr>
             <a:spLocks noGrp="1"/>
           </p:cNvSpPr>
@@ -2682,7 +2355,7 @@
           <a:p>
             <a:fld id="{AD815D44-5D2A-41C5-A12A-A64B72DF3BE7}" type="datetimeFigureOut">
               <a:rPr lang="en-FI" smtClean="0"/>
-              <a:t>05/10/2025</a:t>
+              <a:t>11/10/2025</a:t>
             </a:fld>
             <a:endParaRPr lang="en-FI"/>
           </a:p>
@@ -2690,13 +2363,7 @@
       </p:sp>
       <p:sp>
         <p:nvSpPr>
-          <p:cNvPr id="6" name="Footer Placeholder 5">
-            <a:extLst>
-              <a:ext uri="{FF2B5EF4-FFF2-40B4-BE49-F238E27FC236}">
-                <a16:creationId xmlns:a16="http://schemas.microsoft.com/office/drawing/2014/main" id="{C0C6F116-A6A9-BEAC-3CD3-730B996F6695}"/>
-              </a:ext>
-            </a:extLst>
-          </p:cNvPr>
+          <p:cNvPr id="6" name="Footer Placeholder 5"/>
           <p:cNvSpPr>
             <a:spLocks noGrp="1"/>
           </p:cNvSpPr>
@@ -2715,13 +2382,7 @@
       </p:sp>
       <p:sp>
         <p:nvSpPr>
-          <p:cNvPr id="7" name="Slide Number Placeholder 6">
-            <a:extLst>
-              <a:ext uri="{FF2B5EF4-FFF2-40B4-BE49-F238E27FC236}">
-                <a16:creationId xmlns:a16="http://schemas.microsoft.com/office/drawing/2014/main" id="{D8141865-BC80-7F86-E281-FC29F037E1A8}"/>
-              </a:ext>
-            </a:extLst>
-          </p:cNvPr>
+          <p:cNvPr id="7" name="Slide Number Placeholder 6"/>
           <p:cNvSpPr>
             <a:spLocks noGrp="1"/>
           </p:cNvSpPr>
@@ -2745,7 +2406,7 @@
     </p:spTree>
     <p:extLst>
       <p:ext uri="{BB962C8B-B14F-4D97-AF65-F5344CB8AC3E}">
-        <p14:creationId xmlns:p14="http://schemas.microsoft.com/office/powerpoint/2010/main" val="2989351083"/>
+        <p14:creationId xmlns:p14="http://schemas.microsoft.com/office/powerpoint/2010/main" val="1735205640"/>
       </p:ext>
     </p:extLst>
   </p:cSld>
@@ -2779,13 +2440,7 @@
       </p:grpSpPr>
       <p:sp>
         <p:nvSpPr>
-          <p:cNvPr id="2" name="Title Placeholder 1">
-            <a:extLst>
-              <a:ext uri="{FF2B5EF4-FFF2-40B4-BE49-F238E27FC236}">
-                <a16:creationId xmlns:a16="http://schemas.microsoft.com/office/drawing/2014/main" id="{A18FBA93-3D61-A6BA-9E69-DABC75F43E5C}"/>
-              </a:ext>
-            </a:extLst>
-          </p:cNvPr>
+          <p:cNvPr id="2" name="Title Placeholder 1"/>
           <p:cNvSpPr>
             <a:spLocks noGrp="1"/>
           </p:cNvSpPr>
@@ -2795,8 +2450,8 @@
         </p:nvSpPr>
         <p:spPr>
           <a:xfrm>
-            <a:off x="838200" y="365125"/>
-            <a:ext cx="10515600" cy="1325563"/>
+            <a:off x="841474" y="1456703"/>
+            <a:ext cx="10556677" cy="5288444"/>
           </a:xfrm>
           <a:prstGeom prst="rect">
             <a:avLst/>
@@ -2812,19 +2467,13 @@
               <a:rPr lang="en-US"/>
               <a:t>Click to edit Master title style</a:t>
             </a:r>
-            <a:endParaRPr lang="en-FI"/>
-          </a:p>
-        </p:txBody>
-      </p:sp>
-      <p:sp>
-        <p:nvSpPr>
-          <p:cNvPr id="3" name="Text Placeholder 2">
-            <a:extLst>
-              <a:ext uri="{FF2B5EF4-FFF2-40B4-BE49-F238E27FC236}">
-                <a16:creationId xmlns:a16="http://schemas.microsoft.com/office/drawing/2014/main" id="{1C9902C4-3EB6-8B1E-0C83-951D43AAAD6A}"/>
-              </a:ext>
-            </a:extLst>
-          </p:cNvPr>
+            <a:endParaRPr lang="en-US" dirty="0"/>
+          </a:p>
+        </p:txBody>
+      </p:sp>
+      <p:sp>
+        <p:nvSpPr>
+          <p:cNvPr id="3" name="Text Placeholder 2"/>
           <p:cNvSpPr>
             <a:spLocks noGrp="1"/>
           </p:cNvSpPr>
@@ -2834,8 +2483,8 @@
         </p:nvSpPr>
         <p:spPr>
           <a:xfrm>
-            <a:off x="838200" y="1825625"/>
-            <a:ext cx="10515600" cy="4351338"/>
+            <a:off x="841474" y="7283483"/>
+            <a:ext cx="10556677" cy="17360026"/>
           </a:xfrm>
           <a:prstGeom prst="rect">
             <a:avLst/>
@@ -2880,19 +2529,13 @@
               <a:rPr lang="en-US"/>
               <a:t>Fifth level</a:t>
             </a:r>
-            <a:endParaRPr lang="en-FI"/>
-          </a:p>
-        </p:txBody>
-      </p:sp>
-      <p:sp>
-        <p:nvSpPr>
-          <p:cNvPr id="4" name="Date Placeholder 3">
-            <a:extLst>
-              <a:ext uri="{FF2B5EF4-FFF2-40B4-BE49-F238E27FC236}">
-                <a16:creationId xmlns:a16="http://schemas.microsoft.com/office/drawing/2014/main" id="{EF9CE187-5CB6-ED01-5912-CB5E93DE31CB}"/>
-              </a:ext>
-            </a:extLst>
-          </p:cNvPr>
+            <a:endParaRPr lang="en-US" dirty="0"/>
+          </a:p>
+        </p:txBody>
+      </p:sp>
+      <p:sp>
+        <p:nvSpPr>
+          <p:cNvPr id="4" name="Date Placeholder 3"/>
           <p:cNvSpPr>
             <a:spLocks noGrp="1"/>
           </p:cNvSpPr>
@@ -2902,8 +2545,8 @@
         </p:nvSpPr>
         <p:spPr>
           <a:xfrm>
-            <a:off x="838200" y="6356350"/>
-            <a:ext cx="2743200" cy="365125"/>
+            <a:off x="841474" y="25359194"/>
+            <a:ext cx="2753916" cy="1456697"/>
           </a:xfrm>
           <a:prstGeom prst="rect">
             <a:avLst/>
@@ -2913,7 +2556,7 @@
           <a:bodyPr vert="horz" lIns="91440" tIns="45720" rIns="91440" bIns="45720" rtlCol="0" anchor="ctr"/>
           <a:lstStyle>
             <a:lvl1pPr algn="l">
-              <a:defRPr sz="1200">
+              <a:defRPr sz="1606">
                 <a:solidFill>
                   <a:schemeClr val="tx1">
                     <a:tint val="82000"/>
@@ -2925,7 +2568,7 @@
           <a:p>
             <a:fld id="{AD815D44-5D2A-41C5-A12A-A64B72DF3BE7}" type="datetimeFigureOut">
               <a:rPr lang="en-FI" smtClean="0"/>
-              <a:t>05/10/2025</a:t>
+              <a:t>11/10/2025</a:t>
             </a:fld>
             <a:endParaRPr lang="en-FI"/>
           </a:p>
@@ -2933,13 +2576,7 @@
       </p:sp>
       <p:sp>
         <p:nvSpPr>
-          <p:cNvPr id="5" name="Footer Placeholder 4">
-            <a:extLst>
-              <a:ext uri="{FF2B5EF4-FFF2-40B4-BE49-F238E27FC236}">
-                <a16:creationId xmlns:a16="http://schemas.microsoft.com/office/drawing/2014/main" id="{07286E65-CDAA-4246-16C3-F024CAE9F7E3}"/>
-              </a:ext>
-            </a:extLst>
-          </p:cNvPr>
+          <p:cNvPr id="5" name="Footer Placeholder 4"/>
           <p:cNvSpPr>
             <a:spLocks noGrp="1"/>
           </p:cNvSpPr>
@@ -2949,8 +2586,8 @@
         </p:nvSpPr>
         <p:spPr>
           <a:xfrm>
-            <a:off x="4038600" y="6356350"/>
-            <a:ext cx="4114800" cy="365125"/>
+            <a:off x="4054376" y="25359194"/>
+            <a:ext cx="4130873" cy="1456697"/>
           </a:xfrm>
           <a:prstGeom prst="rect">
             <a:avLst/>
@@ -2960,7 +2597,7 @@
           <a:bodyPr vert="horz" lIns="91440" tIns="45720" rIns="91440" bIns="45720" rtlCol="0" anchor="ctr"/>
           <a:lstStyle>
             <a:lvl1pPr algn="ctr">
-              <a:defRPr sz="1200">
+              <a:defRPr sz="1606">
                 <a:solidFill>
                   <a:schemeClr val="tx1">
                     <a:tint val="82000"/>
@@ -2976,13 +2613,7 @@
       </p:sp>
       <p:sp>
         <p:nvSpPr>
-          <p:cNvPr id="6" name="Slide Number Placeholder 5">
-            <a:extLst>
-              <a:ext uri="{FF2B5EF4-FFF2-40B4-BE49-F238E27FC236}">
-                <a16:creationId xmlns:a16="http://schemas.microsoft.com/office/drawing/2014/main" id="{63D7CC1D-D979-A256-A6DC-8E051FC5D35A}"/>
-              </a:ext>
-            </a:extLst>
-          </p:cNvPr>
+          <p:cNvPr id="6" name="Slide Number Placeholder 5"/>
           <p:cNvSpPr>
             <a:spLocks noGrp="1"/>
           </p:cNvSpPr>
@@ -2992,8 +2623,8 @@
         </p:nvSpPr>
         <p:spPr>
           <a:xfrm>
-            <a:off x="8610600" y="6356350"/>
-            <a:ext cx="2743200" cy="365125"/>
+            <a:off x="8644235" y="25359194"/>
+            <a:ext cx="2753916" cy="1456697"/>
           </a:xfrm>
           <a:prstGeom prst="rect">
             <a:avLst/>
@@ -3003,7 +2634,7 @@
           <a:bodyPr vert="horz" lIns="91440" tIns="45720" rIns="91440" bIns="45720" rtlCol="0" anchor="ctr"/>
           <a:lstStyle>
             <a:lvl1pPr algn="r">
-              <a:defRPr sz="1200">
+              <a:defRPr sz="1606">
                 <a:solidFill>
                   <a:schemeClr val="tx1">
                     <a:tint val="82000"/>
@@ -3024,27 +2655,27 @@
     </p:spTree>
     <p:extLst>
       <p:ext uri="{BB962C8B-B14F-4D97-AF65-F5344CB8AC3E}">
-        <p14:creationId xmlns:p14="http://schemas.microsoft.com/office/powerpoint/2010/main" val="1255467548"/>
+        <p14:creationId xmlns:p14="http://schemas.microsoft.com/office/powerpoint/2010/main" val="984997166"/>
       </p:ext>
     </p:extLst>
   </p:cSld>
   <p:clrMap bg1="lt1" tx1="dk1" bg2="lt2" tx2="dk2" accent1="accent1" accent2="accent2" accent3="accent3" accent4="accent4" accent5="accent5" accent6="accent6" hlink="hlink" folHlink="folHlink"/>
   <p:sldLayoutIdLst>
-    <p:sldLayoutId id="2147483649" r:id="rId1"/>
-    <p:sldLayoutId id="2147483650" r:id="rId2"/>
-    <p:sldLayoutId id="2147483651" r:id="rId3"/>
-    <p:sldLayoutId id="2147483652" r:id="rId4"/>
-    <p:sldLayoutId id="2147483653" r:id="rId5"/>
-    <p:sldLayoutId id="2147483654" r:id="rId6"/>
-    <p:sldLayoutId id="2147483655" r:id="rId7"/>
-    <p:sldLayoutId id="2147483656" r:id="rId8"/>
-    <p:sldLayoutId id="2147483657" r:id="rId9"/>
-    <p:sldLayoutId id="2147483658" r:id="rId10"/>
-    <p:sldLayoutId id="2147483659" r:id="rId11"/>
+    <p:sldLayoutId id="2147483673" r:id="rId1"/>
+    <p:sldLayoutId id="2147483674" r:id="rId2"/>
+    <p:sldLayoutId id="2147483675" r:id="rId3"/>
+    <p:sldLayoutId id="2147483676" r:id="rId4"/>
+    <p:sldLayoutId id="2147483677" r:id="rId5"/>
+    <p:sldLayoutId id="2147483678" r:id="rId6"/>
+    <p:sldLayoutId id="2147483679" r:id="rId7"/>
+    <p:sldLayoutId id="2147483680" r:id="rId8"/>
+    <p:sldLayoutId id="2147483681" r:id="rId9"/>
+    <p:sldLayoutId id="2147483682" r:id="rId10"/>
+    <p:sldLayoutId id="2147483683" r:id="rId11"/>
   </p:sldLayoutIdLst>
   <p:txStyles>
     <p:titleStyle>
-      <a:lvl1pPr algn="l" defTabSz="914400" rtl="0" eaLnBrk="1" latinLnBrk="0" hangingPunct="1">
+      <a:lvl1pPr algn="l" defTabSz="1223924" rtl="0" eaLnBrk="1" latinLnBrk="0" hangingPunct="1">
         <a:lnSpc>
           <a:spcPct val="90000"/>
         </a:lnSpc>
@@ -3052,7 +2683,7 @@
           <a:spcPct val="0"/>
         </a:spcBef>
         <a:buNone/>
-        <a:defRPr sz="4400" kern="1200">
+        <a:defRPr sz="5889" kern="1200">
           <a:solidFill>
             <a:schemeClr val="tx1"/>
           </a:solidFill>
@@ -3063,16 +2694,16 @@
       </a:lvl1pPr>
     </p:titleStyle>
     <p:bodyStyle>
-      <a:lvl1pPr marL="228600" indent="-228600" algn="l" defTabSz="914400" rtl="0" eaLnBrk="1" latinLnBrk="0" hangingPunct="1">
+      <a:lvl1pPr marL="305981" indent="-305981" algn="l" defTabSz="1223924" rtl="0" eaLnBrk="1" latinLnBrk="0" hangingPunct="1">
         <a:lnSpc>
           <a:spcPct val="90000"/>
         </a:lnSpc>
         <a:spcBef>
-          <a:spcPts val="1000"/>
+          <a:spcPts val="1339"/>
         </a:spcBef>
         <a:buFont typeface="Arial" panose="020B0604020202020204" pitchFamily="34" charset="0"/>
         <a:buChar char="•"/>
-        <a:defRPr sz="2800" kern="1200">
+        <a:defRPr sz="3748" kern="1200">
           <a:solidFill>
             <a:schemeClr val="tx1"/>
           </a:solidFill>
@@ -3081,16 +2712,16 @@
           <a:cs typeface="+mn-cs"/>
         </a:defRPr>
       </a:lvl1pPr>
-      <a:lvl2pPr marL="685800" indent="-228600" algn="l" defTabSz="914400" rtl="0" eaLnBrk="1" latinLnBrk="0" hangingPunct="1">
+      <a:lvl2pPr marL="917943" indent="-305981" algn="l" defTabSz="1223924" rtl="0" eaLnBrk="1" latinLnBrk="0" hangingPunct="1">
         <a:lnSpc>
           <a:spcPct val="90000"/>
         </a:lnSpc>
         <a:spcBef>
-          <a:spcPts val="500"/>
+          <a:spcPts val="669"/>
         </a:spcBef>
         <a:buFont typeface="Arial" panose="020B0604020202020204" pitchFamily="34" charset="0"/>
         <a:buChar char="•"/>
-        <a:defRPr sz="2400" kern="1200">
+        <a:defRPr sz="3212" kern="1200">
           <a:solidFill>
             <a:schemeClr val="tx1"/>
           </a:solidFill>
@@ -3099,16 +2730,16 @@
           <a:cs typeface="+mn-cs"/>
         </a:defRPr>
       </a:lvl2pPr>
-      <a:lvl3pPr marL="1143000" indent="-228600" algn="l" defTabSz="914400" rtl="0" eaLnBrk="1" latinLnBrk="0" hangingPunct="1">
+      <a:lvl3pPr marL="1529906" indent="-305981" algn="l" defTabSz="1223924" rtl="0" eaLnBrk="1" latinLnBrk="0" hangingPunct="1">
         <a:lnSpc>
           <a:spcPct val="90000"/>
         </a:lnSpc>
         <a:spcBef>
-          <a:spcPts val="500"/>
+          <a:spcPts val="669"/>
         </a:spcBef>
         <a:buFont typeface="Arial" panose="020B0604020202020204" pitchFamily="34" charset="0"/>
         <a:buChar char="•"/>
-        <a:defRPr sz="2000" kern="1200">
+        <a:defRPr sz="2677" kern="1200">
           <a:solidFill>
             <a:schemeClr val="tx1"/>
           </a:solidFill>
@@ -3117,16 +2748,16 @@
           <a:cs typeface="+mn-cs"/>
         </a:defRPr>
       </a:lvl3pPr>
-      <a:lvl4pPr marL="1600200" indent="-228600" algn="l" defTabSz="914400" rtl="0" eaLnBrk="1" latinLnBrk="0" hangingPunct="1">
+      <a:lvl4pPr marL="2141868" indent="-305981" algn="l" defTabSz="1223924" rtl="0" eaLnBrk="1" latinLnBrk="0" hangingPunct="1">
         <a:lnSpc>
           <a:spcPct val="90000"/>
         </a:lnSpc>
         <a:spcBef>
-          <a:spcPts val="500"/>
+          <a:spcPts val="669"/>
         </a:spcBef>
         <a:buFont typeface="Arial" panose="020B0604020202020204" pitchFamily="34" charset="0"/>
         <a:buChar char="•"/>
-        <a:defRPr sz="1800" kern="1200">
+        <a:defRPr sz="2409" kern="1200">
           <a:solidFill>
             <a:schemeClr val="tx1"/>
           </a:solidFill>
@@ -3135,16 +2766,16 @@
           <a:cs typeface="+mn-cs"/>
         </a:defRPr>
       </a:lvl4pPr>
-      <a:lvl5pPr marL="2057400" indent="-228600" algn="l" defTabSz="914400" rtl="0" eaLnBrk="1" latinLnBrk="0" hangingPunct="1">
+      <a:lvl5pPr marL="2753830" indent="-305981" algn="l" defTabSz="1223924" rtl="0" eaLnBrk="1" latinLnBrk="0" hangingPunct="1">
         <a:lnSpc>
           <a:spcPct val="90000"/>
         </a:lnSpc>
         <a:spcBef>
-          <a:spcPts val="500"/>
+          <a:spcPts val="669"/>
         </a:spcBef>
         <a:buFont typeface="Arial" panose="020B0604020202020204" pitchFamily="34" charset="0"/>
         <a:buChar char="•"/>
-        <a:defRPr sz="1800" kern="1200">
+        <a:defRPr sz="2409" kern="1200">
           <a:solidFill>
             <a:schemeClr val="tx1"/>
           </a:solidFill>
@@ -3153,16 +2784,16 @@
           <a:cs typeface="+mn-cs"/>
         </a:defRPr>
       </a:lvl5pPr>
-      <a:lvl6pPr marL="2514600" indent="-228600" algn="l" defTabSz="914400" rtl="0" eaLnBrk="1" latinLnBrk="0" hangingPunct="1">
+      <a:lvl6pPr marL="3365792" indent="-305981" algn="l" defTabSz="1223924" rtl="0" eaLnBrk="1" latinLnBrk="0" hangingPunct="1">
         <a:lnSpc>
           <a:spcPct val="90000"/>
         </a:lnSpc>
         <a:spcBef>
-          <a:spcPts val="500"/>
+          <a:spcPts val="669"/>
         </a:spcBef>
         <a:buFont typeface="Arial" panose="020B0604020202020204" pitchFamily="34" charset="0"/>
         <a:buChar char="•"/>
-        <a:defRPr sz="1800" kern="1200">
+        <a:defRPr sz="2409" kern="1200">
           <a:solidFill>
             <a:schemeClr val="tx1"/>
           </a:solidFill>
@@ -3171,16 +2802,16 @@
           <a:cs typeface="+mn-cs"/>
         </a:defRPr>
       </a:lvl6pPr>
-      <a:lvl7pPr marL="2971800" indent="-228600" algn="l" defTabSz="914400" rtl="0" eaLnBrk="1" latinLnBrk="0" hangingPunct="1">
+      <a:lvl7pPr marL="3977754" indent="-305981" algn="l" defTabSz="1223924" rtl="0" eaLnBrk="1" latinLnBrk="0" hangingPunct="1">
         <a:lnSpc>
           <a:spcPct val="90000"/>
         </a:lnSpc>
         <a:spcBef>
-          <a:spcPts val="500"/>
+          <a:spcPts val="669"/>
         </a:spcBef>
         <a:buFont typeface="Arial" panose="020B0604020202020204" pitchFamily="34" charset="0"/>
         <a:buChar char="•"/>
-        <a:defRPr sz="1800" kern="1200">
+        <a:defRPr sz="2409" kern="1200">
           <a:solidFill>
             <a:schemeClr val="tx1"/>
           </a:solidFill>
@@ -3189,16 +2820,16 @@
           <a:cs typeface="+mn-cs"/>
         </a:defRPr>
       </a:lvl7pPr>
-      <a:lvl8pPr marL="3429000" indent="-228600" algn="l" defTabSz="914400" rtl="0" eaLnBrk="1" latinLnBrk="0" hangingPunct="1">
+      <a:lvl8pPr marL="4589717" indent="-305981" algn="l" defTabSz="1223924" rtl="0" eaLnBrk="1" latinLnBrk="0" hangingPunct="1">
         <a:lnSpc>
           <a:spcPct val="90000"/>
         </a:lnSpc>
         <a:spcBef>
-          <a:spcPts val="500"/>
+          <a:spcPts val="669"/>
         </a:spcBef>
         <a:buFont typeface="Arial" panose="020B0604020202020204" pitchFamily="34" charset="0"/>
         <a:buChar char="•"/>
-        <a:defRPr sz="1800" kern="1200">
+        <a:defRPr sz="2409" kern="1200">
           <a:solidFill>
             <a:schemeClr val="tx1"/>
           </a:solidFill>
@@ -3207,16 +2838,16 @@
           <a:cs typeface="+mn-cs"/>
         </a:defRPr>
       </a:lvl8pPr>
-      <a:lvl9pPr marL="3886200" indent="-228600" algn="l" defTabSz="914400" rtl="0" eaLnBrk="1" latinLnBrk="0" hangingPunct="1">
+      <a:lvl9pPr marL="5201679" indent="-305981" algn="l" defTabSz="1223924" rtl="0" eaLnBrk="1" latinLnBrk="0" hangingPunct="1">
         <a:lnSpc>
           <a:spcPct val="90000"/>
         </a:lnSpc>
         <a:spcBef>
-          <a:spcPts val="500"/>
+          <a:spcPts val="669"/>
         </a:spcBef>
         <a:buFont typeface="Arial" panose="020B0604020202020204" pitchFamily="34" charset="0"/>
         <a:buChar char="•"/>
-        <a:defRPr sz="1800" kern="1200">
+        <a:defRPr sz="2409" kern="1200">
           <a:solidFill>
             <a:schemeClr val="tx1"/>
           </a:solidFill>
@@ -3228,10 +2859,10 @@
     </p:bodyStyle>
     <p:otherStyle>
       <a:defPPr>
-        <a:defRPr lang="en-FI"/>
+        <a:defRPr lang="en-US"/>
       </a:defPPr>
-      <a:lvl1pPr marL="0" algn="l" defTabSz="914400" rtl="0" eaLnBrk="1" latinLnBrk="0" hangingPunct="1">
-        <a:defRPr sz="1800" kern="1200">
+      <a:lvl1pPr marL="0" algn="l" defTabSz="1223924" rtl="0" eaLnBrk="1" latinLnBrk="0" hangingPunct="1">
+        <a:defRPr sz="2409" kern="1200">
           <a:solidFill>
             <a:schemeClr val="tx1"/>
           </a:solidFill>
@@ -3240,8 +2871,8 @@
           <a:cs typeface="+mn-cs"/>
         </a:defRPr>
       </a:lvl1pPr>
-      <a:lvl2pPr marL="457200" algn="l" defTabSz="914400" rtl="0" eaLnBrk="1" latinLnBrk="0" hangingPunct="1">
-        <a:defRPr sz="1800" kern="1200">
+      <a:lvl2pPr marL="611962" algn="l" defTabSz="1223924" rtl="0" eaLnBrk="1" latinLnBrk="0" hangingPunct="1">
+        <a:defRPr sz="2409" kern="1200">
           <a:solidFill>
             <a:schemeClr val="tx1"/>
           </a:solidFill>
@@ -3250,8 +2881,8 @@
           <a:cs typeface="+mn-cs"/>
         </a:defRPr>
       </a:lvl2pPr>
-      <a:lvl3pPr marL="914400" algn="l" defTabSz="914400" rtl="0" eaLnBrk="1" latinLnBrk="0" hangingPunct="1">
-        <a:defRPr sz="1800" kern="1200">
+      <a:lvl3pPr marL="1223924" algn="l" defTabSz="1223924" rtl="0" eaLnBrk="1" latinLnBrk="0" hangingPunct="1">
+        <a:defRPr sz="2409" kern="1200">
           <a:solidFill>
             <a:schemeClr val="tx1"/>
           </a:solidFill>
@@ -3260,8 +2891,8 @@
           <a:cs typeface="+mn-cs"/>
         </a:defRPr>
       </a:lvl3pPr>
-      <a:lvl4pPr marL="1371600" algn="l" defTabSz="914400" rtl="0" eaLnBrk="1" latinLnBrk="0" hangingPunct="1">
-        <a:defRPr sz="1800" kern="1200">
+      <a:lvl4pPr marL="1835887" algn="l" defTabSz="1223924" rtl="0" eaLnBrk="1" latinLnBrk="0" hangingPunct="1">
+        <a:defRPr sz="2409" kern="1200">
           <a:solidFill>
             <a:schemeClr val="tx1"/>
           </a:solidFill>
@@ -3270,8 +2901,8 @@
           <a:cs typeface="+mn-cs"/>
         </a:defRPr>
       </a:lvl4pPr>
-      <a:lvl5pPr marL="1828800" algn="l" defTabSz="914400" rtl="0" eaLnBrk="1" latinLnBrk="0" hangingPunct="1">
-        <a:defRPr sz="1800" kern="1200">
+      <a:lvl5pPr marL="2447849" algn="l" defTabSz="1223924" rtl="0" eaLnBrk="1" latinLnBrk="0" hangingPunct="1">
+        <a:defRPr sz="2409" kern="1200">
           <a:solidFill>
             <a:schemeClr val="tx1"/>
           </a:solidFill>
@@ -3280,8 +2911,8 @@
           <a:cs typeface="+mn-cs"/>
         </a:defRPr>
       </a:lvl5pPr>
-      <a:lvl6pPr marL="2286000" algn="l" defTabSz="914400" rtl="0" eaLnBrk="1" latinLnBrk="0" hangingPunct="1">
-        <a:defRPr sz="1800" kern="1200">
+      <a:lvl6pPr marL="3059811" algn="l" defTabSz="1223924" rtl="0" eaLnBrk="1" latinLnBrk="0" hangingPunct="1">
+        <a:defRPr sz="2409" kern="1200">
           <a:solidFill>
             <a:schemeClr val="tx1"/>
           </a:solidFill>
@@ -3290,8 +2921,8 @@
           <a:cs typeface="+mn-cs"/>
         </a:defRPr>
       </a:lvl6pPr>
-      <a:lvl7pPr marL="2743200" algn="l" defTabSz="914400" rtl="0" eaLnBrk="1" latinLnBrk="0" hangingPunct="1">
-        <a:defRPr sz="1800" kern="1200">
+      <a:lvl7pPr marL="3671773" algn="l" defTabSz="1223924" rtl="0" eaLnBrk="1" latinLnBrk="0" hangingPunct="1">
+        <a:defRPr sz="2409" kern="1200">
           <a:solidFill>
             <a:schemeClr val="tx1"/>
           </a:solidFill>
@@ -3300,8 +2931,8 @@
           <a:cs typeface="+mn-cs"/>
         </a:defRPr>
       </a:lvl7pPr>
-      <a:lvl8pPr marL="3200400" algn="l" defTabSz="914400" rtl="0" eaLnBrk="1" latinLnBrk="0" hangingPunct="1">
-        <a:defRPr sz="1800" kern="1200">
+      <a:lvl8pPr marL="4283735" algn="l" defTabSz="1223924" rtl="0" eaLnBrk="1" latinLnBrk="0" hangingPunct="1">
+        <a:defRPr sz="2409" kern="1200">
           <a:solidFill>
             <a:schemeClr val="tx1"/>
           </a:solidFill>
@@ -3310,8 +2941,8 @@
           <a:cs typeface="+mn-cs"/>
         </a:defRPr>
       </a:lvl8pPr>
-      <a:lvl9pPr marL="3657600" algn="l" defTabSz="914400" rtl="0" eaLnBrk="1" latinLnBrk="0" hangingPunct="1">
-        <a:defRPr sz="1800" kern="1200">
+      <a:lvl9pPr marL="4895698" algn="l" defTabSz="1223924" rtl="0" eaLnBrk="1" latinLnBrk="0" hangingPunct="1">
+        <a:defRPr sz="2409" kern="1200">
           <a:solidFill>
             <a:schemeClr val="tx1"/>
           </a:solidFill>
@@ -3328,6 +2959,28 @@
 <file path=ppt/slides/slide1.xml><?xml version="1.0" encoding="utf-8"?>
 <p:sld xmlns:a="http://schemas.openxmlformats.org/drawingml/2006/main" xmlns:r="http://schemas.openxmlformats.org/officeDocument/2006/relationships" xmlns:p="http://schemas.openxmlformats.org/presentationml/2006/main">
   <p:cSld>
+    <p:bg>
+      <p:bgPr>
+        <a:gradFill>
+          <a:gsLst>
+            <a:gs pos="10000">
+              <a:schemeClr val="accent6"/>
+            </a:gs>
+            <a:gs pos="52000">
+              <a:schemeClr val="accent6">
+                <a:lumMod val="75000"/>
+                <a:lumOff val="25000"/>
+              </a:schemeClr>
+            </a:gs>
+            <a:gs pos="100000">
+              <a:schemeClr val="accent2"/>
+            </a:gs>
+          </a:gsLst>
+          <a:lin ang="16200000" scaled="0"/>
+        </a:gradFill>
+        <a:effectLst/>
+      </p:bgPr>
+    </p:bg>
     <p:spTree>
       <p:nvGrpSpPr>
         <p:cNvPr id="1" name=""/>
@@ -3344,54 +2997,2136 @@
       </p:grpSpPr>
       <p:sp>
         <p:nvSpPr>
-          <p:cNvPr id="2" name="Title 1">
+          <p:cNvPr id="34" name="Freeform: Shape 33">
             <a:extLst>
               <a:ext uri="{FF2B5EF4-FFF2-40B4-BE49-F238E27FC236}">
-                <a16:creationId xmlns:a16="http://schemas.microsoft.com/office/drawing/2014/main" id="{6DD738FA-AE0D-91F4-806B-4CE66891B518}"/>
+                <a16:creationId xmlns:a16="http://schemas.microsoft.com/office/drawing/2014/main" id="{2E4D8811-05D1-E13C-422B-2A4C1C27E146}"/>
               </a:ext>
             </a:extLst>
           </p:cNvPr>
-          <p:cNvSpPr>
-            <a:spLocks noGrp="1"/>
-          </p:cNvSpPr>
-          <p:nvPr>
-            <p:ph type="ctrTitle"/>
-          </p:nvPr>
-        </p:nvSpPr>
-        <p:spPr/>
-        <p:txBody>
-          <a:bodyPr/>
-          <a:lstStyle/>
-          <a:p>
-            <a:endParaRPr lang="en-FI"/>
-          </a:p>
-        </p:txBody>
-      </p:sp>
-      <p:sp>
-        <p:nvSpPr>
-          <p:cNvPr id="3" name="Subtitle 2">
+          <p:cNvSpPr/>
+          <p:nvPr/>
+        </p:nvSpPr>
+        <p:spPr>
+          <a:xfrm>
+            <a:off x="359814" y="360284"/>
+            <a:ext cx="11519999" cy="26639997"/>
+          </a:xfrm>
+          <a:custGeom>
+            <a:avLst/>
+            <a:gdLst>
+              <a:gd name="connsiteX0" fmla="*/ 231552 w 11519999"/>
+              <a:gd name="connsiteY0" fmla="*/ 0 h 26639997"/>
+              <a:gd name="connsiteX1" fmla="*/ 11288447 w 11519999"/>
+              <a:gd name="connsiteY1" fmla="*/ 0 h 26639997"/>
+              <a:gd name="connsiteX2" fmla="*/ 11519999 w 11519999"/>
+              <a:gd name="connsiteY2" fmla="*/ 231552 h 26639997"/>
+              <a:gd name="connsiteX3" fmla="*/ 11519999 w 11519999"/>
+              <a:gd name="connsiteY3" fmla="*/ 12553373 h 26639997"/>
+              <a:gd name="connsiteX4" fmla="*/ 11416531 w 11519999"/>
+              <a:gd name="connsiteY4" fmla="*/ 12580010 h 26639997"/>
+              <a:gd name="connsiteX5" fmla="*/ 9655043 w 11519999"/>
+              <a:gd name="connsiteY5" fmla="*/ 12954191 h 26639997"/>
+              <a:gd name="connsiteX6" fmla="*/ 8087500 w 11519999"/>
+              <a:gd name="connsiteY6" fmla="*/ 12470066 h 26639997"/>
+              <a:gd name="connsiteX7" fmla="*/ 6345786 w 11519999"/>
+              <a:gd name="connsiteY7" fmla="*/ 12954191 h 26639997"/>
+              <a:gd name="connsiteX8" fmla="*/ 4502473 w 11519999"/>
+              <a:gd name="connsiteY8" fmla="*/ 12673086 h 26639997"/>
+              <a:gd name="connsiteX9" fmla="*/ 4183158 w 11519999"/>
+              <a:gd name="connsiteY9" fmla="*/ 12735555 h 26639997"/>
+              <a:gd name="connsiteX10" fmla="*/ 4502473 w 11519999"/>
+              <a:gd name="connsiteY10" fmla="*/ 12782407 h 26639997"/>
+              <a:gd name="connsiteX11" fmla="*/ 6099043 w 11519999"/>
+              <a:gd name="connsiteY11" fmla="*/ 13219679 h 26639997"/>
+              <a:gd name="connsiteX12" fmla="*/ 7521443 w 11519999"/>
+              <a:gd name="connsiteY12" fmla="*/ 12907342 h 26639997"/>
+              <a:gd name="connsiteX13" fmla="*/ 8392300 w 11519999"/>
+              <a:gd name="connsiteY13" fmla="*/ 12954191 h 26639997"/>
+              <a:gd name="connsiteX14" fmla="*/ 8987386 w 11519999"/>
+              <a:gd name="connsiteY14" fmla="*/ 13344614 h 26639997"/>
+              <a:gd name="connsiteX15" fmla="*/ 9596986 w 11519999"/>
+              <a:gd name="connsiteY15" fmla="*/ 13500783 h 26639997"/>
+              <a:gd name="connsiteX16" fmla="*/ 10758129 w 11519999"/>
+              <a:gd name="connsiteY16" fmla="*/ 13407082 h 26639997"/>
+              <a:gd name="connsiteX17" fmla="*/ 11474772 w 11519999"/>
+              <a:gd name="connsiteY17" fmla="*/ 13278242 h 26639997"/>
+              <a:gd name="connsiteX18" fmla="*/ 11519999 w 11519999"/>
+              <a:gd name="connsiteY18" fmla="*/ 13267644 h 26639997"/>
+              <a:gd name="connsiteX19" fmla="*/ 11519999 w 11519999"/>
+              <a:gd name="connsiteY19" fmla="*/ 19459635 h 26639997"/>
+              <a:gd name="connsiteX20" fmla="*/ 11416530 w 11519999"/>
+              <a:gd name="connsiteY20" fmla="*/ 19486275 h 26639997"/>
+              <a:gd name="connsiteX21" fmla="*/ 9655043 w 11519999"/>
+              <a:gd name="connsiteY21" fmla="*/ 19860455 h 26639997"/>
+              <a:gd name="connsiteX22" fmla="*/ 8087500 w 11519999"/>
+              <a:gd name="connsiteY22" fmla="*/ 19376331 h 26639997"/>
+              <a:gd name="connsiteX23" fmla="*/ 6345786 w 11519999"/>
+              <a:gd name="connsiteY23" fmla="*/ 19860455 h 26639997"/>
+              <a:gd name="connsiteX24" fmla="*/ 4502472 w 11519999"/>
+              <a:gd name="connsiteY24" fmla="*/ 19579351 h 26639997"/>
+              <a:gd name="connsiteX25" fmla="*/ 4183158 w 11519999"/>
+              <a:gd name="connsiteY25" fmla="*/ 19641819 h 26639997"/>
+              <a:gd name="connsiteX26" fmla="*/ 4502472 w 11519999"/>
+              <a:gd name="connsiteY26" fmla="*/ 19688669 h 26639997"/>
+              <a:gd name="connsiteX27" fmla="*/ 6099043 w 11519999"/>
+              <a:gd name="connsiteY27" fmla="*/ 20125943 h 26639997"/>
+              <a:gd name="connsiteX28" fmla="*/ 7521443 w 11519999"/>
+              <a:gd name="connsiteY28" fmla="*/ 19813605 h 26639997"/>
+              <a:gd name="connsiteX29" fmla="*/ 8392300 w 11519999"/>
+              <a:gd name="connsiteY29" fmla="*/ 19860455 h 26639997"/>
+              <a:gd name="connsiteX30" fmla="*/ 8987386 w 11519999"/>
+              <a:gd name="connsiteY30" fmla="*/ 20250879 h 26639997"/>
+              <a:gd name="connsiteX31" fmla="*/ 9596986 w 11519999"/>
+              <a:gd name="connsiteY31" fmla="*/ 20407049 h 26639997"/>
+              <a:gd name="connsiteX32" fmla="*/ 10758129 w 11519999"/>
+              <a:gd name="connsiteY32" fmla="*/ 20313347 h 26639997"/>
+              <a:gd name="connsiteX33" fmla="*/ 11474772 w 11519999"/>
+              <a:gd name="connsiteY33" fmla="*/ 20184507 h 26639997"/>
+              <a:gd name="connsiteX34" fmla="*/ 11519999 w 11519999"/>
+              <a:gd name="connsiteY34" fmla="*/ 20173909 h 26639997"/>
+              <a:gd name="connsiteX35" fmla="*/ 11519999 w 11519999"/>
+              <a:gd name="connsiteY35" fmla="*/ 26408445 h 26639997"/>
+              <a:gd name="connsiteX36" fmla="*/ 11288447 w 11519999"/>
+              <a:gd name="connsiteY36" fmla="*/ 26639997 h 26639997"/>
+              <a:gd name="connsiteX37" fmla="*/ 231552 w 11519999"/>
+              <a:gd name="connsiteY37" fmla="*/ 26639997 h 26639997"/>
+              <a:gd name="connsiteX38" fmla="*/ 4704 w 11519999"/>
+              <a:gd name="connsiteY38" fmla="*/ 26455111 h 26639997"/>
+              <a:gd name="connsiteX39" fmla="*/ 1281 w 11519999"/>
+              <a:gd name="connsiteY39" fmla="*/ 26421153 h 26639997"/>
+              <a:gd name="connsiteX40" fmla="*/ 3878609 w 11519999"/>
+              <a:gd name="connsiteY40" fmla="*/ 26421153 h 26639997"/>
+              <a:gd name="connsiteX41" fmla="*/ 4160215 w 11519999"/>
+              <a:gd name="connsiteY41" fmla="*/ 26139545 h 26639997"/>
+              <a:gd name="connsiteX42" fmla="*/ 4160215 w 11519999"/>
+              <a:gd name="connsiteY42" fmla="*/ 20042757 h 26639997"/>
+              <a:gd name="connsiteX43" fmla="*/ 3878609 w 11519999"/>
+              <a:gd name="connsiteY43" fmla="*/ 19761153 h 26639997"/>
+              <a:gd name="connsiteX44" fmla="*/ 0 w 11519999"/>
+              <a:gd name="connsiteY44" fmla="*/ 19761153 h 26639997"/>
+              <a:gd name="connsiteX45" fmla="*/ 0 w 11519999"/>
+              <a:gd name="connsiteY45" fmla="*/ 19510321 h 26639997"/>
+              <a:gd name="connsiteX46" fmla="*/ 3908099 w 11519999"/>
+              <a:gd name="connsiteY46" fmla="*/ 19510321 h 26639997"/>
+              <a:gd name="connsiteX47" fmla="*/ 4160215 w 11519999"/>
+              <a:gd name="connsiteY47" fmla="*/ 19258207 h 26639997"/>
+              <a:gd name="connsiteX48" fmla="*/ 4160215 w 11519999"/>
+              <a:gd name="connsiteY48" fmla="*/ 13102438 h 26639997"/>
+              <a:gd name="connsiteX49" fmla="*/ 3908099 w 11519999"/>
+              <a:gd name="connsiteY49" fmla="*/ 12850322 h 26639997"/>
+              <a:gd name="connsiteX50" fmla="*/ 0 w 11519999"/>
+              <a:gd name="connsiteY50" fmla="*/ 12850322 h 26639997"/>
+              <a:gd name="connsiteX51" fmla="*/ 0 w 11519999"/>
+              <a:gd name="connsiteY51" fmla="*/ 12628992 h 26639997"/>
+              <a:gd name="connsiteX52" fmla="*/ 3878609 w 11519999"/>
+              <a:gd name="connsiteY52" fmla="*/ 12628992 h 26639997"/>
+              <a:gd name="connsiteX53" fmla="*/ 4160215 w 11519999"/>
+              <a:gd name="connsiteY53" fmla="*/ 12347383 h 26639997"/>
+              <a:gd name="connsiteX54" fmla="*/ 4160215 w 11519999"/>
+              <a:gd name="connsiteY54" fmla="*/ 6250597 h 26639997"/>
+              <a:gd name="connsiteX55" fmla="*/ 3878609 w 11519999"/>
+              <a:gd name="connsiteY55" fmla="*/ 5968991 h 26639997"/>
+              <a:gd name="connsiteX56" fmla="*/ 0 w 11519999"/>
+              <a:gd name="connsiteY56" fmla="*/ 5968991 h 26639997"/>
+              <a:gd name="connsiteX57" fmla="*/ 0 w 11519999"/>
+              <a:gd name="connsiteY57" fmla="*/ 231552 h 26639997"/>
+              <a:gd name="connsiteX58" fmla="*/ 231552 w 11519999"/>
+              <a:gd name="connsiteY58" fmla="*/ 0 h 26639997"/>
+            </a:gdLst>
+            <a:ahLst/>
+            <a:cxnLst>
+              <a:cxn ang="0">
+                <a:pos x="connsiteX0" y="connsiteY0"/>
+              </a:cxn>
+              <a:cxn ang="0">
+                <a:pos x="connsiteX1" y="connsiteY1"/>
+              </a:cxn>
+              <a:cxn ang="0">
+                <a:pos x="connsiteX2" y="connsiteY2"/>
+              </a:cxn>
+              <a:cxn ang="0">
+                <a:pos x="connsiteX3" y="connsiteY3"/>
+              </a:cxn>
+              <a:cxn ang="0">
+                <a:pos x="connsiteX4" y="connsiteY4"/>
+              </a:cxn>
+              <a:cxn ang="0">
+                <a:pos x="connsiteX5" y="connsiteY5"/>
+              </a:cxn>
+              <a:cxn ang="0">
+                <a:pos x="connsiteX6" y="connsiteY6"/>
+              </a:cxn>
+              <a:cxn ang="0">
+                <a:pos x="connsiteX7" y="connsiteY7"/>
+              </a:cxn>
+              <a:cxn ang="0">
+                <a:pos x="connsiteX8" y="connsiteY8"/>
+              </a:cxn>
+              <a:cxn ang="0">
+                <a:pos x="connsiteX9" y="connsiteY9"/>
+              </a:cxn>
+              <a:cxn ang="0">
+                <a:pos x="connsiteX10" y="connsiteY10"/>
+              </a:cxn>
+              <a:cxn ang="0">
+                <a:pos x="connsiteX11" y="connsiteY11"/>
+              </a:cxn>
+              <a:cxn ang="0">
+                <a:pos x="connsiteX12" y="connsiteY12"/>
+              </a:cxn>
+              <a:cxn ang="0">
+                <a:pos x="connsiteX13" y="connsiteY13"/>
+              </a:cxn>
+              <a:cxn ang="0">
+                <a:pos x="connsiteX14" y="connsiteY14"/>
+              </a:cxn>
+              <a:cxn ang="0">
+                <a:pos x="connsiteX15" y="connsiteY15"/>
+              </a:cxn>
+              <a:cxn ang="0">
+                <a:pos x="connsiteX16" y="connsiteY16"/>
+              </a:cxn>
+              <a:cxn ang="0">
+                <a:pos x="connsiteX17" y="connsiteY17"/>
+              </a:cxn>
+              <a:cxn ang="0">
+                <a:pos x="connsiteX18" y="connsiteY18"/>
+              </a:cxn>
+              <a:cxn ang="0">
+                <a:pos x="connsiteX19" y="connsiteY19"/>
+              </a:cxn>
+              <a:cxn ang="0">
+                <a:pos x="connsiteX20" y="connsiteY20"/>
+              </a:cxn>
+              <a:cxn ang="0">
+                <a:pos x="connsiteX21" y="connsiteY21"/>
+              </a:cxn>
+              <a:cxn ang="0">
+                <a:pos x="connsiteX22" y="connsiteY22"/>
+              </a:cxn>
+              <a:cxn ang="0">
+                <a:pos x="connsiteX23" y="connsiteY23"/>
+              </a:cxn>
+              <a:cxn ang="0">
+                <a:pos x="connsiteX24" y="connsiteY24"/>
+              </a:cxn>
+              <a:cxn ang="0">
+                <a:pos x="connsiteX25" y="connsiteY25"/>
+              </a:cxn>
+              <a:cxn ang="0">
+                <a:pos x="connsiteX26" y="connsiteY26"/>
+              </a:cxn>
+              <a:cxn ang="0">
+                <a:pos x="connsiteX27" y="connsiteY27"/>
+              </a:cxn>
+              <a:cxn ang="0">
+                <a:pos x="connsiteX28" y="connsiteY28"/>
+              </a:cxn>
+              <a:cxn ang="0">
+                <a:pos x="connsiteX29" y="connsiteY29"/>
+              </a:cxn>
+              <a:cxn ang="0">
+                <a:pos x="connsiteX30" y="connsiteY30"/>
+              </a:cxn>
+              <a:cxn ang="0">
+                <a:pos x="connsiteX31" y="connsiteY31"/>
+              </a:cxn>
+              <a:cxn ang="0">
+                <a:pos x="connsiteX32" y="connsiteY32"/>
+              </a:cxn>
+              <a:cxn ang="0">
+                <a:pos x="connsiteX33" y="connsiteY33"/>
+              </a:cxn>
+              <a:cxn ang="0">
+                <a:pos x="connsiteX34" y="connsiteY34"/>
+              </a:cxn>
+              <a:cxn ang="0">
+                <a:pos x="connsiteX35" y="connsiteY35"/>
+              </a:cxn>
+              <a:cxn ang="0">
+                <a:pos x="connsiteX36" y="connsiteY36"/>
+              </a:cxn>
+              <a:cxn ang="0">
+                <a:pos x="connsiteX37" y="connsiteY37"/>
+              </a:cxn>
+              <a:cxn ang="0">
+                <a:pos x="connsiteX38" y="connsiteY38"/>
+              </a:cxn>
+              <a:cxn ang="0">
+                <a:pos x="connsiteX39" y="connsiteY39"/>
+              </a:cxn>
+              <a:cxn ang="0">
+                <a:pos x="connsiteX40" y="connsiteY40"/>
+              </a:cxn>
+              <a:cxn ang="0">
+                <a:pos x="connsiteX41" y="connsiteY41"/>
+              </a:cxn>
+              <a:cxn ang="0">
+                <a:pos x="connsiteX42" y="connsiteY42"/>
+              </a:cxn>
+              <a:cxn ang="0">
+                <a:pos x="connsiteX43" y="connsiteY43"/>
+              </a:cxn>
+              <a:cxn ang="0">
+                <a:pos x="connsiteX44" y="connsiteY44"/>
+              </a:cxn>
+              <a:cxn ang="0">
+                <a:pos x="connsiteX45" y="connsiteY45"/>
+              </a:cxn>
+              <a:cxn ang="0">
+                <a:pos x="connsiteX46" y="connsiteY46"/>
+              </a:cxn>
+              <a:cxn ang="0">
+                <a:pos x="connsiteX47" y="connsiteY47"/>
+              </a:cxn>
+              <a:cxn ang="0">
+                <a:pos x="connsiteX48" y="connsiteY48"/>
+              </a:cxn>
+              <a:cxn ang="0">
+                <a:pos x="connsiteX49" y="connsiteY49"/>
+              </a:cxn>
+              <a:cxn ang="0">
+                <a:pos x="connsiteX50" y="connsiteY50"/>
+              </a:cxn>
+              <a:cxn ang="0">
+                <a:pos x="connsiteX51" y="connsiteY51"/>
+              </a:cxn>
+              <a:cxn ang="0">
+                <a:pos x="connsiteX52" y="connsiteY52"/>
+              </a:cxn>
+              <a:cxn ang="0">
+                <a:pos x="connsiteX53" y="connsiteY53"/>
+              </a:cxn>
+              <a:cxn ang="0">
+                <a:pos x="connsiteX54" y="connsiteY54"/>
+              </a:cxn>
+              <a:cxn ang="0">
+                <a:pos x="connsiteX55" y="connsiteY55"/>
+              </a:cxn>
+              <a:cxn ang="0">
+                <a:pos x="connsiteX56" y="connsiteY56"/>
+              </a:cxn>
+              <a:cxn ang="0">
+                <a:pos x="connsiteX57" y="connsiteY57"/>
+              </a:cxn>
+              <a:cxn ang="0">
+                <a:pos x="connsiteX58" y="connsiteY58"/>
+              </a:cxn>
+            </a:cxnLst>
+            <a:rect l="l" t="t" r="r" b="b"/>
+            <a:pathLst>
+              <a:path w="11519999" h="26639997">
+                <a:moveTo>
+                  <a:pt x="231552" y="0"/>
+                </a:moveTo>
+                <a:lnTo>
+                  <a:pt x="11288447" y="0"/>
+                </a:lnTo>
+                <a:cubicBezTo>
+                  <a:pt x="11416330" y="0"/>
+                  <a:pt x="11519999" y="103669"/>
+                  <a:pt x="11519999" y="231552"/>
+                </a:cubicBezTo>
+                <a:lnTo>
+                  <a:pt x="11519999" y="12553373"/>
+                </a:lnTo>
+                <a:lnTo>
+                  <a:pt x="11416531" y="12580010"/>
+                </a:lnTo>
+                <a:cubicBezTo>
+                  <a:pt x="10824880" y="12734985"/>
+                  <a:pt x="10085936" y="12949311"/>
+                  <a:pt x="9655043" y="12954191"/>
+                </a:cubicBezTo>
+                <a:cubicBezTo>
+                  <a:pt x="8965614" y="12962000"/>
+                  <a:pt x="8639043" y="12470066"/>
+                  <a:pt x="8087500" y="12470066"/>
+                </a:cubicBezTo>
+                <a:cubicBezTo>
+                  <a:pt x="7535957" y="12470066"/>
+                  <a:pt x="6943291" y="12920355"/>
+                  <a:pt x="6345786" y="12954191"/>
+                </a:cubicBezTo>
+                <a:cubicBezTo>
+                  <a:pt x="5748282" y="12988028"/>
+                  <a:pt x="4862910" y="12709526"/>
+                  <a:pt x="4502473" y="12673086"/>
+                </a:cubicBezTo>
+                <a:cubicBezTo>
+                  <a:pt x="4142034" y="12636647"/>
+                  <a:pt x="4183158" y="12717337"/>
+                  <a:pt x="4183158" y="12735555"/>
+                </a:cubicBezTo>
+                <a:cubicBezTo>
+                  <a:pt x="4183158" y="12753775"/>
+                  <a:pt x="4183158" y="12701718"/>
+                  <a:pt x="4502473" y="12782407"/>
+                </a:cubicBezTo>
+                <a:cubicBezTo>
+                  <a:pt x="4821787" y="12863093"/>
+                  <a:pt x="5595882" y="13198857"/>
+                  <a:pt x="6099043" y="13219679"/>
+                </a:cubicBezTo>
+                <a:cubicBezTo>
+                  <a:pt x="6602205" y="13240501"/>
+                  <a:pt x="7139233" y="12951588"/>
+                  <a:pt x="7521443" y="12907342"/>
+                </a:cubicBezTo>
+                <a:cubicBezTo>
+                  <a:pt x="7903653" y="12863092"/>
+                  <a:pt x="8147976" y="12881312"/>
+                  <a:pt x="8392300" y="12954191"/>
+                </a:cubicBezTo>
+                <a:cubicBezTo>
+                  <a:pt x="8636624" y="13027072"/>
+                  <a:pt x="8786605" y="13253517"/>
+                  <a:pt x="8987386" y="13344614"/>
+                </a:cubicBezTo>
+                <a:cubicBezTo>
+                  <a:pt x="9188167" y="13435713"/>
+                  <a:pt x="9301862" y="13490372"/>
+                  <a:pt x="9596986" y="13500783"/>
+                </a:cubicBezTo>
+                <a:cubicBezTo>
+                  <a:pt x="9892110" y="13511195"/>
+                  <a:pt x="10346891" y="13477357"/>
+                  <a:pt x="10758129" y="13407082"/>
+                </a:cubicBezTo>
+                <a:cubicBezTo>
+                  <a:pt x="10963748" y="13371944"/>
+                  <a:pt x="11229843" y="13330950"/>
+                  <a:pt x="11474772" y="13278242"/>
+                </a:cubicBezTo>
+                <a:lnTo>
+                  <a:pt x="11519999" y="13267644"/>
+                </a:lnTo>
+                <a:lnTo>
+                  <a:pt x="11519999" y="19459635"/>
+                </a:lnTo>
+                <a:lnTo>
+                  <a:pt x="11416530" y="19486275"/>
+                </a:lnTo>
+                <a:cubicBezTo>
+                  <a:pt x="10824880" y="19641249"/>
+                  <a:pt x="10085936" y="19855575"/>
+                  <a:pt x="9655043" y="19860455"/>
+                </a:cubicBezTo>
+                <a:cubicBezTo>
+                  <a:pt x="8965614" y="19868265"/>
+                  <a:pt x="8639043" y="19376331"/>
+                  <a:pt x="8087500" y="19376331"/>
+                </a:cubicBezTo>
+                <a:cubicBezTo>
+                  <a:pt x="7535957" y="19376331"/>
+                  <a:pt x="6943291" y="19826619"/>
+                  <a:pt x="6345786" y="19860455"/>
+                </a:cubicBezTo>
+                <a:cubicBezTo>
+                  <a:pt x="5748282" y="19894293"/>
+                  <a:pt x="4862910" y="19615791"/>
+                  <a:pt x="4502472" y="19579351"/>
+                </a:cubicBezTo>
+                <a:cubicBezTo>
+                  <a:pt x="4142034" y="19542911"/>
+                  <a:pt x="4183158" y="19623599"/>
+                  <a:pt x="4183158" y="19641819"/>
+                </a:cubicBezTo>
+                <a:cubicBezTo>
+                  <a:pt x="4183158" y="19660039"/>
+                  <a:pt x="4183158" y="19607983"/>
+                  <a:pt x="4502472" y="19688669"/>
+                </a:cubicBezTo>
+                <a:cubicBezTo>
+                  <a:pt x="4821787" y="19769357"/>
+                  <a:pt x="5595882" y="20105121"/>
+                  <a:pt x="6099043" y="20125943"/>
+                </a:cubicBezTo>
+                <a:cubicBezTo>
+                  <a:pt x="6602205" y="20146765"/>
+                  <a:pt x="7139233" y="19857853"/>
+                  <a:pt x="7521443" y="19813605"/>
+                </a:cubicBezTo>
+                <a:cubicBezTo>
+                  <a:pt x="7903653" y="19769357"/>
+                  <a:pt x="8147976" y="19787577"/>
+                  <a:pt x="8392300" y="19860455"/>
+                </a:cubicBezTo>
+                <a:cubicBezTo>
+                  <a:pt x="8636624" y="19933335"/>
+                  <a:pt x="8786605" y="20159779"/>
+                  <a:pt x="8987386" y="20250879"/>
+                </a:cubicBezTo>
+                <a:cubicBezTo>
+                  <a:pt x="9188167" y="20341979"/>
+                  <a:pt x="9301862" y="20396637"/>
+                  <a:pt x="9596986" y="20407049"/>
+                </a:cubicBezTo>
+                <a:cubicBezTo>
+                  <a:pt x="9892110" y="20417459"/>
+                  <a:pt x="10346891" y="20383623"/>
+                  <a:pt x="10758129" y="20313347"/>
+                </a:cubicBezTo>
+                <a:cubicBezTo>
+                  <a:pt x="10963748" y="20278209"/>
+                  <a:pt x="11229843" y="20237215"/>
+                  <a:pt x="11474772" y="20184507"/>
+                </a:cubicBezTo>
+                <a:lnTo>
+                  <a:pt x="11519999" y="20173909"/>
+                </a:lnTo>
+                <a:lnTo>
+                  <a:pt x="11519999" y="26408445"/>
+                </a:lnTo>
+                <a:cubicBezTo>
+                  <a:pt x="11519999" y="26536329"/>
+                  <a:pt x="11416330" y="26639997"/>
+                  <a:pt x="11288447" y="26639997"/>
+                </a:cubicBezTo>
+                <a:lnTo>
+                  <a:pt x="231552" y="26639997"/>
+                </a:lnTo>
+                <a:cubicBezTo>
+                  <a:pt x="119654" y="26639997"/>
+                  <a:pt x="26295" y="26560627"/>
+                  <a:pt x="4704" y="26455111"/>
+                </a:cubicBezTo>
+                <a:lnTo>
+                  <a:pt x="1281" y="26421153"/>
+                </a:lnTo>
+                <a:lnTo>
+                  <a:pt x="3878609" y="26421153"/>
+                </a:lnTo>
+                <a:cubicBezTo>
+                  <a:pt x="4034135" y="26421153"/>
+                  <a:pt x="4160215" y="26295073"/>
+                  <a:pt x="4160215" y="26139545"/>
+                </a:cubicBezTo>
+                <a:lnTo>
+                  <a:pt x="4160215" y="20042757"/>
+                </a:lnTo>
+                <a:cubicBezTo>
+                  <a:pt x="4160215" y="19887231"/>
+                  <a:pt x="4034135" y="19761153"/>
+                  <a:pt x="3878609" y="19761153"/>
+                </a:cubicBezTo>
+                <a:lnTo>
+                  <a:pt x="0" y="19761153"/>
+                </a:lnTo>
+                <a:lnTo>
+                  <a:pt x="0" y="19510321"/>
+                </a:lnTo>
+                <a:lnTo>
+                  <a:pt x="3908099" y="19510321"/>
+                </a:lnTo>
+                <a:cubicBezTo>
+                  <a:pt x="4047338" y="19510321"/>
+                  <a:pt x="4160215" y="19397445"/>
+                  <a:pt x="4160215" y="19258207"/>
+                </a:cubicBezTo>
+                <a:lnTo>
+                  <a:pt x="4160215" y="13102438"/>
+                </a:lnTo>
+                <a:cubicBezTo>
+                  <a:pt x="4160215" y="12963202"/>
+                  <a:pt x="4047338" y="12850322"/>
+                  <a:pt x="3908099" y="12850322"/>
+                </a:cubicBezTo>
+                <a:lnTo>
+                  <a:pt x="0" y="12850322"/>
+                </a:lnTo>
+                <a:lnTo>
+                  <a:pt x="0" y="12628992"/>
+                </a:lnTo>
+                <a:lnTo>
+                  <a:pt x="3878609" y="12628992"/>
+                </a:lnTo>
+                <a:cubicBezTo>
+                  <a:pt x="4034135" y="12628992"/>
+                  <a:pt x="4160215" y="12502911"/>
+                  <a:pt x="4160215" y="12347383"/>
+                </a:cubicBezTo>
+                <a:lnTo>
+                  <a:pt x="4160215" y="6250597"/>
+                </a:lnTo>
+                <a:cubicBezTo>
+                  <a:pt x="4160215" y="6095069"/>
+                  <a:pt x="4034135" y="5968991"/>
+                  <a:pt x="3878609" y="5968991"/>
+                </a:cubicBezTo>
+                <a:lnTo>
+                  <a:pt x="0" y="5968991"/>
+                </a:lnTo>
+                <a:lnTo>
+                  <a:pt x="0" y="231552"/>
+                </a:lnTo>
+                <a:cubicBezTo>
+                  <a:pt x="0" y="103669"/>
+                  <a:pt x="103669" y="0"/>
+                  <a:pt x="231552" y="0"/>
+                </a:cubicBezTo>
+                <a:close/>
+              </a:path>
+            </a:pathLst>
+          </a:custGeom>
+          <a:solidFill>
+            <a:schemeClr val="bg1"/>
+          </a:solidFill>
+          <a:ln w="19050">
+            <a:solidFill>
+              <a:schemeClr val="bg1"/>
+            </a:solidFill>
+          </a:ln>
+          <a:effectLst>
+            <a:softEdge rad="0"/>
+          </a:effectLst>
+        </p:spPr>
+        <p:style>
+          <a:lnRef idx="2">
+            <a:schemeClr val="accent1">
+              <a:shade val="15000"/>
+            </a:schemeClr>
+          </a:lnRef>
+          <a:fillRef idx="1">
+            <a:schemeClr val="accent1"/>
+          </a:fillRef>
+          <a:effectRef idx="0">
+            <a:schemeClr val="accent1"/>
+          </a:effectRef>
+          <a:fontRef idx="minor">
+            <a:schemeClr val="lt1"/>
+          </a:fontRef>
+        </p:style>
+        <p:txBody>
+          <a:bodyPr wrap="square" rtlCol="0" anchor="ctr">
+            <a:noAutofit/>
+          </a:bodyPr>
+          <a:lstStyle/>
+          <a:p>
+            <a:pPr algn="ctr"/>
+            <a:endParaRPr lang="en-FI" sz="1805"/>
+          </a:p>
+        </p:txBody>
+      </p:sp>
+      <p:sp>
+        <p:nvSpPr>
+          <p:cNvPr id="6" name="Hexagon 5">
             <a:extLst>
               <a:ext uri="{FF2B5EF4-FFF2-40B4-BE49-F238E27FC236}">
-                <a16:creationId xmlns:a16="http://schemas.microsoft.com/office/drawing/2014/main" id="{00BF989A-0215-42E7-7DED-047FF2AD99D4}"/>
+                <a16:creationId xmlns:a16="http://schemas.microsoft.com/office/drawing/2014/main" id="{C24762BF-158E-E2D0-4127-EDFD4436FDFA}"/>
               </a:ext>
             </a:extLst>
           </p:cNvPr>
-          <p:cNvSpPr>
-            <a:spLocks noGrp="1"/>
-          </p:cNvSpPr>
-          <p:nvPr>
-            <p:ph type="subTitle" idx="1"/>
-          </p:nvPr>
-        </p:nvSpPr>
-        <p:spPr/>
-        <p:txBody>
-          <a:bodyPr/>
-          <a:lstStyle/>
-          <a:p>
-            <a:endParaRPr lang="en-FI"/>
-          </a:p>
-        </p:txBody>
-      </p:sp>
+          <p:cNvSpPr/>
+          <p:nvPr/>
+        </p:nvSpPr>
+        <p:spPr>
+          <a:xfrm>
+            <a:off x="504495" y="3122508"/>
+            <a:ext cx="1872000" cy="1620000"/>
+          </a:xfrm>
+          <a:prstGeom prst="hexagon">
+            <a:avLst/>
+          </a:prstGeom>
+          <a:solidFill>
+            <a:srgbClr val="004C47"/>
+          </a:solidFill>
+          <a:ln w="38100">
+            <a:solidFill>
+              <a:schemeClr val="bg1"/>
+            </a:solidFill>
+          </a:ln>
+        </p:spPr>
+        <p:style>
+          <a:lnRef idx="2">
+            <a:schemeClr val="accent1">
+              <a:shade val="15000"/>
+            </a:schemeClr>
+          </a:lnRef>
+          <a:fillRef idx="1">
+            <a:schemeClr val="accent1"/>
+          </a:fillRef>
+          <a:effectRef idx="0">
+            <a:schemeClr val="accent1"/>
+          </a:effectRef>
+          <a:fontRef idx="minor">
+            <a:schemeClr val="lt1"/>
+          </a:fontRef>
+        </p:style>
+        <p:txBody>
+          <a:bodyPr rtlCol="0" anchor="ctr"/>
+          <a:lstStyle/>
+          <a:p>
+            <a:pPr algn="ctr"/>
+            <a:endParaRPr lang="en-FI">
+              <a:ln>
+                <a:solidFill>
+                  <a:schemeClr val="bg1"/>
+                </a:solidFill>
+              </a:ln>
+            </a:endParaRPr>
+          </a:p>
+        </p:txBody>
+      </p:sp>
+      <p:sp>
+        <p:nvSpPr>
+          <p:cNvPr id="7" name="Hexagon 6">
+            <a:extLst>
+              <a:ext uri="{FF2B5EF4-FFF2-40B4-BE49-F238E27FC236}">
+                <a16:creationId xmlns:a16="http://schemas.microsoft.com/office/drawing/2014/main" id="{3B527712-8F2C-6263-40EF-B2A2CE78A022}"/>
+              </a:ext>
+            </a:extLst>
+          </p:cNvPr>
+          <p:cNvSpPr/>
+          <p:nvPr/>
+        </p:nvSpPr>
+        <p:spPr>
+          <a:xfrm>
+            <a:off x="2044261" y="3932384"/>
+            <a:ext cx="1872000" cy="1620000"/>
+          </a:xfrm>
+          <a:prstGeom prst="hexagon">
+            <a:avLst/>
+          </a:prstGeom>
+          <a:solidFill>
+            <a:srgbClr val="00746C"/>
+          </a:solidFill>
+          <a:ln w="38100">
+            <a:solidFill>
+              <a:schemeClr val="bg1"/>
+            </a:solidFill>
+          </a:ln>
+        </p:spPr>
+        <p:style>
+          <a:lnRef idx="2">
+            <a:schemeClr val="accent1">
+              <a:shade val="15000"/>
+            </a:schemeClr>
+          </a:lnRef>
+          <a:fillRef idx="1">
+            <a:schemeClr val="accent1"/>
+          </a:fillRef>
+          <a:effectRef idx="0">
+            <a:schemeClr val="accent1"/>
+          </a:effectRef>
+          <a:fontRef idx="minor">
+            <a:schemeClr val="lt1"/>
+          </a:fontRef>
+        </p:style>
+        <p:txBody>
+          <a:bodyPr rtlCol="0" anchor="ctr"/>
+          <a:lstStyle/>
+          <a:p>
+            <a:pPr algn="ctr"/>
+            <a:endParaRPr lang="en-FI" dirty="0">
+              <a:ln>
+                <a:solidFill>
+                  <a:schemeClr val="bg1"/>
+                </a:solidFill>
+              </a:ln>
+            </a:endParaRPr>
+          </a:p>
+        </p:txBody>
+      </p:sp>
+      <p:sp>
+        <p:nvSpPr>
+          <p:cNvPr id="8" name="Hexagon 7">
+            <a:extLst>
+              <a:ext uri="{FF2B5EF4-FFF2-40B4-BE49-F238E27FC236}">
+                <a16:creationId xmlns:a16="http://schemas.microsoft.com/office/drawing/2014/main" id="{254B4015-943B-49D1-B0F9-431F40C1873A}"/>
+              </a:ext>
+            </a:extLst>
+          </p:cNvPr>
+          <p:cNvSpPr/>
+          <p:nvPr/>
+        </p:nvSpPr>
+        <p:spPr>
+          <a:xfrm>
+            <a:off x="3584027" y="3122508"/>
+            <a:ext cx="1872000" cy="1620000"/>
+          </a:xfrm>
+          <a:prstGeom prst="hexagon">
+            <a:avLst/>
+          </a:prstGeom>
+          <a:solidFill>
+            <a:srgbClr val="00978D"/>
+          </a:solidFill>
+          <a:ln w="38100">
+            <a:solidFill>
+              <a:schemeClr val="bg1"/>
+            </a:solidFill>
+          </a:ln>
+        </p:spPr>
+        <p:style>
+          <a:lnRef idx="2">
+            <a:schemeClr val="accent1">
+              <a:shade val="15000"/>
+            </a:schemeClr>
+          </a:lnRef>
+          <a:fillRef idx="1">
+            <a:schemeClr val="accent1"/>
+          </a:fillRef>
+          <a:effectRef idx="0">
+            <a:schemeClr val="accent1"/>
+          </a:effectRef>
+          <a:fontRef idx="minor">
+            <a:schemeClr val="lt1"/>
+          </a:fontRef>
+        </p:style>
+        <p:txBody>
+          <a:bodyPr rtlCol="0" anchor="ctr"/>
+          <a:lstStyle/>
+          <a:p>
+            <a:pPr algn="ctr"/>
+            <a:endParaRPr lang="en-FI">
+              <a:ln>
+                <a:solidFill>
+                  <a:schemeClr val="bg1"/>
+                </a:solidFill>
+              </a:ln>
+            </a:endParaRPr>
+          </a:p>
+        </p:txBody>
+      </p:sp>
+      <p:sp>
+        <p:nvSpPr>
+          <p:cNvPr id="9" name="Hexagon 8">
+            <a:extLst>
+              <a:ext uri="{FF2B5EF4-FFF2-40B4-BE49-F238E27FC236}">
+                <a16:creationId xmlns:a16="http://schemas.microsoft.com/office/drawing/2014/main" id="{62D84875-9E68-6712-2657-62C14582D629}"/>
+              </a:ext>
+            </a:extLst>
+          </p:cNvPr>
+          <p:cNvSpPr/>
+          <p:nvPr/>
+        </p:nvSpPr>
+        <p:spPr>
+          <a:xfrm>
+            <a:off x="5155324" y="3932384"/>
+            <a:ext cx="1872000" cy="1620000"/>
+          </a:xfrm>
+          <a:prstGeom prst="hexagon">
+            <a:avLst/>
+          </a:prstGeom>
+          <a:solidFill>
+            <a:srgbClr val="0CB9A7"/>
+          </a:solidFill>
+          <a:ln w="38100">
+            <a:solidFill>
+              <a:schemeClr val="bg1"/>
+            </a:solidFill>
+          </a:ln>
+        </p:spPr>
+        <p:style>
+          <a:lnRef idx="2">
+            <a:schemeClr val="accent1">
+              <a:shade val="15000"/>
+            </a:schemeClr>
+          </a:lnRef>
+          <a:fillRef idx="1">
+            <a:schemeClr val="accent1"/>
+          </a:fillRef>
+          <a:effectRef idx="0">
+            <a:schemeClr val="accent1"/>
+          </a:effectRef>
+          <a:fontRef idx="minor">
+            <a:schemeClr val="lt1"/>
+          </a:fontRef>
+        </p:style>
+        <p:txBody>
+          <a:bodyPr rtlCol="0" anchor="ctr"/>
+          <a:lstStyle/>
+          <a:p>
+            <a:pPr algn="ctr"/>
+            <a:endParaRPr lang="en-FI">
+              <a:ln>
+                <a:solidFill>
+                  <a:schemeClr val="bg1"/>
+                </a:solidFill>
+              </a:ln>
+            </a:endParaRPr>
+          </a:p>
+        </p:txBody>
+      </p:sp>
+      <p:sp>
+        <p:nvSpPr>
+          <p:cNvPr id="10" name="Hexagon 9">
+            <a:extLst>
+              <a:ext uri="{FF2B5EF4-FFF2-40B4-BE49-F238E27FC236}">
+                <a16:creationId xmlns:a16="http://schemas.microsoft.com/office/drawing/2014/main" id="{C5254688-4E16-3C5B-E48C-DD15D6F016F1}"/>
+              </a:ext>
+            </a:extLst>
+          </p:cNvPr>
+          <p:cNvSpPr/>
+          <p:nvPr/>
+        </p:nvSpPr>
+        <p:spPr>
+          <a:xfrm>
+            <a:off x="6726621" y="3122508"/>
+            <a:ext cx="1872000" cy="1620000"/>
+          </a:xfrm>
+          <a:prstGeom prst="hexagon">
+            <a:avLst/>
+          </a:prstGeom>
+          <a:solidFill>
+            <a:srgbClr val="65B686"/>
+          </a:solidFill>
+          <a:ln w="38100">
+            <a:solidFill>
+              <a:schemeClr val="bg1"/>
+            </a:solidFill>
+          </a:ln>
+        </p:spPr>
+        <p:style>
+          <a:lnRef idx="2">
+            <a:schemeClr val="accent1">
+              <a:shade val="15000"/>
+            </a:schemeClr>
+          </a:lnRef>
+          <a:fillRef idx="1">
+            <a:schemeClr val="accent1"/>
+          </a:fillRef>
+          <a:effectRef idx="0">
+            <a:schemeClr val="accent1"/>
+          </a:effectRef>
+          <a:fontRef idx="minor">
+            <a:schemeClr val="lt1"/>
+          </a:fontRef>
+        </p:style>
+        <p:txBody>
+          <a:bodyPr rtlCol="0" anchor="ctr"/>
+          <a:lstStyle/>
+          <a:p>
+            <a:pPr algn="ctr"/>
+            <a:endParaRPr lang="en-FI">
+              <a:ln>
+                <a:solidFill>
+                  <a:schemeClr val="bg1"/>
+                </a:solidFill>
+              </a:ln>
+            </a:endParaRPr>
+          </a:p>
+        </p:txBody>
+      </p:sp>
+      <p:sp>
+        <p:nvSpPr>
+          <p:cNvPr id="11" name="Hexagon 10">
+            <a:extLst>
+              <a:ext uri="{FF2B5EF4-FFF2-40B4-BE49-F238E27FC236}">
+                <a16:creationId xmlns:a16="http://schemas.microsoft.com/office/drawing/2014/main" id="{A958C89A-0CE9-3E2C-4F0E-C2D8104FCBF3}"/>
+              </a:ext>
+            </a:extLst>
+          </p:cNvPr>
+          <p:cNvSpPr/>
+          <p:nvPr/>
+        </p:nvSpPr>
+        <p:spPr>
+          <a:xfrm>
+            <a:off x="8297918" y="3932384"/>
+            <a:ext cx="1872000" cy="1620000"/>
+          </a:xfrm>
+          <a:prstGeom prst="hexagon">
+            <a:avLst/>
+          </a:prstGeom>
+          <a:solidFill>
+            <a:srgbClr val="B9B466"/>
+          </a:solidFill>
+          <a:ln w="38100">
+            <a:solidFill>
+              <a:schemeClr val="bg1"/>
+            </a:solidFill>
+          </a:ln>
+        </p:spPr>
+        <p:style>
+          <a:lnRef idx="2">
+            <a:schemeClr val="accent1">
+              <a:shade val="15000"/>
+            </a:schemeClr>
+          </a:lnRef>
+          <a:fillRef idx="1">
+            <a:schemeClr val="accent1"/>
+          </a:fillRef>
+          <a:effectRef idx="0">
+            <a:schemeClr val="accent1"/>
+          </a:effectRef>
+          <a:fontRef idx="minor">
+            <a:schemeClr val="lt1"/>
+          </a:fontRef>
+        </p:style>
+        <p:txBody>
+          <a:bodyPr rtlCol="0" anchor="ctr"/>
+          <a:lstStyle/>
+          <a:p>
+            <a:pPr algn="ctr"/>
+            <a:endParaRPr lang="en-FI">
+              <a:ln>
+                <a:solidFill>
+                  <a:schemeClr val="bg1"/>
+                </a:solidFill>
+              </a:ln>
+            </a:endParaRPr>
+          </a:p>
+        </p:txBody>
+      </p:sp>
+      <p:sp>
+        <p:nvSpPr>
+          <p:cNvPr id="12" name="Hexagon 11">
+            <a:extLst>
+              <a:ext uri="{FF2B5EF4-FFF2-40B4-BE49-F238E27FC236}">
+                <a16:creationId xmlns:a16="http://schemas.microsoft.com/office/drawing/2014/main" id="{B412C31F-C6C6-97AE-02AA-553810CF2BAB}"/>
+              </a:ext>
+            </a:extLst>
+          </p:cNvPr>
+          <p:cNvSpPr/>
+          <p:nvPr/>
+        </p:nvSpPr>
+        <p:spPr>
+          <a:xfrm>
+            <a:off x="9869215" y="3122508"/>
+            <a:ext cx="1872000" cy="1620000"/>
+          </a:xfrm>
+          <a:prstGeom prst="hexagon">
+            <a:avLst/>
+          </a:prstGeom>
+          <a:solidFill>
+            <a:srgbClr val="EFB251"/>
+          </a:solidFill>
+          <a:ln w="38100">
+            <a:solidFill>
+              <a:schemeClr val="bg1"/>
+            </a:solidFill>
+          </a:ln>
+        </p:spPr>
+        <p:style>
+          <a:lnRef idx="2">
+            <a:schemeClr val="accent1">
+              <a:shade val="15000"/>
+            </a:schemeClr>
+          </a:lnRef>
+          <a:fillRef idx="1">
+            <a:schemeClr val="accent1"/>
+          </a:fillRef>
+          <a:effectRef idx="0">
+            <a:schemeClr val="accent1"/>
+          </a:effectRef>
+          <a:fontRef idx="minor">
+            <a:schemeClr val="lt1"/>
+          </a:fontRef>
+        </p:style>
+        <p:txBody>
+          <a:bodyPr rtlCol="0" anchor="ctr"/>
+          <a:lstStyle/>
+          <a:p>
+            <a:pPr algn="ctr"/>
+            <a:endParaRPr lang="en-FI">
+              <a:ln>
+                <a:solidFill>
+                  <a:schemeClr val="bg1"/>
+                </a:solidFill>
+              </a:ln>
+            </a:endParaRPr>
+          </a:p>
+        </p:txBody>
+      </p:sp>
+      <p:pic>
+        <p:nvPicPr>
+          <p:cNvPr id="2" name="Graphic 1" descr="Octopus with solid fill">
+            <a:extLst>
+              <a:ext uri="{FF2B5EF4-FFF2-40B4-BE49-F238E27FC236}">
+                <a16:creationId xmlns:a16="http://schemas.microsoft.com/office/drawing/2014/main" id="{F3DD2725-3440-1EC7-415C-8863B76DF71F}"/>
+              </a:ext>
+            </a:extLst>
+          </p:cNvPr>
+          <p:cNvPicPr>
+            <a:picLocks noChangeAspect="1"/>
+          </p:cNvPicPr>
+          <p:nvPr/>
+        </p:nvPicPr>
+        <p:blipFill>
+          <a:blip r:embed="rId2">
+            <a:extLst>
+              <a:ext uri="{28A0092B-C50C-407E-A947-70E740481C1C}">
+                <a14:useLocalDpi xmlns:a14="http://schemas.microsoft.com/office/drawing/2010/main" val="0"/>
+              </a:ext>
+              <a:ext uri="{96DAC541-7B7A-43D3-8B79-37D633B846F1}">
+                <asvg:svgBlip xmlns:asvg="http://schemas.microsoft.com/office/drawing/2016/SVG/main" r:embed="rId3"/>
+              </a:ext>
+            </a:extLst>
+          </a:blip>
+          <a:stretch>
+            <a:fillRect/>
+          </a:stretch>
+        </p:blipFill>
+        <p:spPr>
+          <a:xfrm>
+            <a:off x="2845341" y="360281"/>
+            <a:ext cx="914400" cy="914400"/>
+          </a:xfrm>
+          <a:prstGeom prst="rect">
+            <a:avLst/>
+          </a:prstGeom>
+          <a:effectLst/>
+        </p:spPr>
+      </p:pic>
+      <p:sp>
+        <p:nvSpPr>
+          <p:cNvPr id="3" name="TextBox 2">
+            <a:extLst>
+              <a:ext uri="{FF2B5EF4-FFF2-40B4-BE49-F238E27FC236}">
+                <a16:creationId xmlns:a16="http://schemas.microsoft.com/office/drawing/2014/main" id="{56D3CB51-6ADA-17A9-04F8-8A71953BFEF7}"/>
+              </a:ext>
+            </a:extLst>
+          </p:cNvPr>
+          <p:cNvSpPr txBox="1"/>
+          <p:nvPr/>
+        </p:nvSpPr>
+        <p:spPr>
+          <a:xfrm>
+            <a:off x="555834" y="369180"/>
+            <a:ext cx="5535490" cy="861774"/>
+          </a:xfrm>
+          <a:prstGeom prst="rect">
+            <a:avLst/>
+          </a:prstGeom>
+          <a:noFill/>
+        </p:spPr>
+        <p:txBody>
+          <a:bodyPr wrap="none" rtlCol="0">
+            <a:spAutoFit/>
+          </a:bodyPr>
+          <a:lstStyle/>
+          <a:p>
+            <a:r>
+              <a:rPr lang="en-US" sz="5000" dirty="0">
+                <a:gradFill flip="none" rotWithShape="1">
+                  <a:gsLst>
+                    <a:gs pos="31000">
+                      <a:srgbClr val="00C6BB"/>
+                    </a:gs>
+                    <a:gs pos="77000">
+                      <a:srgbClr val="EFB251"/>
+                    </a:gs>
+                  </a:gsLst>
+                  <a:lin ang="16200000" scaled="1"/>
+                  <a:tileRect/>
+                </a:gradFill>
+                <a:latin typeface="STHupo" panose="02010800040101010101" pitchFamily="2" charset="-122"/>
+                <a:ea typeface="STHupo" panose="02010800040101010101" pitchFamily="2" charset="-122"/>
+              </a:rPr>
+              <a:t>KRAKEN     KOFFEE</a:t>
+            </a:r>
+          </a:p>
+        </p:txBody>
+      </p:sp>
+      <p:sp>
+        <p:nvSpPr>
+          <p:cNvPr id="5" name="TextBox 4">
+            <a:extLst>
+              <a:ext uri="{FF2B5EF4-FFF2-40B4-BE49-F238E27FC236}">
+                <a16:creationId xmlns:a16="http://schemas.microsoft.com/office/drawing/2014/main" id="{DDB82071-1332-6AAC-A320-D2826DCBFB91}"/>
+              </a:ext>
+            </a:extLst>
+          </p:cNvPr>
+          <p:cNvSpPr txBox="1"/>
+          <p:nvPr/>
+        </p:nvSpPr>
+        <p:spPr>
+          <a:xfrm>
+            <a:off x="5939627" y="495645"/>
+            <a:ext cx="5801588" cy="646331"/>
+          </a:xfrm>
+          <a:prstGeom prst="rect">
+            <a:avLst/>
+          </a:prstGeom>
+          <a:noFill/>
+        </p:spPr>
+        <p:txBody>
+          <a:bodyPr wrap="none" rtlCol="0">
+            <a:spAutoFit/>
+          </a:bodyPr>
+          <a:lstStyle/>
+          <a:p>
+            <a:r>
+              <a:rPr lang="en-FI" sz="3600" spc="300" dirty="0">
+                <a:ln w="25400">
+                  <a:gradFill>
+                    <a:gsLst>
+                      <a:gs pos="0">
+                        <a:schemeClr val="accent2"/>
+                      </a:gs>
+                      <a:gs pos="100000">
+                        <a:schemeClr val="accent1"/>
+                      </a:gs>
+                    </a:gsLst>
+                    <a:lin ang="5400000" scaled="1"/>
+                  </a:gradFill>
+                </a:ln>
+                <a:solidFill>
+                  <a:schemeClr val="bg1"/>
+                </a:solidFill>
+                <a:latin typeface="STHupo" panose="02010800040101010101" pitchFamily="2" charset="-122"/>
+                <a:ea typeface="STHupo" panose="02010800040101010101" pitchFamily="2" charset="-122"/>
+              </a:rPr>
+              <a:t>2023 HALF-YEAR REVIEW</a:t>
+            </a:r>
+          </a:p>
+        </p:txBody>
+      </p:sp>
+      <p:sp>
+        <p:nvSpPr>
+          <p:cNvPr id="13" name="TextBox 12">
+            <a:extLst>
+              <a:ext uri="{FF2B5EF4-FFF2-40B4-BE49-F238E27FC236}">
+                <a16:creationId xmlns:a16="http://schemas.microsoft.com/office/drawing/2014/main" id="{6B2B1EE8-DFCB-428E-83E8-77D5700B9CF6}"/>
+              </a:ext>
+            </a:extLst>
+          </p:cNvPr>
+          <p:cNvSpPr txBox="1"/>
+          <p:nvPr/>
+        </p:nvSpPr>
+        <p:spPr>
+          <a:xfrm>
+            <a:off x="331324" y="1281754"/>
+            <a:ext cx="11520000" cy="923330"/>
+          </a:xfrm>
+          <a:prstGeom prst="rect">
+            <a:avLst/>
+          </a:prstGeom>
+          <a:noFill/>
+        </p:spPr>
+        <p:txBody>
+          <a:bodyPr wrap="square" rtlCol="0">
+            <a:spAutoFit/>
+          </a:bodyPr>
+          <a:lstStyle/>
+          <a:p>
+            <a:pPr algn="ctr"/>
+            <a:r>
+              <a:rPr lang="en-FI" dirty="0">
+                <a:solidFill>
+                  <a:schemeClr val="bg2">
+                    <a:lumMod val="25000"/>
+                  </a:schemeClr>
+                </a:solidFill>
+                <a:latin typeface="Bahnschrift Condensed" panose="020B0502040204020203" pitchFamily="34" charset="0"/>
+              </a:rPr>
+              <a:t>Welcome to the 2023 Sales Review report for Kraken Koffee’s </a:t>
+            </a:r>
+            <a:r>
+              <a:rPr lang="en-FI" dirty="0">
+                <a:solidFill>
+                  <a:schemeClr val="accent1"/>
+                </a:solidFill>
+                <a:latin typeface="Bahnschrift Condensed" panose="020B0502040204020203" pitchFamily="34" charset="0"/>
+              </a:rPr>
+              <a:t>NEW FLORIDA SALES REGION</a:t>
+            </a:r>
+            <a:r>
+              <a:rPr lang="en-FI" dirty="0">
+                <a:solidFill>
+                  <a:schemeClr val="bg2">
+                    <a:lumMod val="25000"/>
+                  </a:schemeClr>
+                </a:solidFill>
+                <a:latin typeface="Bahnschrift Condensed" panose="020B0502040204020203" pitchFamily="34" charset="0"/>
+              </a:rPr>
+              <a:t>. In the visuals below, you will learn all about our brilliant team’s performance across our three flagship stores. We’ll cover insights from a range of strategic areas, pinpoint specific opportunities for improvement, and forecast the second half of 2023</a:t>
+            </a:r>
+          </a:p>
+        </p:txBody>
+      </p:sp>
+      <p:sp>
+        <p:nvSpPr>
+          <p:cNvPr id="14" name="TextBox 13">
+            <a:extLst>
+              <a:ext uri="{FF2B5EF4-FFF2-40B4-BE49-F238E27FC236}">
+                <a16:creationId xmlns:a16="http://schemas.microsoft.com/office/drawing/2014/main" id="{23AA2394-3F4A-8E15-96A9-EA1C7019E8C1}"/>
+              </a:ext>
+            </a:extLst>
+          </p:cNvPr>
+          <p:cNvSpPr txBox="1"/>
+          <p:nvPr/>
+        </p:nvSpPr>
+        <p:spPr>
+          <a:xfrm>
+            <a:off x="555834" y="2550202"/>
+            <a:ext cx="1757599" cy="605294"/>
+          </a:xfrm>
+          <a:prstGeom prst="rect">
+            <a:avLst/>
+          </a:prstGeom>
+          <a:noFill/>
+        </p:spPr>
+        <p:txBody>
+          <a:bodyPr wrap="square" rtlCol="0">
+            <a:spAutoFit/>
+          </a:bodyPr>
+          <a:lstStyle/>
+          <a:p>
+            <a:pPr algn="ctr">
+              <a:lnSpc>
+                <a:spcPts val="2000"/>
+              </a:lnSpc>
+            </a:pPr>
+            <a:r>
+              <a:rPr lang="en-FI" sz="2000" dirty="0">
+                <a:solidFill>
+                  <a:srgbClr val="003A36"/>
+                </a:solidFill>
+                <a:latin typeface="Bahnschrift Condensed" panose="020B0502040204020203" pitchFamily="34" charset="0"/>
+              </a:rPr>
+              <a:t>Total # of Purchases</a:t>
+            </a:r>
+          </a:p>
+        </p:txBody>
+      </p:sp>
+      <p:sp>
+        <p:nvSpPr>
+          <p:cNvPr id="15" name="TextBox 14">
+            <a:extLst>
+              <a:ext uri="{FF2B5EF4-FFF2-40B4-BE49-F238E27FC236}">
+                <a16:creationId xmlns:a16="http://schemas.microsoft.com/office/drawing/2014/main" id="{D5B115F7-519E-78FF-C311-A3B7F591673D}"/>
+              </a:ext>
+            </a:extLst>
+          </p:cNvPr>
+          <p:cNvSpPr txBox="1"/>
+          <p:nvPr/>
+        </p:nvSpPr>
+        <p:spPr>
+          <a:xfrm>
+            <a:off x="2130489" y="5584988"/>
+            <a:ext cx="1757599" cy="348813"/>
+          </a:xfrm>
+          <a:prstGeom prst="rect">
+            <a:avLst/>
+          </a:prstGeom>
+          <a:noFill/>
+        </p:spPr>
+        <p:txBody>
+          <a:bodyPr wrap="square" rtlCol="0">
+            <a:spAutoFit/>
+          </a:bodyPr>
+          <a:lstStyle/>
+          <a:p>
+            <a:pPr algn="ctr">
+              <a:lnSpc>
+                <a:spcPts val="2000"/>
+              </a:lnSpc>
+            </a:pPr>
+            <a:r>
+              <a:rPr lang="en-FI" sz="2000" dirty="0">
+                <a:solidFill>
+                  <a:srgbClr val="005852"/>
+                </a:solidFill>
+                <a:latin typeface="Bahnschrift Condensed" panose="020B0502040204020203" pitchFamily="34" charset="0"/>
+              </a:rPr>
+              <a:t>Total Sales ($)</a:t>
+            </a:r>
+          </a:p>
+        </p:txBody>
+      </p:sp>
+      <p:sp>
+        <p:nvSpPr>
+          <p:cNvPr id="16" name="TextBox 15">
+            <a:extLst>
+              <a:ext uri="{FF2B5EF4-FFF2-40B4-BE49-F238E27FC236}">
+                <a16:creationId xmlns:a16="http://schemas.microsoft.com/office/drawing/2014/main" id="{6F26DD93-DEAD-02BA-855D-D123CDCCF0BE}"/>
+              </a:ext>
+            </a:extLst>
+          </p:cNvPr>
+          <p:cNvSpPr txBox="1"/>
+          <p:nvPr/>
+        </p:nvSpPr>
+        <p:spPr>
+          <a:xfrm>
+            <a:off x="3901747" y="2550202"/>
+            <a:ext cx="1239063" cy="605294"/>
+          </a:xfrm>
+          <a:prstGeom prst="rect">
+            <a:avLst/>
+          </a:prstGeom>
+          <a:noFill/>
+        </p:spPr>
+        <p:txBody>
+          <a:bodyPr wrap="square" rtlCol="0">
+            <a:spAutoFit/>
+          </a:bodyPr>
+          <a:lstStyle/>
+          <a:p>
+            <a:pPr algn="ctr">
+              <a:lnSpc>
+                <a:spcPts val="2000"/>
+              </a:lnSpc>
+            </a:pPr>
+            <a:r>
+              <a:rPr lang="en-FI" sz="2000" dirty="0">
+                <a:solidFill>
+                  <a:srgbClr val="007E75"/>
+                </a:solidFill>
+                <a:latin typeface="Bahnschrift Condensed" panose="020B0502040204020203" pitchFamily="34" charset="0"/>
+              </a:rPr>
+              <a:t>Average Order Size</a:t>
+            </a:r>
+          </a:p>
+        </p:txBody>
+      </p:sp>
+      <p:sp>
+        <p:nvSpPr>
+          <p:cNvPr id="17" name="TextBox 16">
+            <a:extLst>
+              <a:ext uri="{FF2B5EF4-FFF2-40B4-BE49-F238E27FC236}">
+                <a16:creationId xmlns:a16="http://schemas.microsoft.com/office/drawing/2014/main" id="{0AD784FD-D4ED-E1E6-92D1-55F72963E731}"/>
+              </a:ext>
+            </a:extLst>
+          </p:cNvPr>
+          <p:cNvSpPr txBox="1"/>
+          <p:nvPr/>
+        </p:nvSpPr>
+        <p:spPr>
+          <a:xfrm>
+            <a:off x="5259065" y="5584988"/>
+            <a:ext cx="1757599" cy="348813"/>
+          </a:xfrm>
+          <a:prstGeom prst="rect">
+            <a:avLst/>
+          </a:prstGeom>
+          <a:noFill/>
+        </p:spPr>
+        <p:txBody>
+          <a:bodyPr wrap="square" rtlCol="0">
+            <a:spAutoFit/>
+          </a:bodyPr>
+          <a:lstStyle/>
+          <a:p>
+            <a:pPr algn="ctr">
+              <a:lnSpc>
+                <a:spcPts val="2000"/>
+              </a:lnSpc>
+            </a:pPr>
+            <a:r>
+              <a:rPr lang="en-FI" sz="2000" dirty="0">
+                <a:solidFill>
+                  <a:srgbClr val="0A9E90"/>
+                </a:solidFill>
+                <a:latin typeface="Bahnschrift Condensed" panose="020B0502040204020203" pitchFamily="34" charset="0"/>
+              </a:rPr>
+              <a:t># of New Stores</a:t>
+            </a:r>
+          </a:p>
+        </p:txBody>
+      </p:sp>
+      <p:sp>
+        <p:nvSpPr>
+          <p:cNvPr id="18" name="TextBox 17">
+            <a:extLst>
+              <a:ext uri="{FF2B5EF4-FFF2-40B4-BE49-F238E27FC236}">
+                <a16:creationId xmlns:a16="http://schemas.microsoft.com/office/drawing/2014/main" id="{3B179A0F-6887-18F0-79DC-E39CAC52F547}"/>
+              </a:ext>
+            </a:extLst>
+          </p:cNvPr>
+          <p:cNvSpPr txBox="1"/>
+          <p:nvPr/>
+        </p:nvSpPr>
+        <p:spPr>
+          <a:xfrm>
+            <a:off x="6973123" y="2550202"/>
+            <a:ext cx="1370978" cy="605294"/>
+          </a:xfrm>
+          <a:prstGeom prst="rect">
+            <a:avLst/>
+          </a:prstGeom>
+          <a:noFill/>
+        </p:spPr>
+        <p:txBody>
+          <a:bodyPr wrap="square" rtlCol="0">
+            <a:spAutoFit/>
+          </a:bodyPr>
+          <a:lstStyle/>
+          <a:p>
+            <a:pPr algn="ctr">
+              <a:lnSpc>
+                <a:spcPts val="2000"/>
+              </a:lnSpc>
+            </a:pPr>
+            <a:r>
+              <a:rPr lang="en-FI" sz="2000" dirty="0">
+                <a:solidFill>
+                  <a:srgbClr val="53AD77"/>
+                </a:solidFill>
+                <a:latin typeface="Bahnschrift Condensed" panose="020B0502040204020203" pitchFamily="34" charset="0"/>
+              </a:rPr>
+              <a:t>Total # Of Menu Items</a:t>
+            </a:r>
+          </a:p>
+        </p:txBody>
+      </p:sp>
+      <p:sp>
+        <p:nvSpPr>
+          <p:cNvPr id="19" name="TextBox 18">
+            <a:extLst>
+              <a:ext uri="{FF2B5EF4-FFF2-40B4-BE49-F238E27FC236}">
+                <a16:creationId xmlns:a16="http://schemas.microsoft.com/office/drawing/2014/main" id="{9140BC08-BF12-8F48-30CD-D83079D71570}"/>
+              </a:ext>
+            </a:extLst>
+          </p:cNvPr>
+          <p:cNvSpPr txBox="1"/>
+          <p:nvPr/>
+        </p:nvSpPr>
+        <p:spPr>
+          <a:xfrm>
+            <a:off x="8387642" y="5584988"/>
+            <a:ext cx="1757599" cy="348813"/>
+          </a:xfrm>
+          <a:prstGeom prst="rect">
+            <a:avLst/>
+          </a:prstGeom>
+          <a:noFill/>
+        </p:spPr>
+        <p:txBody>
+          <a:bodyPr wrap="square" rtlCol="0">
+            <a:spAutoFit/>
+          </a:bodyPr>
+          <a:lstStyle/>
+          <a:p>
+            <a:pPr algn="ctr">
+              <a:lnSpc>
+                <a:spcPts val="2000"/>
+              </a:lnSpc>
+            </a:pPr>
+            <a:r>
+              <a:rPr lang="en-FI" sz="2000" dirty="0">
+                <a:solidFill>
+                  <a:srgbClr val="AFA851"/>
+                </a:solidFill>
+                <a:latin typeface="Bahnschrift Condensed" panose="020B0502040204020203" pitchFamily="34" charset="0"/>
+              </a:rPr>
+              <a:t>Best Seller ($)</a:t>
+            </a:r>
+          </a:p>
+        </p:txBody>
+      </p:sp>
+      <p:sp>
+        <p:nvSpPr>
+          <p:cNvPr id="20" name="TextBox 19">
+            <a:extLst>
+              <a:ext uri="{FF2B5EF4-FFF2-40B4-BE49-F238E27FC236}">
+                <a16:creationId xmlns:a16="http://schemas.microsoft.com/office/drawing/2014/main" id="{21923856-6776-452F-F2FD-709A9642E8ED}"/>
+              </a:ext>
+            </a:extLst>
+          </p:cNvPr>
+          <p:cNvSpPr txBox="1"/>
+          <p:nvPr/>
+        </p:nvSpPr>
+        <p:spPr>
+          <a:xfrm>
+            <a:off x="9907311" y="2550202"/>
+            <a:ext cx="1757599" cy="605294"/>
+          </a:xfrm>
+          <a:prstGeom prst="rect">
+            <a:avLst/>
+          </a:prstGeom>
+          <a:noFill/>
+        </p:spPr>
+        <p:txBody>
+          <a:bodyPr wrap="square" rtlCol="0">
+            <a:spAutoFit/>
+          </a:bodyPr>
+          <a:lstStyle/>
+          <a:p>
+            <a:pPr algn="ctr">
+              <a:lnSpc>
+                <a:spcPts val="2000"/>
+              </a:lnSpc>
+            </a:pPr>
+            <a:r>
+              <a:rPr lang="en-FI" sz="2000" dirty="0">
+                <a:solidFill>
+                  <a:srgbClr val="ECA32C"/>
+                </a:solidFill>
+                <a:latin typeface="Bahnschrift Condensed" panose="020B0502040204020203" pitchFamily="34" charset="0"/>
+              </a:rPr>
+              <a:t>Best Seller (Quantity)</a:t>
+            </a:r>
+          </a:p>
+        </p:txBody>
+      </p:sp>
+      <p:pic>
+        <p:nvPicPr>
+          <p:cNvPr id="36" name="Graphic 35" descr="Palm tree with solid fill">
+            <a:extLst>
+              <a:ext uri="{FF2B5EF4-FFF2-40B4-BE49-F238E27FC236}">
+                <a16:creationId xmlns:a16="http://schemas.microsoft.com/office/drawing/2014/main" id="{9164895B-B067-791F-5D6C-9B9BEB9A66CA}"/>
+              </a:ext>
+            </a:extLst>
+          </p:cNvPr>
+          <p:cNvPicPr>
+            <a:picLocks noChangeAspect="1"/>
+          </p:cNvPicPr>
+          <p:nvPr/>
+        </p:nvPicPr>
+        <p:blipFill>
+          <a:blip r:embed="rId4">
+            <a:extLst>
+              <a:ext uri="{96DAC541-7B7A-43D3-8B79-37D633B846F1}">
+                <asvg:svgBlip xmlns:asvg="http://schemas.microsoft.com/office/drawing/2016/SVG/main" r:embed="rId5"/>
+              </a:ext>
+            </a:extLst>
+          </a:blip>
+          <a:stretch>
+            <a:fillRect/>
+          </a:stretch>
+        </p:blipFill>
+        <p:spPr>
+          <a:xfrm>
+            <a:off x="2521176" y="3101039"/>
+            <a:ext cx="914400" cy="914400"/>
+          </a:xfrm>
+          <a:prstGeom prst="rect">
+            <a:avLst/>
+          </a:prstGeom>
+        </p:spPr>
+      </p:pic>
+      <p:pic>
+        <p:nvPicPr>
+          <p:cNvPr id="38" name="Graphic 37" descr="Seaweed with solid fill">
+            <a:extLst>
+              <a:ext uri="{FF2B5EF4-FFF2-40B4-BE49-F238E27FC236}">
+                <a16:creationId xmlns:a16="http://schemas.microsoft.com/office/drawing/2014/main" id="{DB9832E2-066E-FB3E-B343-93ACBB0ADECE}"/>
+              </a:ext>
+            </a:extLst>
+          </p:cNvPr>
+          <p:cNvPicPr>
+            <a:picLocks noChangeAspect="1"/>
+          </p:cNvPicPr>
+          <p:nvPr/>
+        </p:nvPicPr>
+        <p:blipFill>
+          <a:blip r:embed="rId6">
+            <a:extLst>
+              <a:ext uri="{96DAC541-7B7A-43D3-8B79-37D633B846F1}">
+                <asvg:svgBlip xmlns:asvg="http://schemas.microsoft.com/office/drawing/2016/SVG/main" r:embed="rId7"/>
+              </a:ext>
+            </a:extLst>
+          </a:blip>
+          <a:stretch>
+            <a:fillRect/>
+          </a:stretch>
+        </p:blipFill>
+        <p:spPr>
+          <a:xfrm>
+            <a:off x="2481700" y="25865080"/>
+            <a:ext cx="914400" cy="914400"/>
+          </a:xfrm>
+          <a:prstGeom prst="rect">
+            <a:avLst/>
+          </a:prstGeom>
+        </p:spPr>
+      </p:pic>
+      <p:pic>
+        <p:nvPicPr>
+          <p:cNvPr id="40" name="Graphic 39" descr="Seaweed with solid fill">
+            <a:extLst>
+              <a:ext uri="{FF2B5EF4-FFF2-40B4-BE49-F238E27FC236}">
+                <a16:creationId xmlns:a16="http://schemas.microsoft.com/office/drawing/2014/main" id="{7FA8DC06-F6F0-1565-E94B-A32F6E6CE34B}"/>
+              </a:ext>
+            </a:extLst>
+          </p:cNvPr>
+          <p:cNvPicPr>
+            <a:picLocks noChangeAspect="1"/>
+          </p:cNvPicPr>
+          <p:nvPr/>
+        </p:nvPicPr>
+        <p:blipFill>
+          <a:blip r:embed="rId8">
+            <a:extLst>
+              <a:ext uri="{96DAC541-7B7A-43D3-8B79-37D633B846F1}">
+                <asvg:svgBlip xmlns:asvg="http://schemas.microsoft.com/office/drawing/2016/SVG/main" r:embed="rId9"/>
+              </a:ext>
+            </a:extLst>
+          </a:blip>
+          <a:stretch>
+            <a:fillRect/>
+          </a:stretch>
+        </p:blipFill>
+        <p:spPr>
+          <a:xfrm>
+            <a:off x="115424" y="25852380"/>
+            <a:ext cx="914400" cy="914400"/>
+          </a:xfrm>
+          <a:prstGeom prst="rect">
+            <a:avLst/>
+          </a:prstGeom>
+        </p:spPr>
+      </p:pic>
+      <p:pic>
+        <p:nvPicPr>
+          <p:cNvPr id="42" name="Graphic 41" descr="Seaweed with solid fill">
+            <a:extLst>
+              <a:ext uri="{FF2B5EF4-FFF2-40B4-BE49-F238E27FC236}">
+                <a16:creationId xmlns:a16="http://schemas.microsoft.com/office/drawing/2014/main" id="{69BBDDDE-EE91-C14F-8C54-C12C20359396}"/>
+              </a:ext>
+            </a:extLst>
+          </p:cNvPr>
+          <p:cNvPicPr>
+            <a:picLocks noChangeAspect="1"/>
+          </p:cNvPicPr>
+          <p:nvPr/>
+        </p:nvPicPr>
+        <p:blipFill>
+          <a:blip r:embed="rId10">
+            <a:extLst>
+              <a:ext uri="{96DAC541-7B7A-43D3-8B79-37D633B846F1}">
+                <asvg:svgBlip xmlns:asvg="http://schemas.microsoft.com/office/drawing/2016/SVG/main" r:embed="rId11"/>
+              </a:ext>
+            </a:extLst>
+          </a:blip>
+          <a:stretch>
+            <a:fillRect/>
+          </a:stretch>
+        </p:blipFill>
+        <p:spPr>
+          <a:xfrm>
+            <a:off x="3423538" y="25865080"/>
+            <a:ext cx="914400" cy="914400"/>
+          </a:xfrm>
+          <a:prstGeom prst="rect">
+            <a:avLst/>
+          </a:prstGeom>
+        </p:spPr>
+      </p:pic>
+      <p:pic>
+        <p:nvPicPr>
+          <p:cNvPr id="44" name="Graphic 43" descr="Coral with solid fill">
+            <a:extLst>
+              <a:ext uri="{FF2B5EF4-FFF2-40B4-BE49-F238E27FC236}">
+                <a16:creationId xmlns:a16="http://schemas.microsoft.com/office/drawing/2014/main" id="{CF878804-4CE0-FFDC-1637-0E935C20CE7D}"/>
+              </a:ext>
+            </a:extLst>
+          </p:cNvPr>
+          <p:cNvPicPr>
+            <a:picLocks noChangeAspect="1"/>
+          </p:cNvPicPr>
+          <p:nvPr/>
+        </p:nvPicPr>
+        <p:blipFill>
+          <a:blip r:embed="rId12">
+            <a:extLst>
+              <a:ext uri="{96DAC541-7B7A-43D3-8B79-37D633B846F1}">
+                <asvg:svgBlip xmlns:asvg="http://schemas.microsoft.com/office/drawing/2016/SVG/main" r:embed="rId13"/>
+              </a:ext>
+            </a:extLst>
+          </a:blip>
+          <a:stretch>
+            <a:fillRect/>
+          </a:stretch>
+        </p:blipFill>
+        <p:spPr>
+          <a:xfrm>
+            <a:off x="1616062" y="25865080"/>
+            <a:ext cx="914400" cy="914400"/>
+          </a:xfrm>
+          <a:prstGeom prst="rect">
+            <a:avLst/>
+          </a:prstGeom>
+        </p:spPr>
+      </p:pic>
+      <p:pic>
+        <p:nvPicPr>
+          <p:cNvPr id="46" name="Graphic 45" descr="Conch with solid fill">
+            <a:extLst>
+              <a:ext uri="{FF2B5EF4-FFF2-40B4-BE49-F238E27FC236}">
+                <a16:creationId xmlns:a16="http://schemas.microsoft.com/office/drawing/2014/main" id="{A8F77CA6-635F-6913-6DE4-FFBD7D57715A}"/>
+              </a:ext>
+            </a:extLst>
+          </p:cNvPr>
+          <p:cNvPicPr>
+            <a:picLocks noChangeAspect="1"/>
+          </p:cNvPicPr>
+          <p:nvPr/>
+        </p:nvPicPr>
+        <p:blipFill>
+          <a:blip r:embed="rId14">
+            <a:extLst>
+              <a:ext uri="{96DAC541-7B7A-43D3-8B79-37D633B846F1}">
+                <asvg:svgBlip xmlns:asvg="http://schemas.microsoft.com/office/drawing/2016/SVG/main" r:embed="rId15"/>
+              </a:ext>
+            </a:extLst>
+          </a:blip>
+          <a:stretch>
+            <a:fillRect/>
+          </a:stretch>
+        </p:blipFill>
+        <p:spPr>
+          <a:xfrm rot="17228839">
+            <a:off x="854062" y="26022208"/>
+            <a:ext cx="914400" cy="914400"/>
+          </a:xfrm>
+          <a:prstGeom prst="rect">
+            <a:avLst/>
+          </a:prstGeom>
+        </p:spPr>
+      </p:pic>
+      <p:pic>
+        <p:nvPicPr>
+          <p:cNvPr id="48" name="Graphic 47" descr="Fish with solid fill">
+            <a:extLst>
+              <a:ext uri="{FF2B5EF4-FFF2-40B4-BE49-F238E27FC236}">
+                <a16:creationId xmlns:a16="http://schemas.microsoft.com/office/drawing/2014/main" id="{B7931663-18AE-9210-9130-16AF7CDEFA7A}"/>
+              </a:ext>
+            </a:extLst>
+          </p:cNvPr>
+          <p:cNvPicPr>
+            <a:picLocks noChangeAspect="1"/>
+          </p:cNvPicPr>
+          <p:nvPr/>
+        </p:nvPicPr>
+        <p:blipFill>
+          <a:blip r:embed="rId16">
+            <a:extLst>
+              <a:ext uri="{96DAC541-7B7A-43D3-8B79-37D633B846F1}">
+                <asvg:svgBlip xmlns:asvg="http://schemas.microsoft.com/office/drawing/2016/SVG/main" r:embed="rId17"/>
+              </a:ext>
+            </a:extLst>
+          </a:blip>
+          <a:stretch>
+            <a:fillRect/>
+          </a:stretch>
+        </p:blipFill>
+        <p:spPr>
+          <a:xfrm>
+            <a:off x="3595876" y="19177681"/>
+            <a:ext cx="742062" cy="742062"/>
+          </a:xfrm>
+          <a:prstGeom prst="rect">
+            <a:avLst/>
+          </a:prstGeom>
+        </p:spPr>
+      </p:pic>
+      <p:pic>
+        <p:nvPicPr>
+          <p:cNvPr id="50" name="Graphic 49" descr="Seahorse with solid fill">
+            <a:extLst>
+              <a:ext uri="{FF2B5EF4-FFF2-40B4-BE49-F238E27FC236}">
+                <a16:creationId xmlns:a16="http://schemas.microsoft.com/office/drawing/2014/main" id="{13A8E410-7A13-1077-6DE3-001309CD0D60}"/>
+              </a:ext>
+            </a:extLst>
+          </p:cNvPr>
+          <p:cNvPicPr>
+            <a:picLocks noChangeAspect="1"/>
+          </p:cNvPicPr>
+          <p:nvPr/>
+        </p:nvPicPr>
+        <p:blipFill>
+          <a:blip r:embed="rId18">
+            <a:extLst>
+              <a:ext uri="{96DAC541-7B7A-43D3-8B79-37D633B846F1}">
+                <asvg:svgBlip xmlns:asvg="http://schemas.microsoft.com/office/drawing/2016/SVG/main" r:embed="rId19"/>
+              </a:ext>
+            </a:extLst>
+          </a:blip>
+          <a:stretch>
+            <a:fillRect/>
+          </a:stretch>
+        </p:blipFill>
+        <p:spPr>
+          <a:xfrm>
+            <a:off x="383248" y="20447000"/>
+            <a:ext cx="571500" cy="571500"/>
+          </a:xfrm>
+          <a:prstGeom prst="rect">
+            <a:avLst/>
+          </a:prstGeom>
+        </p:spPr>
+      </p:pic>
+      <p:pic>
+        <p:nvPicPr>
+          <p:cNvPr id="52" name="Graphic 51" descr="Clownfish with solid fill">
+            <a:extLst>
+              <a:ext uri="{FF2B5EF4-FFF2-40B4-BE49-F238E27FC236}">
+                <a16:creationId xmlns:a16="http://schemas.microsoft.com/office/drawing/2014/main" id="{F4BF2453-FAF6-0DC6-38E5-42C634B38B14}"/>
+              </a:ext>
+            </a:extLst>
+          </p:cNvPr>
+          <p:cNvPicPr>
+            <a:picLocks noChangeAspect="1"/>
+          </p:cNvPicPr>
+          <p:nvPr/>
+        </p:nvPicPr>
+        <p:blipFill>
+          <a:blip r:embed="rId20">
+            <a:extLst>
+              <a:ext uri="{96DAC541-7B7A-43D3-8B79-37D633B846F1}">
+                <asvg:svgBlip xmlns:asvg="http://schemas.microsoft.com/office/drawing/2016/SVG/main" r:embed="rId21"/>
+              </a:ext>
+            </a:extLst>
+          </a:blip>
+          <a:stretch>
+            <a:fillRect/>
+          </a:stretch>
+        </p:blipFill>
+        <p:spPr>
+          <a:xfrm>
+            <a:off x="468393" y="6458247"/>
+            <a:ext cx="577553" cy="577553"/>
+          </a:xfrm>
+          <a:prstGeom prst="rect">
+            <a:avLst/>
+          </a:prstGeom>
+        </p:spPr>
+      </p:pic>
+      <p:pic>
+        <p:nvPicPr>
+          <p:cNvPr id="54" name="Graphic 53" descr="Crab with solid fill">
+            <a:extLst>
+              <a:ext uri="{FF2B5EF4-FFF2-40B4-BE49-F238E27FC236}">
+                <a16:creationId xmlns:a16="http://schemas.microsoft.com/office/drawing/2014/main" id="{C07D74BD-0611-F05B-FC72-2094BF68F75B}"/>
+              </a:ext>
+            </a:extLst>
+          </p:cNvPr>
+          <p:cNvPicPr>
+            <a:picLocks noChangeAspect="1"/>
+          </p:cNvPicPr>
+          <p:nvPr/>
+        </p:nvPicPr>
+        <p:blipFill>
+          <a:blip r:embed="rId22">
+            <a:extLst>
+              <a:ext uri="{96DAC541-7B7A-43D3-8B79-37D633B846F1}">
+                <asvg:svgBlip xmlns:asvg="http://schemas.microsoft.com/office/drawing/2016/SVG/main" r:embed="rId23"/>
+              </a:ext>
+            </a:extLst>
+          </a:blip>
+          <a:stretch>
+            <a:fillRect/>
+          </a:stretch>
+        </p:blipFill>
+        <p:spPr>
+          <a:xfrm>
+            <a:off x="8776718" y="3156830"/>
+            <a:ext cx="914400" cy="914400"/>
+          </a:xfrm>
+          <a:prstGeom prst="rect">
+            <a:avLst/>
+          </a:prstGeom>
+        </p:spPr>
+      </p:pic>
+      <p:pic>
+        <p:nvPicPr>
+          <p:cNvPr id="55" name="Graphic 54" descr="Seahorse with solid fill">
+            <a:extLst>
+              <a:ext uri="{FF2B5EF4-FFF2-40B4-BE49-F238E27FC236}">
+                <a16:creationId xmlns:a16="http://schemas.microsoft.com/office/drawing/2014/main" id="{2B0F52B5-502F-9A08-D853-7F085D8A48EA}"/>
+              </a:ext>
+            </a:extLst>
+          </p:cNvPr>
+          <p:cNvPicPr>
+            <a:picLocks noChangeAspect="1"/>
+          </p:cNvPicPr>
+          <p:nvPr/>
+        </p:nvPicPr>
+        <p:blipFill>
+          <a:blip r:embed="rId24">
+            <a:extLst>
+              <a:ext uri="{96DAC541-7B7A-43D3-8B79-37D633B846F1}">
+                <asvg:svgBlip xmlns:asvg="http://schemas.microsoft.com/office/drawing/2016/SVG/main" r:embed="rId25"/>
+              </a:ext>
+            </a:extLst>
+          </a:blip>
+          <a:stretch>
+            <a:fillRect/>
+          </a:stretch>
+        </p:blipFill>
+        <p:spPr>
+          <a:xfrm>
+            <a:off x="-2770" y="20566990"/>
+            <a:ext cx="683429" cy="683429"/>
+          </a:xfrm>
+          <a:prstGeom prst="rect">
+            <a:avLst/>
+          </a:prstGeom>
+        </p:spPr>
+      </p:pic>
+      <p:pic>
+        <p:nvPicPr>
+          <p:cNvPr id="56" name="Graphic 55" descr="Fish with solid fill">
+            <a:extLst>
+              <a:ext uri="{FF2B5EF4-FFF2-40B4-BE49-F238E27FC236}">
+                <a16:creationId xmlns:a16="http://schemas.microsoft.com/office/drawing/2014/main" id="{1D820980-9DE2-767B-F8F9-AB0B2D562879}"/>
+              </a:ext>
+            </a:extLst>
+          </p:cNvPr>
+          <p:cNvPicPr>
+            <a:picLocks noChangeAspect="1"/>
+          </p:cNvPicPr>
+          <p:nvPr/>
+        </p:nvPicPr>
+        <p:blipFill>
+          <a:blip r:embed="rId16">
+            <a:extLst>
+              <a:ext uri="{96DAC541-7B7A-43D3-8B79-37D633B846F1}">
+                <asvg:svgBlip xmlns:asvg="http://schemas.microsoft.com/office/drawing/2016/SVG/main" r:embed="rId17"/>
+              </a:ext>
+            </a:extLst>
+          </a:blip>
+          <a:stretch>
+            <a:fillRect/>
+          </a:stretch>
+        </p:blipFill>
+        <p:spPr>
+          <a:xfrm flipH="1">
+            <a:off x="417205" y="18918993"/>
+            <a:ext cx="746365" cy="742062"/>
+          </a:xfrm>
+          <a:prstGeom prst="rect">
+            <a:avLst/>
+          </a:prstGeom>
+        </p:spPr>
+      </p:pic>
+      <p:pic>
+        <p:nvPicPr>
+          <p:cNvPr id="57" name="Graphic 56" descr="Fish with solid fill">
+            <a:extLst>
+              <a:ext uri="{FF2B5EF4-FFF2-40B4-BE49-F238E27FC236}">
+                <a16:creationId xmlns:a16="http://schemas.microsoft.com/office/drawing/2014/main" id="{2C62BBC9-5D2D-71FA-EE8D-71986AF31EC4}"/>
+              </a:ext>
+            </a:extLst>
+          </p:cNvPr>
+          <p:cNvPicPr>
+            <a:picLocks noChangeAspect="1"/>
+          </p:cNvPicPr>
+          <p:nvPr/>
+        </p:nvPicPr>
+        <p:blipFill>
+          <a:blip r:embed="rId26">
+            <a:extLst>
+              <a:ext uri="{96DAC541-7B7A-43D3-8B79-37D633B846F1}">
+                <asvg:svgBlip xmlns:asvg="http://schemas.microsoft.com/office/drawing/2016/SVG/main" r:embed="rId27"/>
+              </a:ext>
+            </a:extLst>
+          </a:blip>
+          <a:stretch>
+            <a:fillRect/>
+          </a:stretch>
+        </p:blipFill>
+        <p:spPr>
+          <a:xfrm flipH="1">
+            <a:off x="166224" y="19268941"/>
+            <a:ext cx="511019" cy="508073"/>
+          </a:xfrm>
+          <a:prstGeom prst="rect">
+            <a:avLst/>
+          </a:prstGeom>
+        </p:spPr>
+      </p:pic>
+      <p:pic>
+        <p:nvPicPr>
+          <p:cNvPr id="58" name="Graphic 57" descr="Fish with solid fill">
+            <a:extLst>
+              <a:ext uri="{FF2B5EF4-FFF2-40B4-BE49-F238E27FC236}">
+                <a16:creationId xmlns:a16="http://schemas.microsoft.com/office/drawing/2014/main" id="{4E82DE10-4049-E690-8818-1E7071E67355}"/>
+              </a:ext>
+            </a:extLst>
+          </p:cNvPr>
+          <p:cNvPicPr>
+            <a:picLocks noChangeAspect="1"/>
+          </p:cNvPicPr>
+          <p:nvPr/>
+        </p:nvPicPr>
+        <p:blipFill>
+          <a:blip r:embed="rId16">
+            <a:extLst>
+              <a:ext uri="{96DAC541-7B7A-43D3-8B79-37D633B846F1}">
+                <asvg:svgBlip xmlns:asvg="http://schemas.microsoft.com/office/drawing/2016/SVG/main" r:embed="rId17"/>
+              </a:ext>
+            </a:extLst>
+          </a:blip>
+          <a:stretch>
+            <a:fillRect/>
+          </a:stretch>
+        </p:blipFill>
+        <p:spPr>
+          <a:xfrm>
+            <a:off x="2966338" y="12062694"/>
+            <a:ext cx="914399" cy="914399"/>
+          </a:xfrm>
+          <a:prstGeom prst="rect">
+            <a:avLst/>
+          </a:prstGeom>
+        </p:spPr>
+      </p:pic>
+      <p:pic>
+        <p:nvPicPr>
+          <p:cNvPr id="59" name="Graphic 58" descr="Fish with solid fill">
+            <a:extLst>
+              <a:ext uri="{FF2B5EF4-FFF2-40B4-BE49-F238E27FC236}">
+                <a16:creationId xmlns:a16="http://schemas.microsoft.com/office/drawing/2014/main" id="{8B989804-E3EF-9336-7FCC-E46D785AB924}"/>
+              </a:ext>
+            </a:extLst>
+          </p:cNvPr>
+          <p:cNvPicPr>
+            <a:picLocks noChangeAspect="1"/>
+          </p:cNvPicPr>
+          <p:nvPr/>
+        </p:nvPicPr>
+        <p:blipFill>
+          <a:blip r:embed="rId28">
+            <a:extLst>
+              <a:ext uri="{96DAC541-7B7A-43D3-8B79-37D633B846F1}">
+                <asvg:svgBlip xmlns:asvg="http://schemas.microsoft.com/office/drawing/2016/SVG/main" r:embed="rId29"/>
+              </a:ext>
+            </a:extLst>
+          </a:blip>
+          <a:stretch>
+            <a:fillRect/>
+          </a:stretch>
+        </p:blipFill>
+        <p:spPr>
+          <a:xfrm>
+            <a:off x="3639285" y="11987279"/>
+            <a:ext cx="497606" cy="497606"/>
+          </a:xfrm>
+          <a:prstGeom prst="rect">
+            <a:avLst/>
+          </a:prstGeom>
+        </p:spPr>
+      </p:pic>
+      <p:pic>
+        <p:nvPicPr>
+          <p:cNvPr id="61" name="Graphic 60" descr="Clownfish with solid fill">
+            <a:extLst>
+              <a:ext uri="{FF2B5EF4-FFF2-40B4-BE49-F238E27FC236}">
+                <a16:creationId xmlns:a16="http://schemas.microsoft.com/office/drawing/2014/main" id="{B8541940-BB05-CFF4-14B9-F600FC8FD50F}"/>
+              </a:ext>
+            </a:extLst>
+          </p:cNvPr>
+          <p:cNvPicPr>
+            <a:picLocks noChangeAspect="1"/>
+          </p:cNvPicPr>
+          <p:nvPr/>
+        </p:nvPicPr>
+        <p:blipFill>
+          <a:blip r:embed="rId30">
+            <a:extLst>
+              <a:ext uri="{96DAC541-7B7A-43D3-8B79-37D633B846F1}">
+                <asvg:svgBlip xmlns:asvg="http://schemas.microsoft.com/office/drawing/2016/SVG/main" r:embed="rId31"/>
+              </a:ext>
+            </a:extLst>
+          </a:blip>
+          <a:stretch>
+            <a:fillRect/>
+          </a:stretch>
+        </p:blipFill>
+        <p:spPr>
+          <a:xfrm>
+            <a:off x="207065" y="6747023"/>
+            <a:ext cx="362002" cy="362002"/>
+          </a:xfrm>
+          <a:prstGeom prst="rect">
+            <a:avLst/>
+          </a:prstGeom>
+        </p:spPr>
+      </p:pic>
     </p:spTree>
     <p:extLst>
       <p:ext uri="{BB962C8B-B14F-4D97-AF65-F5344CB8AC3E}">
@@ -3408,7 +5143,7 @@
 <file path=ppt/theme/theme1.xml><?xml version="1.0" encoding="utf-8"?>
 <a:theme xmlns:a="http://schemas.openxmlformats.org/drawingml/2006/main" name="Office Theme">
   <a:themeElements>
-    <a:clrScheme name="Office">
+    <a:clrScheme name="Custom 1">
       <a:dk1>
         <a:sysClr val="windowText" lastClr="000000"/>
       </a:dk1>
@@ -3422,22 +5157,22 @@
         <a:srgbClr val="E8E8E8"/>
       </a:lt2>
       <a:accent1>
-        <a:srgbClr val="156082"/>
+        <a:srgbClr val="00C6BB"/>
       </a:accent1>
       <a:accent2>
-        <a:srgbClr val="E97132"/>
+        <a:srgbClr val="EFB251"/>
       </a:accent2>
       <a:accent3>
-        <a:srgbClr val="196B24"/>
+        <a:srgbClr val="6FEBA0"/>
       </a:accent3>
       <a:accent4>
-        <a:srgbClr val="0F9ED5"/>
+        <a:srgbClr val="636363"/>
       </a:accent4>
       <a:accent5>
-        <a:srgbClr val="A02B93"/>
+        <a:srgbClr val="7FCB84"/>
       </a:accent5>
       <a:accent6>
-        <a:srgbClr val="4EA72E"/>
+        <a:srgbClr val="004C47"/>
       </a:accent6>
       <a:hlink>
         <a:srgbClr val="467886"/>
@@ -3446,7 +5181,7 @@
         <a:srgbClr val="96607D"/>
       </a:folHlink>
     </a:clrScheme>
-    <a:fontScheme name="Office">
+    <a:fontScheme name="Office Theme">
       <a:majorFont>
         <a:latin typeface="Aptos Display" panose="02110004020202020204"/>
         <a:ea typeface=""/>
@@ -3552,7 +5287,7 @@
         <a:font script="Tfng" typeface="Ebrima"/>
       </a:minorFont>
     </a:fontScheme>
-    <a:fmtScheme name="Office">
+    <a:fmtScheme name="Office Theme">
       <a:fillStyleLst>
         <a:solidFill>
           <a:schemeClr val="phClr"/>

--- a/krakenkoffee/design/kraken_koffee_design.pptx
+++ b/krakenkoffee/design/kraken_koffee_design.pptx
@@ -5127,6 +5127,89 @@
           </a:prstGeom>
         </p:spPr>
       </p:pic>
+      <p:sp>
+        <p:nvSpPr>
+          <p:cNvPr id="4" name="TextBox 3">
+            <a:extLst>
+              <a:ext uri="{FF2B5EF4-FFF2-40B4-BE49-F238E27FC236}">
+                <a16:creationId xmlns:a16="http://schemas.microsoft.com/office/drawing/2014/main" id="{8CCA84B9-7725-2F3D-5ACF-321424D79019}"/>
+              </a:ext>
+            </a:extLst>
+          </p:cNvPr>
+          <p:cNvSpPr txBox="1"/>
+          <p:nvPr/>
+        </p:nvSpPr>
+        <p:spPr>
+          <a:xfrm>
+            <a:off x="8953500" y="27019331"/>
+            <a:ext cx="3371850" cy="369332"/>
+          </a:xfrm>
+          <a:prstGeom prst="rect">
+            <a:avLst/>
+          </a:prstGeom>
+          <a:noFill/>
+        </p:spPr>
+        <p:txBody>
+          <a:bodyPr wrap="square" rtlCol="0">
+            <a:spAutoFit/>
+          </a:bodyPr>
+          <a:lstStyle/>
+          <a:p>
+            <a:pPr algn="r"/>
+            <a:r>
+              <a:rPr lang="en-FI" sz="900" spc="300" dirty="0">
+                <a:ln w="0">
+                  <a:noFill/>
+                </a:ln>
+                <a:gradFill flip="none" rotWithShape="1">
+                  <a:gsLst>
+                    <a:gs pos="50000">
+                      <a:srgbClr val="60B687"/>
+                    </a:gs>
+                    <a:gs pos="0">
+                      <a:srgbClr val="007A72"/>
+                    </a:gs>
+                    <a:gs pos="100000">
+                      <a:srgbClr val="EBA129"/>
+                    </a:gs>
+                  </a:gsLst>
+                  <a:lin ang="0" scaled="1"/>
+                  <a:tileRect/>
+                </a:gradFill>
+                <a:latin typeface="Bahnschrift SemiCondensed" panose="020B0502040204020203" pitchFamily="34" charset="0"/>
+              </a:rPr>
+              <a:t>Developed by Toni Sundqvist</a:t>
+            </a:r>
+          </a:p>
+          <a:p>
+            <a:pPr algn="r"/>
+            <a:r>
+              <a:rPr lang="en-FI" sz="900" spc="300" dirty="0">
+                <a:ln w="0">
+                  <a:noFill/>
+                </a:ln>
+                <a:gradFill flip="none" rotWithShape="1">
+                  <a:gsLst>
+                    <a:gs pos="50000">
+                      <a:srgbClr val="60B687"/>
+                    </a:gs>
+                    <a:gs pos="0">
+                      <a:srgbClr val="007A72"/>
+                    </a:gs>
+                    <a:gs pos="100000">
+                      <a:srgbClr val="EBA129"/>
+                    </a:gs>
+                  </a:gsLst>
+                  <a:lin ang="0" scaled="1"/>
+                  <a:tileRect/>
+                </a:gradFill>
+                <a:latin typeface="Bahnschrift SemiCondensed" panose="020B0502040204020203" pitchFamily="34" charset="0"/>
+              </a:rPr>
+              <a:t>Project by Sean Chandler</a:t>
+            </a:r>
+          </a:p>
+        </p:txBody>
+      </p:sp>
     </p:spTree>
     <p:extLst>
       <p:ext uri="{BB962C8B-B14F-4D97-AF65-F5344CB8AC3E}">
